--- a/AI-Presentation.pptx
+++ b/AI-Presentation.pptx
@@ -4,6 +4,9 @@
   <p:sldMasterIdLst>
     <p:sldMasterId id="2147483648" r:id="rId1"/>
   </p:sldMasterIdLst>
+  <p:notesMasterIdLst>
+    <p:notesMasterId r:id="rId24"/>
+  </p:notesMasterIdLst>
   <p:sldIdLst>
     <p:sldId id="256" r:id="rId2"/>
     <p:sldId id="257" r:id="rId3"/>
@@ -18,14 +21,15 @@
     <p:sldId id="265" r:id="rId12"/>
     <p:sldId id="268" r:id="rId13"/>
     <p:sldId id="269" r:id="rId14"/>
-    <p:sldId id="270" r:id="rId15"/>
-    <p:sldId id="271" r:id="rId16"/>
-    <p:sldId id="272" r:id="rId17"/>
-    <p:sldId id="273" r:id="rId18"/>
-    <p:sldId id="264" r:id="rId19"/>
-    <p:sldId id="275" r:id="rId20"/>
-    <p:sldId id="274" r:id="rId21"/>
+    <p:sldId id="271" r:id="rId15"/>
+    <p:sldId id="272" r:id="rId16"/>
+    <p:sldId id="273" r:id="rId17"/>
+    <p:sldId id="264" r:id="rId18"/>
+    <p:sldId id="275" r:id="rId19"/>
+    <p:sldId id="274" r:id="rId20"/>
+    <p:sldId id="270" r:id="rId21"/>
     <p:sldId id="276" r:id="rId22"/>
+    <p:sldId id="277" r:id="rId23"/>
   </p:sldIdLst>
   <p:sldSz cx="12192000" cy="6858000"/>
   <p:notesSz cx="6858000" cy="9144000"/>
@@ -135,7 +139,7 @@
 <file path=ppt/revisionInfo.xml><?xml version="1.0" encoding="utf-8"?>
 <p1510:revInfo xmlns:a="http://schemas.openxmlformats.org/drawingml/2006/main" xmlns:r="http://schemas.openxmlformats.org/officeDocument/2006/relationships" xmlns:p1510="http://schemas.microsoft.com/office/powerpoint/2015/10/main">
   <p1510:revLst>
-    <p1510:client id="{8F61E714-1212-4F79-8F08-CFA093CF4C5F}" v="686" dt="2026-06-26T13:22:18.570"/>
+    <p1510:client id="{8F61E714-1212-4F79-8F08-CFA093CF4C5F}" v="721" dt="2026-06-27T20:20:41.980"/>
   </p1510:revLst>
 </p1510:revInfo>
 </file>
@@ -145,7 +149,7 @@
   <pc:docChgLst>
     <pc:chgData name="Germena Stefania" userId="848a3578-c669-42d9-960b-fb42db2e6943" providerId="ADAL" clId="{0EF7214D-E59F-4D86-9B6A-2134479533EA}"/>
     <pc:docChg chg="undo custSel addSld delSld modSld sldOrd modMainMaster">
-      <pc:chgData name="Germena Stefania" userId="848a3578-c669-42d9-960b-fb42db2e6943" providerId="ADAL" clId="{0EF7214D-E59F-4D86-9B6A-2134479533EA}" dt="2026-06-26T13:22:18.570" v="2883"/>
+      <pc:chgData name="Germena Stefania" userId="848a3578-c669-42d9-960b-fb42db2e6943" providerId="ADAL" clId="{0EF7214D-E59F-4D86-9B6A-2134479533EA}" dt="2026-06-27T17:46:24.686" v="3112" actId="1076"/>
       <pc:docMkLst>
         <pc:docMk/>
       </pc:docMkLst>
@@ -155,22 +159,6 @@
           <pc:docMk/>
           <pc:sldMk cId="389328993" sldId="256"/>
         </pc:sldMkLst>
-        <pc:spChg chg="del">
-          <ac:chgData name="Germena Stefania" userId="848a3578-c669-42d9-960b-fb42db2e6943" providerId="ADAL" clId="{0EF7214D-E59F-4D86-9B6A-2134479533EA}" dt="2026-06-25T16:38:46.083" v="1" actId="478"/>
-          <ac:spMkLst>
-            <pc:docMk/>
-            <pc:sldMk cId="389328993" sldId="256"/>
-            <ac:spMk id="2" creationId="{0C34E096-91E3-FAC6-B764-9188255352A1}"/>
-          </ac:spMkLst>
-        </pc:spChg>
-        <pc:spChg chg="del">
-          <ac:chgData name="Germena Stefania" userId="848a3578-c669-42d9-960b-fb42db2e6943" providerId="ADAL" clId="{0EF7214D-E59F-4D86-9B6A-2134479533EA}" dt="2026-06-25T16:38:47.622" v="2" actId="478"/>
-          <ac:spMkLst>
-            <pc:docMk/>
-            <pc:sldMk cId="389328993" sldId="256"/>
-            <ac:spMk id="3" creationId="{0EC8EFE5-8D3F-C857-C7F3-B06A374F33C7}"/>
-          </ac:spMkLst>
-        </pc:spChg>
         <pc:spChg chg="add mod">
           <ac:chgData name="Germena Stefania" userId="848a3578-c669-42d9-960b-fb42db2e6943" providerId="ADAL" clId="{0EF7214D-E59F-4D86-9B6A-2134479533EA}" dt="2026-06-26T09:47:44.454" v="1062" actId="207"/>
           <ac:spMkLst>
@@ -210,22 +198,6 @@
           <pc:docMk/>
           <pc:sldMk cId="2062835970" sldId="257"/>
         </pc:sldMkLst>
-        <pc:spChg chg="del">
-          <ac:chgData name="Germena Stefania" userId="848a3578-c669-42d9-960b-fb42db2e6943" providerId="ADAL" clId="{0EF7214D-E59F-4D86-9B6A-2134479533EA}" dt="2026-06-25T16:43:48.363" v="59" actId="478"/>
-          <ac:spMkLst>
-            <pc:docMk/>
-            <pc:sldMk cId="2062835970" sldId="257"/>
-            <ac:spMk id="2" creationId="{76EF814C-A7EB-F5FE-DCA1-5D5EBCBDE713}"/>
-          </ac:spMkLst>
-        </pc:spChg>
-        <pc:spChg chg="del">
-          <ac:chgData name="Germena Stefania" userId="848a3578-c669-42d9-960b-fb42db2e6943" providerId="ADAL" clId="{0EF7214D-E59F-4D86-9B6A-2134479533EA}" dt="2026-06-25T16:43:47.748" v="58" actId="478"/>
-          <ac:spMkLst>
-            <pc:docMk/>
-            <pc:sldMk cId="2062835970" sldId="257"/>
-            <ac:spMk id="3" creationId="{840F7312-C43D-DD64-49EC-4729A723AFDA}"/>
-          </ac:spMkLst>
-        </pc:spChg>
         <pc:spChg chg="add mod">
           <ac:chgData name="Germena Stefania" userId="848a3578-c669-42d9-960b-fb42db2e6943" providerId="ADAL" clId="{0EF7214D-E59F-4D86-9B6A-2134479533EA}" dt="2026-06-25T16:44:43.261" v="84" actId="403"/>
           <ac:spMkLst>
@@ -259,38 +231,22 @@
           </ac:spMkLst>
         </pc:spChg>
       </pc:sldChg>
-      <pc:sldChg chg="addSp delSp modSp new mod setBg modAnim">
-        <pc:chgData name="Germena Stefania" userId="848a3578-c669-42d9-960b-fb42db2e6943" providerId="ADAL" clId="{0EF7214D-E59F-4D86-9B6A-2134479533EA}" dt="2026-06-26T13:20:31.325" v="2841"/>
+      <pc:sldChg chg="addSp delSp modSp new mod setBg delAnim modAnim">
+        <pc:chgData name="Germena Stefania" userId="848a3578-c669-42d9-960b-fb42db2e6943" providerId="ADAL" clId="{0EF7214D-E59F-4D86-9B6A-2134479533EA}" dt="2026-06-27T16:14:38.565" v="2892" actId="1076"/>
         <pc:sldMkLst>
           <pc:docMk/>
           <pc:sldMk cId="2398210279" sldId="258"/>
         </pc:sldMkLst>
-        <pc:spChg chg="del">
-          <ac:chgData name="Germena Stefania" userId="848a3578-c669-42d9-960b-fb42db2e6943" providerId="ADAL" clId="{0EF7214D-E59F-4D86-9B6A-2134479533EA}" dt="2026-06-25T16:50:43.827" v="139" actId="478"/>
-          <ac:spMkLst>
-            <pc:docMk/>
-            <pc:sldMk cId="2398210279" sldId="258"/>
-            <ac:spMk id="2" creationId="{BB217319-D68D-C897-86AD-5658BD6A6B30}"/>
-          </ac:spMkLst>
-        </pc:spChg>
         <pc:spChg chg="add mod">
-          <ac:chgData name="Germena Stefania" userId="848a3578-c669-42d9-960b-fb42db2e6943" providerId="ADAL" clId="{0EF7214D-E59F-4D86-9B6A-2134479533EA}" dt="2026-06-26T08:02:48.612" v="309" actId="313"/>
+          <ac:chgData name="Germena Stefania" userId="848a3578-c669-42d9-960b-fb42db2e6943" providerId="ADAL" clId="{0EF7214D-E59F-4D86-9B6A-2134479533EA}" dt="2026-06-27T16:14:38.565" v="2892" actId="1076"/>
           <ac:spMkLst>
             <pc:docMk/>
             <pc:sldMk cId="2398210279" sldId="258"/>
             <ac:spMk id="2" creationId="{CC432F07-51BF-E87A-B678-467084376C87}"/>
           </ac:spMkLst>
         </pc:spChg>
-        <pc:spChg chg="del">
-          <ac:chgData name="Germena Stefania" userId="848a3578-c669-42d9-960b-fb42db2e6943" providerId="ADAL" clId="{0EF7214D-E59F-4D86-9B6A-2134479533EA}" dt="2026-06-25T16:50:41.197" v="138" actId="478"/>
-          <ac:spMkLst>
-            <pc:docMk/>
-            <pc:sldMk cId="2398210279" sldId="258"/>
-            <ac:spMk id="3" creationId="{2623E602-D07B-5988-AA0C-573D1797412E}"/>
-          </ac:spMkLst>
-        </pc:spChg>
-        <pc:spChg chg="add mod">
-          <ac:chgData name="Germena Stefania" userId="848a3578-c669-42d9-960b-fb42db2e6943" providerId="ADAL" clId="{0EF7214D-E59F-4D86-9B6A-2134479533EA}" dt="2026-06-26T07:59:05.384" v="269" actId="1076"/>
+        <pc:spChg chg="add del mod">
+          <ac:chgData name="Germena Stefania" userId="848a3578-c669-42d9-960b-fb42db2e6943" providerId="ADAL" clId="{0EF7214D-E59F-4D86-9B6A-2134479533EA}" dt="2026-06-27T16:14:33.534" v="2890" actId="478"/>
           <ac:spMkLst>
             <pc:docMk/>
             <pc:sldMk cId="2398210279" sldId="258"/>
@@ -298,7 +254,7 @@
           </ac:spMkLst>
         </pc:spChg>
         <pc:spChg chg="add mod">
-          <ac:chgData name="Germena Stefania" userId="848a3578-c669-42d9-960b-fb42db2e6943" providerId="ADAL" clId="{0EF7214D-E59F-4D86-9B6A-2134479533EA}" dt="2026-06-26T07:59:07.113" v="270" actId="1076"/>
+          <ac:chgData name="Germena Stefania" userId="848a3578-c669-42d9-960b-fb42db2e6943" providerId="ADAL" clId="{0EF7214D-E59F-4D86-9B6A-2134479533EA}" dt="2026-06-27T16:14:36.973" v="2891" actId="1076"/>
           <ac:spMkLst>
             <pc:docMk/>
             <pc:sldMk cId="2398210279" sldId="258"/>
@@ -417,11 +373,19 @@
         </pc:spChg>
       </pc:sldChg>
       <pc:sldChg chg="addSp delSp modSp add mod delAnim modAnim">
-        <pc:chgData name="Germena Stefania" userId="848a3578-c669-42d9-960b-fb42db2e6943" providerId="ADAL" clId="{0EF7214D-E59F-4D86-9B6A-2134479533EA}" dt="2026-06-26T13:20:39.366" v="2847"/>
+        <pc:chgData name="Germena Stefania" userId="848a3578-c669-42d9-960b-fb42db2e6943" providerId="ADAL" clId="{0EF7214D-E59F-4D86-9B6A-2134479533EA}" dt="2026-06-27T16:15:18.967" v="2905"/>
         <pc:sldMkLst>
           <pc:docMk/>
           <pc:sldMk cId="3547205842" sldId="261"/>
         </pc:sldMkLst>
+        <pc:spChg chg="add mod">
+          <ac:chgData name="Germena Stefania" userId="848a3578-c669-42d9-960b-fb42db2e6943" providerId="ADAL" clId="{0EF7214D-E59F-4D86-9B6A-2134479533EA}" dt="2026-06-27T16:15:10.224" v="2900" actId="14100"/>
+          <ac:spMkLst>
+            <pc:docMk/>
+            <pc:sldMk cId="3547205842" sldId="261"/>
+            <ac:spMk id="2" creationId="{396BDDA5-063D-CC21-FE54-A1F27BA67A11}"/>
+          </ac:spMkLst>
+        </pc:spChg>
         <pc:spChg chg="del">
           <ac:chgData name="Germena Stefania" userId="848a3578-c669-42d9-960b-fb42db2e6943" providerId="ADAL" clId="{0EF7214D-E59F-4D86-9B6A-2134479533EA}" dt="2026-06-26T08:54:41.300" v="411" actId="478"/>
           <ac:spMkLst>
@@ -455,7 +419,7 @@
           </ac:spMkLst>
         </pc:spChg>
         <pc:spChg chg="mod">
-          <ac:chgData name="Germena Stefania" userId="848a3578-c669-42d9-960b-fb42db2e6943" providerId="ADAL" clId="{0EF7214D-E59F-4D86-9B6A-2134479533EA}" dt="2026-06-26T08:56:14.984" v="432" actId="1076"/>
+          <ac:chgData name="Germena Stefania" userId="848a3578-c669-42d9-960b-fb42db2e6943" providerId="ADAL" clId="{0EF7214D-E59F-4D86-9B6A-2134479533EA}" dt="2026-06-27T16:15:13.635" v="2902" actId="14100"/>
           <ac:spMkLst>
             <pc:docMk/>
             <pc:sldMk cId="3547205842" sldId="261"/>
@@ -463,7 +427,7 @@
           </ac:spMkLst>
         </pc:spChg>
         <pc:spChg chg="add mod">
-          <ac:chgData name="Germena Stefania" userId="848a3578-c669-42d9-960b-fb42db2e6943" providerId="ADAL" clId="{0EF7214D-E59F-4D86-9B6A-2134479533EA}" dt="2026-06-26T08:56:12.093" v="431" actId="1076"/>
+          <ac:chgData name="Germena Stefania" userId="848a3578-c669-42d9-960b-fb42db2e6943" providerId="ADAL" clId="{0EF7214D-E59F-4D86-9B6A-2134479533EA}" dt="2026-06-27T16:15:11.879" v="2901" actId="14100"/>
           <ac:spMkLst>
             <pc:docMk/>
             <pc:sldMk cId="3547205842" sldId="261"/>
@@ -472,7 +436,7 @@
         </pc:spChg>
       </pc:sldChg>
       <pc:sldChg chg="addSp delSp modSp add mod delAnim modAnim">
-        <pc:chgData name="Germena Stefania" userId="848a3578-c669-42d9-960b-fb42db2e6943" providerId="ADAL" clId="{0EF7214D-E59F-4D86-9B6A-2134479533EA}" dt="2026-06-26T13:20:44.641" v="2851"/>
+        <pc:chgData name="Germena Stefania" userId="848a3578-c669-42d9-960b-fb42db2e6943" providerId="ADAL" clId="{0EF7214D-E59F-4D86-9B6A-2134479533EA}" dt="2026-06-27T16:15:33.080" v="2926" actId="20577"/>
         <pc:sldMkLst>
           <pc:docMk/>
           <pc:sldMk cId="23660688" sldId="262"/>
@@ -483,6 +447,14 @@
             <pc:docMk/>
             <pc:sldMk cId="23660688" sldId="262"/>
             <ac:spMk id="2" creationId="{7B4A260F-8EBF-35D6-34DD-3DB3F0889DE7}"/>
+          </ac:spMkLst>
+        </pc:spChg>
+        <pc:spChg chg="mod">
+          <ac:chgData name="Germena Stefania" userId="848a3578-c669-42d9-960b-fb42db2e6943" providerId="ADAL" clId="{0EF7214D-E59F-4D86-9B6A-2134479533EA}" dt="2026-06-27T16:15:33.080" v="2926" actId="20577"/>
+          <ac:spMkLst>
+            <pc:docMk/>
+            <pc:sldMk cId="23660688" sldId="262"/>
+            <ac:spMk id="4" creationId="{FF835AEB-C84D-FC4A-CE6C-12B271F0544C}"/>
           </ac:spMkLst>
         </pc:spChg>
         <pc:spChg chg="mod">
@@ -621,7 +593,7 @@
         </pc:spChg>
       </pc:sldChg>
       <pc:sldChg chg="addSp delSp modSp new mod ord setBg">
-        <pc:chgData name="Germena Stefania" userId="848a3578-c669-42d9-960b-fb42db2e6943" providerId="ADAL" clId="{0EF7214D-E59F-4D86-9B6A-2134479533EA}" dt="2026-06-26T09:52:44.643" v="1101" actId="207"/>
+        <pc:chgData name="Germena Stefania" userId="848a3578-c669-42d9-960b-fb42db2e6943" providerId="ADAL" clId="{0EF7214D-E59F-4D86-9B6A-2134479533EA}" dt="2026-06-27T16:35:28.343" v="2972" actId="1076"/>
         <pc:sldMkLst>
           <pc:docMk/>
           <pc:sldMk cId="2110203462" sldId="265"/>
@@ -747,7 +719,7 @@
           </ac:spMkLst>
         </pc:spChg>
         <pc:spChg chg="add mod">
-          <ac:chgData name="Germena Stefania" userId="848a3578-c669-42d9-960b-fb42db2e6943" providerId="ADAL" clId="{0EF7214D-E59F-4D86-9B6A-2134479533EA}" dt="2026-06-26T09:44:02.864" v="929" actId="20577"/>
+          <ac:chgData name="Germena Stefania" userId="848a3578-c669-42d9-960b-fb42db2e6943" providerId="ADAL" clId="{0EF7214D-E59F-4D86-9B6A-2134479533EA}" dt="2026-06-27T16:35:28.343" v="2972" actId="1076"/>
           <ac:spMkLst>
             <pc:docMk/>
             <pc:sldMk cId="2110203462" sldId="265"/>
@@ -763,7 +735,7 @@
           </ac:spMkLst>
         </pc:spChg>
         <pc:spChg chg="add mod">
-          <ac:chgData name="Germena Stefania" userId="848a3578-c669-42d9-960b-fb42db2e6943" providerId="ADAL" clId="{0EF7214D-E59F-4D86-9B6A-2134479533EA}" dt="2026-06-26T09:45:04.314" v="1051" actId="403"/>
+          <ac:chgData name="Germena Stefania" userId="848a3578-c669-42d9-960b-fb42db2e6943" providerId="ADAL" clId="{0EF7214D-E59F-4D86-9B6A-2134479533EA}" dt="2026-06-27T16:35:21.388" v="2970" actId="1076"/>
           <ac:spMkLst>
             <pc:docMk/>
             <pc:sldMk cId="2110203462" sldId="265"/>
@@ -771,7 +743,7 @@
           </ac:spMkLst>
         </pc:spChg>
         <pc:spChg chg="add mod">
-          <ac:chgData name="Germena Stefania" userId="848a3578-c669-42d9-960b-fb42db2e6943" providerId="ADAL" clId="{0EF7214D-E59F-4D86-9B6A-2134479533EA}" dt="2026-06-26T09:45:06.228" v="1052" actId="403"/>
+          <ac:chgData name="Germena Stefania" userId="848a3578-c669-42d9-960b-fb42db2e6943" providerId="ADAL" clId="{0EF7214D-E59F-4D86-9B6A-2134479533EA}" dt="2026-06-27T16:35:24.633" v="2971" actId="1076"/>
           <ac:spMkLst>
             <pc:docMk/>
             <pc:sldMk cId="2110203462" sldId="265"/>
@@ -796,7 +768,7 @@
         </pc:cxnChg>
       </pc:sldChg>
       <pc:sldChg chg="addSp delSp modSp add mod ord addAnim delAnim modAnim">
-        <pc:chgData name="Germena Stefania" userId="848a3578-c669-42d9-960b-fb42db2e6943" providerId="ADAL" clId="{0EF7214D-E59F-4D86-9B6A-2134479533EA}" dt="2026-06-26T13:21:56.526" v="2877"/>
+        <pc:chgData name="Germena Stefania" userId="848a3578-c669-42d9-960b-fb42db2e6943" providerId="ADAL" clId="{0EF7214D-E59F-4D86-9B6A-2134479533EA}" dt="2026-06-27T16:34:22.057" v="2969" actId="1076"/>
         <pc:sldMkLst>
           <pc:docMk/>
           <pc:sldMk cId="788738405" sldId="266"/>
@@ -850,7 +822,7 @@
           </ac:spMkLst>
         </pc:spChg>
         <pc:spChg chg="add mod topLvl">
-          <ac:chgData name="Germena Stefania" userId="848a3578-c669-42d9-960b-fb42db2e6943" providerId="ADAL" clId="{0EF7214D-E59F-4D86-9B6A-2134479533EA}" dt="2026-06-26T13:21:04.338" v="2853" actId="165"/>
+          <ac:chgData name="Germena Stefania" userId="848a3578-c669-42d9-960b-fb42db2e6943" providerId="ADAL" clId="{0EF7214D-E59F-4D86-9B6A-2134479533EA}" dt="2026-06-27T16:34:22.057" v="2969" actId="1076"/>
           <ac:spMkLst>
             <pc:docMk/>
             <pc:sldMk cId="788738405" sldId="266"/>
@@ -858,7 +830,7 @@
           </ac:spMkLst>
         </pc:spChg>
         <pc:spChg chg="add mod topLvl">
-          <ac:chgData name="Germena Stefania" userId="848a3578-c669-42d9-960b-fb42db2e6943" providerId="ADAL" clId="{0EF7214D-E59F-4D86-9B6A-2134479533EA}" dt="2026-06-26T13:21:04.338" v="2853" actId="165"/>
+          <ac:chgData name="Germena Stefania" userId="848a3578-c669-42d9-960b-fb42db2e6943" providerId="ADAL" clId="{0EF7214D-E59F-4D86-9B6A-2134479533EA}" dt="2026-06-27T16:34:17.494" v="2967" actId="1076"/>
           <ac:spMkLst>
             <pc:docMk/>
             <pc:sldMk cId="788738405" sldId="266"/>
@@ -866,7 +838,7 @@
           </ac:spMkLst>
         </pc:spChg>
         <pc:spChg chg="add mod topLvl">
-          <ac:chgData name="Germena Stefania" userId="848a3578-c669-42d9-960b-fb42db2e6943" providerId="ADAL" clId="{0EF7214D-E59F-4D86-9B6A-2134479533EA}" dt="2026-06-26T13:21:04.338" v="2853" actId="165"/>
+          <ac:chgData name="Germena Stefania" userId="848a3578-c669-42d9-960b-fb42db2e6943" providerId="ADAL" clId="{0EF7214D-E59F-4D86-9B6A-2134479533EA}" dt="2026-06-27T16:34:20.262" v="2968" actId="1076"/>
           <ac:spMkLst>
             <pc:docMk/>
             <pc:sldMk cId="788738405" sldId="266"/>
@@ -1015,8 +987,8 @@
           </ac:picMkLst>
         </pc:picChg>
       </pc:sldChg>
-      <pc:sldChg chg="addSp delSp modSp new mod modAnim">
-        <pc:chgData name="Germena Stefania" userId="848a3578-c669-42d9-960b-fb42db2e6943" providerId="ADAL" clId="{0EF7214D-E59F-4D86-9B6A-2134479533EA}" dt="2026-06-26T13:22:18.570" v="2883"/>
+      <pc:sldChg chg="addSp delSp modSp new add del mod ord delAnim modAnim">
+        <pc:chgData name="Germena Stefania" userId="848a3578-c669-42d9-960b-fb42db2e6943" providerId="ADAL" clId="{0EF7214D-E59F-4D86-9B6A-2134479533EA}" dt="2026-06-27T17:45:52.561" v="3076"/>
         <pc:sldMkLst>
           <pc:docMk/>
           <pc:sldMk cId="3900484608" sldId="270"/>
@@ -1030,11 +1002,19 @@
           </ac:spMkLst>
         </pc:spChg>
         <pc:spChg chg="mod">
-          <ac:chgData name="Germena Stefania" userId="848a3578-c669-42d9-960b-fb42db2e6943" providerId="ADAL" clId="{0EF7214D-E59F-4D86-9B6A-2134479533EA}" dt="2026-06-26T12:19:29.174" v="1598" actId="113"/>
+          <ac:chgData name="Germena Stefania" userId="848a3578-c669-42d9-960b-fb42db2e6943" providerId="ADAL" clId="{0EF7214D-E59F-4D86-9B6A-2134479533EA}" dt="2026-06-27T17:43:18.198" v="3044" actId="14100"/>
           <ac:spMkLst>
             <pc:docMk/>
             <pc:sldMk cId="3900484608" sldId="270"/>
             <ac:spMk id="3" creationId="{49F91204-60F1-168F-4115-CF156827380B}"/>
+          </ac:spMkLst>
+        </pc:spChg>
+        <pc:spChg chg="add mod">
+          <ac:chgData name="Germena Stefania" userId="848a3578-c669-42d9-960b-fb42db2e6943" providerId="ADAL" clId="{0EF7214D-E59F-4D86-9B6A-2134479533EA}" dt="2026-06-27T17:43:45.935" v="3055" actId="1076"/>
+          <ac:spMkLst>
+            <pc:docMk/>
+            <pc:sldMk cId="3900484608" sldId="270"/>
+            <ac:spMk id="4" creationId="{A96A2E3E-49AE-58F5-6FBB-DB65E89EAE02}"/>
           </ac:spMkLst>
         </pc:spChg>
         <pc:spChg chg="add mod">
@@ -1045,12 +1025,20 @@
             <ac:spMk id="5" creationId="{8D10DA55-BA46-CCBC-26C2-20AB0EE49D9F}"/>
           </ac:spMkLst>
         </pc:spChg>
-        <pc:spChg chg="add mod">
-          <ac:chgData name="Germena Stefania" userId="848a3578-c669-42d9-960b-fb42db2e6943" providerId="ADAL" clId="{0EF7214D-E59F-4D86-9B6A-2134479533EA}" dt="2026-06-26T12:19:23.148" v="1596" actId="1076"/>
+        <pc:spChg chg="add del mod">
+          <ac:chgData name="Germena Stefania" userId="848a3578-c669-42d9-960b-fb42db2e6943" providerId="ADAL" clId="{0EF7214D-E59F-4D86-9B6A-2134479533EA}" dt="2026-06-27T17:45:43.170" v="3070" actId="478"/>
           <ac:spMkLst>
             <pc:docMk/>
             <pc:sldMk cId="3900484608" sldId="270"/>
             <ac:spMk id="6" creationId="{DFC8A3C3-5042-06C2-ED0D-02AD9D7F5389}"/>
+          </ac:spMkLst>
+        </pc:spChg>
+        <pc:spChg chg="add mod">
+          <ac:chgData name="Germena Stefania" userId="848a3578-c669-42d9-960b-fb42db2e6943" providerId="ADAL" clId="{0EF7214D-E59F-4D86-9B6A-2134479533EA}" dt="2026-06-27T17:43:48.230" v="3056" actId="1076"/>
+          <ac:spMkLst>
+            <pc:docMk/>
+            <pc:sldMk cId="3900484608" sldId="270"/>
+            <ac:spMk id="8" creationId="{E7413D2C-20FC-587F-7770-A9F2E8F8A10A}"/>
           </ac:spMkLst>
         </pc:spChg>
       </pc:sldChg>
@@ -1070,7 +1058,7 @@
         </pc:spChg>
       </pc:sldChg>
       <pc:sldChg chg="modSp add mod modAnim">
-        <pc:chgData name="Germena Stefania" userId="848a3578-c669-42d9-960b-fb42db2e6943" providerId="ADAL" clId="{0EF7214D-E59F-4D86-9B6A-2134479533EA}" dt="2026-06-26T13:18:30.734" v="2784"/>
+        <pc:chgData name="Germena Stefania" userId="848a3578-c669-42d9-960b-fb42db2e6943" providerId="ADAL" clId="{0EF7214D-E59F-4D86-9B6A-2134479533EA}" dt="2026-06-27T16:36:19.061" v="2975" actId="1076"/>
         <pc:sldMkLst>
           <pc:docMk/>
           <pc:sldMk cId="314410429" sldId="272"/>
@@ -1081,6 +1069,30 @@
             <pc:docMk/>
             <pc:sldMk cId="314410429" sldId="272"/>
             <ac:spMk id="5" creationId="{974AF0E6-4055-4309-0D61-7A0B9C440AF3}"/>
+          </ac:spMkLst>
+        </pc:spChg>
+        <pc:spChg chg="mod">
+          <ac:chgData name="Germena Stefania" userId="848a3578-c669-42d9-960b-fb42db2e6943" providerId="ADAL" clId="{0EF7214D-E59F-4D86-9B6A-2134479533EA}" dt="2026-06-27T16:36:08.114" v="2973" actId="1076"/>
+          <ac:spMkLst>
+            <pc:docMk/>
+            <pc:sldMk cId="314410429" sldId="272"/>
+            <ac:spMk id="23" creationId="{A7DF20C5-AB82-3E72-BA6D-EAFE7AB21AD0}"/>
+          </ac:spMkLst>
+        </pc:spChg>
+        <pc:spChg chg="mod">
+          <ac:chgData name="Germena Stefania" userId="848a3578-c669-42d9-960b-fb42db2e6943" providerId="ADAL" clId="{0EF7214D-E59F-4D86-9B6A-2134479533EA}" dt="2026-06-27T16:36:19.061" v="2975" actId="1076"/>
+          <ac:spMkLst>
+            <pc:docMk/>
+            <pc:sldMk cId="314410429" sldId="272"/>
+            <ac:spMk id="25" creationId="{8821BEB0-8CC1-9249-9C3B-2FAC81C07C96}"/>
+          </ac:spMkLst>
+        </pc:spChg>
+        <pc:spChg chg="mod">
+          <ac:chgData name="Germena Stefania" userId="848a3578-c669-42d9-960b-fb42db2e6943" providerId="ADAL" clId="{0EF7214D-E59F-4D86-9B6A-2134479533EA}" dt="2026-06-27T16:36:14.568" v="2974" actId="1076"/>
+          <ac:spMkLst>
+            <pc:docMk/>
+            <pc:sldMk cId="314410429" sldId="272"/>
+            <ac:spMk id="26" creationId="{A3384F6C-7E5F-442F-4853-5FAAB6F0EF00}"/>
           </ac:spMkLst>
         </pc:spChg>
       </pc:sldChg>
@@ -1392,8 +1404,8 @@
           </ac:picMkLst>
         </pc:picChg>
       </pc:sldChg>
-      <pc:sldChg chg="addSp delSp modSp add mod delAnim">
-        <pc:chgData name="Germena Stefania" userId="848a3578-c669-42d9-960b-fb42db2e6943" providerId="ADAL" clId="{0EF7214D-E59F-4D86-9B6A-2134479533EA}" dt="2026-06-26T13:08:39.871" v="2722"/>
+      <pc:sldChg chg="addSp delSp modSp add mod delAnim modAnim">
+        <pc:chgData name="Germena Stefania" userId="848a3578-c669-42d9-960b-fb42db2e6943" providerId="ADAL" clId="{0EF7214D-E59F-4D86-9B6A-2134479533EA}" dt="2026-06-27T17:45:40.908" v="3069" actId="1076"/>
         <pc:sldMkLst>
           <pc:docMk/>
           <pc:sldMk cId="1649146526" sldId="276"/>
@@ -1406,12 +1418,36 @@
             <ac:spMk id="2" creationId="{57F099B7-1570-54F5-392A-DCBC9E164300}"/>
           </ac:spMkLst>
         </pc:spChg>
+        <pc:spChg chg="add del mod">
+          <ac:chgData name="Germena Stefania" userId="848a3578-c669-42d9-960b-fb42db2e6943" providerId="ADAL" clId="{0EF7214D-E59F-4D86-9B6A-2134479533EA}" dt="2026-06-27T17:43:52.474" v="3057" actId="478"/>
+          <ac:spMkLst>
+            <pc:docMk/>
+            <pc:sldMk cId="1649146526" sldId="276"/>
+            <ac:spMk id="3" creationId="{E455AD4F-A4CA-3A81-793B-E5A108007D07}"/>
+          </ac:spMkLst>
+        </pc:spChg>
+        <pc:spChg chg="add mod">
+          <ac:chgData name="Germena Stefania" userId="848a3578-c669-42d9-960b-fb42db2e6943" providerId="ADAL" clId="{0EF7214D-E59F-4D86-9B6A-2134479533EA}" dt="2026-06-27T17:45:40.908" v="3069" actId="1076"/>
+          <ac:spMkLst>
+            <pc:docMk/>
+            <pc:sldMk cId="1649146526" sldId="276"/>
+            <ac:spMk id="4" creationId="{0684D011-B193-E8AD-CC52-0402F7FC19A9}"/>
+          </ac:spMkLst>
+        </pc:spChg>
         <pc:spChg chg="mod">
           <ac:chgData name="Germena Stefania" userId="848a3578-c669-42d9-960b-fb42db2e6943" providerId="ADAL" clId="{0EF7214D-E59F-4D86-9B6A-2134479533EA}" dt="2026-06-26T13:00:21.674" v="2715" actId="20577"/>
           <ac:spMkLst>
             <pc:docMk/>
             <pc:sldMk cId="1649146526" sldId="276"/>
             <ac:spMk id="5" creationId="{C4B5B5C8-0D3C-C8F4-10A3-A3C4148A89D2}"/>
+          </ac:spMkLst>
+        </pc:spChg>
+        <pc:spChg chg="add del mod">
+          <ac:chgData name="Germena Stefania" userId="848a3578-c669-42d9-960b-fb42db2e6943" providerId="ADAL" clId="{0EF7214D-E59F-4D86-9B6A-2134479533EA}" dt="2026-06-27T17:45:18.870" v="3064" actId="478"/>
+          <ac:spMkLst>
+            <pc:docMk/>
+            <pc:sldMk cId="1649146526" sldId="276"/>
+            <ac:spMk id="6" creationId="{69C21D7C-FBAA-C3B3-1D03-A8B335009CE9}"/>
           </ac:spMkLst>
         </pc:spChg>
         <pc:spChg chg="del">
@@ -1444,6 +1480,29 @@
             <pc:docMk/>
             <pc:sldMk cId="1649146526" sldId="276"/>
             <ac:spMk id="10" creationId="{6E8E2EB2-6AB6-AB8A-04EA-E9DC820A2E5B}"/>
+          </ac:spMkLst>
+        </pc:spChg>
+      </pc:sldChg>
+      <pc:sldChg chg="delSp modSp add mod">
+        <pc:chgData name="Germena Stefania" userId="848a3578-c669-42d9-960b-fb42db2e6943" providerId="ADAL" clId="{0EF7214D-E59F-4D86-9B6A-2134479533EA}" dt="2026-06-27T17:46:24.686" v="3112" actId="1076"/>
+        <pc:sldMkLst>
+          <pc:docMk/>
+          <pc:sldMk cId="2126524839" sldId="277"/>
+        </pc:sldMkLst>
+        <pc:spChg chg="mod">
+          <ac:chgData name="Germena Stefania" userId="848a3578-c669-42d9-960b-fb42db2e6943" providerId="ADAL" clId="{0EF7214D-E59F-4D86-9B6A-2134479533EA}" dt="2026-06-27T17:46:24.686" v="3112" actId="1076"/>
+          <ac:spMkLst>
+            <pc:docMk/>
+            <pc:sldMk cId="2126524839" sldId="277"/>
+            <ac:spMk id="7" creationId="{182420EB-26F4-D76B-8240-F0F242267FDE}"/>
+          </ac:spMkLst>
+        </pc:spChg>
+        <pc:spChg chg="del">
+          <ac:chgData name="Germena Stefania" userId="848a3578-c669-42d9-960b-fb42db2e6943" providerId="ADAL" clId="{0EF7214D-E59F-4D86-9B6A-2134479533EA}" dt="2026-06-27T17:46:19.793" v="3110" actId="478"/>
+          <ac:spMkLst>
+            <pc:docMk/>
+            <pc:sldMk cId="2126524839" sldId="277"/>
+            <ac:spMk id="8" creationId="{BA9E465A-6735-FD60-D73E-78473207C6AC}"/>
           </ac:spMkLst>
         </pc:spChg>
       </pc:sldChg>
@@ -1547,6 +1606,695 @@
 </pc:chgInfo>
 </file>
 
+<file path=ppt/notesMasters/notesMaster1.xml><?xml version="1.0" encoding="utf-8"?>
+<p:notesMaster xmlns:a="http://schemas.openxmlformats.org/drawingml/2006/main" xmlns:r="http://schemas.openxmlformats.org/officeDocument/2006/relationships" xmlns:p="http://schemas.openxmlformats.org/presentationml/2006/main">
+  <p:cSld>
+    <p:bg>
+      <p:bgRef idx="1001">
+        <a:schemeClr val="bg1"/>
+      </p:bgRef>
+    </p:bg>
+    <p:spTree>
+      <p:nvGrpSpPr>
+        <p:cNvPr id="1" name=""/>
+        <p:cNvGrpSpPr/>
+        <p:nvPr/>
+      </p:nvGrpSpPr>
+      <p:grpSpPr>
+        <a:xfrm>
+          <a:off x="0" y="0"/>
+          <a:ext cx="0" cy="0"/>
+          <a:chOff x="0" y="0"/>
+          <a:chExt cx="0" cy="0"/>
+        </a:xfrm>
+      </p:grpSpPr>
+      <p:sp>
+        <p:nvSpPr>
+          <p:cNvPr id="2" name="Header Placeholder 1"/>
+          <p:cNvSpPr>
+            <a:spLocks noGrp="1"/>
+          </p:cNvSpPr>
+          <p:nvPr>
+            <p:ph type="hdr" sz="quarter"/>
+          </p:nvPr>
+        </p:nvSpPr>
+        <p:spPr>
+          <a:xfrm>
+            <a:off x="0" y="0"/>
+            <a:ext cx="2971800" cy="458788"/>
+          </a:xfrm>
+          <a:prstGeom prst="rect">
+            <a:avLst/>
+          </a:prstGeom>
+        </p:spPr>
+        <p:txBody>
+          <a:bodyPr vert="horz" lIns="91440" tIns="45720" rIns="91440" bIns="45720" rtlCol="0"/>
+          <a:lstStyle>
+            <a:lvl1pPr algn="l">
+              <a:defRPr sz="1200"/>
+            </a:lvl1pPr>
+          </a:lstStyle>
+          <a:p>
+            <a:endParaRPr lang="en-ZA"/>
+          </a:p>
+        </p:txBody>
+      </p:sp>
+      <p:sp>
+        <p:nvSpPr>
+          <p:cNvPr id="3" name="Date Placeholder 2"/>
+          <p:cNvSpPr>
+            <a:spLocks noGrp="1"/>
+          </p:cNvSpPr>
+          <p:nvPr>
+            <p:ph type="dt" idx="1"/>
+          </p:nvPr>
+        </p:nvSpPr>
+        <p:spPr>
+          <a:xfrm>
+            <a:off x="3884613" y="0"/>
+            <a:ext cx="2971800" cy="458788"/>
+          </a:xfrm>
+          <a:prstGeom prst="rect">
+            <a:avLst/>
+          </a:prstGeom>
+        </p:spPr>
+        <p:txBody>
+          <a:bodyPr vert="horz" lIns="91440" tIns="45720" rIns="91440" bIns="45720" rtlCol="0"/>
+          <a:lstStyle>
+            <a:lvl1pPr algn="r">
+              <a:defRPr sz="1200"/>
+            </a:lvl1pPr>
+          </a:lstStyle>
+          <a:p>
+            <a:fld id="{E6689886-C6C1-47DF-B6F0-6CA28BFD5936}" type="datetimeFigureOut">
+              <a:rPr lang="en-ZA" smtClean="0"/>
+              <a:t>2026/06/27</a:t>
+            </a:fld>
+            <a:endParaRPr lang="en-ZA"/>
+          </a:p>
+        </p:txBody>
+      </p:sp>
+      <p:sp>
+        <p:nvSpPr>
+          <p:cNvPr id="4" name="Slide Image Placeholder 3"/>
+          <p:cNvSpPr>
+            <a:spLocks noGrp="1" noRot="1" noChangeAspect="1"/>
+          </p:cNvSpPr>
+          <p:nvPr>
+            <p:ph type="sldImg" idx="2"/>
+          </p:nvPr>
+        </p:nvSpPr>
+        <p:spPr>
+          <a:xfrm>
+            <a:off x="685800" y="1143000"/>
+            <a:ext cx="5486400" cy="3086100"/>
+          </a:xfrm>
+          <a:prstGeom prst="rect">
+            <a:avLst/>
+          </a:prstGeom>
+          <a:noFill/>
+          <a:ln w="12700">
+            <a:solidFill>
+              <a:prstClr val="black"/>
+            </a:solidFill>
+          </a:ln>
+        </p:spPr>
+        <p:txBody>
+          <a:bodyPr vert="horz" lIns="91440" tIns="45720" rIns="91440" bIns="45720" rtlCol="0" anchor="ctr"/>
+          <a:lstStyle/>
+          <a:p>
+            <a:endParaRPr lang="en-ZA"/>
+          </a:p>
+        </p:txBody>
+      </p:sp>
+      <p:sp>
+        <p:nvSpPr>
+          <p:cNvPr id="5" name="Notes Placeholder 4"/>
+          <p:cNvSpPr>
+            <a:spLocks noGrp="1"/>
+          </p:cNvSpPr>
+          <p:nvPr>
+            <p:ph type="body" sz="quarter" idx="3"/>
+          </p:nvPr>
+        </p:nvSpPr>
+        <p:spPr>
+          <a:xfrm>
+            <a:off x="685800" y="4400550"/>
+            <a:ext cx="5486400" cy="3600450"/>
+          </a:xfrm>
+          <a:prstGeom prst="rect">
+            <a:avLst/>
+          </a:prstGeom>
+        </p:spPr>
+        <p:txBody>
+          <a:bodyPr vert="horz" lIns="91440" tIns="45720" rIns="91440" bIns="45720" rtlCol="0"/>
+          <a:lstStyle/>
+          <a:p>
+            <a:pPr lvl="0"/>
+            <a:r>
+              <a:rPr lang="en-US"/>
+              <a:t>Click to edit Master text styles</a:t>
+            </a:r>
+          </a:p>
+          <a:p>
+            <a:pPr lvl="1"/>
+            <a:r>
+              <a:rPr lang="en-US"/>
+              <a:t>Second level</a:t>
+            </a:r>
+          </a:p>
+          <a:p>
+            <a:pPr lvl="2"/>
+            <a:r>
+              <a:rPr lang="en-US"/>
+              <a:t>Third level</a:t>
+            </a:r>
+          </a:p>
+          <a:p>
+            <a:pPr lvl="3"/>
+            <a:r>
+              <a:rPr lang="en-US"/>
+              <a:t>Fourth level</a:t>
+            </a:r>
+          </a:p>
+          <a:p>
+            <a:pPr lvl="4"/>
+            <a:r>
+              <a:rPr lang="en-US"/>
+              <a:t>Fifth level</a:t>
+            </a:r>
+            <a:endParaRPr lang="en-ZA"/>
+          </a:p>
+        </p:txBody>
+      </p:sp>
+      <p:sp>
+        <p:nvSpPr>
+          <p:cNvPr id="6" name="Footer Placeholder 5"/>
+          <p:cNvSpPr>
+            <a:spLocks noGrp="1"/>
+          </p:cNvSpPr>
+          <p:nvPr>
+            <p:ph type="ftr" sz="quarter" idx="4"/>
+          </p:nvPr>
+        </p:nvSpPr>
+        <p:spPr>
+          <a:xfrm>
+            <a:off x="0" y="8685213"/>
+            <a:ext cx="2971800" cy="458787"/>
+          </a:xfrm>
+          <a:prstGeom prst="rect">
+            <a:avLst/>
+          </a:prstGeom>
+        </p:spPr>
+        <p:txBody>
+          <a:bodyPr vert="horz" lIns="91440" tIns="45720" rIns="91440" bIns="45720" rtlCol="0" anchor="b"/>
+          <a:lstStyle>
+            <a:lvl1pPr algn="l">
+              <a:defRPr sz="1200"/>
+            </a:lvl1pPr>
+          </a:lstStyle>
+          <a:p>
+            <a:endParaRPr lang="en-ZA"/>
+          </a:p>
+        </p:txBody>
+      </p:sp>
+      <p:sp>
+        <p:nvSpPr>
+          <p:cNvPr id="7" name="Slide Number Placeholder 6"/>
+          <p:cNvSpPr>
+            <a:spLocks noGrp="1"/>
+          </p:cNvSpPr>
+          <p:nvPr>
+            <p:ph type="sldNum" sz="quarter" idx="5"/>
+          </p:nvPr>
+        </p:nvSpPr>
+        <p:spPr>
+          <a:xfrm>
+            <a:off x="3884613" y="8685213"/>
+            <a:ext cx="2971800" cy="458787"/>
+          </a:xfrm>
+          <a:prstGeom prst="rect">
+            <a:avLst/>
+          </a:prstGeom>
+        </p:spPr>
+        <p:txBody>
+          <a:bodyPr vert="horz" lIns="91440" tIns="45720" rIns="91440" bIns="45720" rtlCol="0" anchor="b"/>
+          <a:lstStyle>
+            <a:lvl1pPr algn="r">
+              <a:defRPr sz="1200"/>
+            </a:lvl1pPr>
+          </a:lstStyle>
+          <a:p>
+            <a:fld id="{C388E905-4B39-4285-AC49-8524FEB5A25F}" type="slidenum">
+              <a:rPr lang="en-ZA" smtClean="0"/>
+              <a:t>‹#›</a:t>
+            </a:fld>
+            <a:endParaRPr lang="en-ZA"/>
+          </a:p>
+        </p:txBody>
+      </p:sp>
+    </p:spTree>
+    <p:extLst>
+      <p:ext uri="{BB962C8B-B14F-4D97-AF65-F5344CB8AC3E}">
+        <p14:creationId xmlns:p14="http://schemas.microsoft.com/office/powerpoint/2010/main" val="1215585407"/>
+      </p:ext>
+    </p:extLst>
+  </p:cSld>
+  <p:clrMap bg1="lt1" tx1="dk1" bg2="lt2" tx2="dk2" accent1="accent1" accent2="accent2" accent3="accent3" accent4="accent4" accent5="accent5" accent6="accent6" hlink="hlink" folHlink="folHlink"/>
+  <p:notesStyle>
+    <a:lvl1pPr marL="0" algn="l" defTabSz="914400" rtl="0" eaLnBrk="1" latinLnBrk="0" hangingPunct="1">
+      <a:defRPr sz="1200" kern="1200">
+        <a:solidFill>
+          <a:schemeClr val="tx1"/>
+        </a:solidFill>
+        <a:latin typeface="+mn-lt"/>
+        <a:ea typeface="+mn-ea"/>
+        <a:cs typeface="+mn-cs"/>
+      </a:defRPr>
+    </a:lvl1pPr>
+    <a:lvl2pPr marL="457200" algn="l" defTabSz="914400" rtl="0" eaLnBrk="1" latinLnBrk="0" hangingPunct="1">
+      <a:defRPr sz="1200" kern="1200">
+        <a:solidFill>
+          <a:schemeClr val="tx1"/>
+        </a:solidFill>
+        <a:latin typeface="+mn-lt"/>
+        <a:ea typeface="+mn-ea"/>
+        <a:cs typeface="+mn-cs"/>
+      </a:defRPr>
+    </a:lvl2pPr>
+    <a:lvl3pPr marL="914400" algn="l" defTabSz="914400" rtl="0" eaLnBrk="1" latinLnBrk="0" hangingPunct="1">
+      <a:defRPr sz="1200" kern="1200">
+        <a:solidFill>
+          <a:schemeClr val="tx1"/>
+        </a:solidFill>
+        <a:latin typeface="+mn-lt"/>
+        <a:ea typeface="+mn-ea"/>
+        <a:cs typeface="+mn-cs"/>
+      </a:defRPr>
+    </a:lvl3pPr>
+    <a:lvl4pPr marL="1371600" algn="l" defTabSz="914400" rtl="0" eaLnBrk="1" latinLnBrk="0" hangingPunct="1">
+      <a:defRPr sz="1200" kern="1200">
+        <a:solidFill>
+          <a:schemeClr val="tx1"/>
+        </a:solidFill>
+        <a:latin typeface="+mn-lt"/>
+        <a:ea typeface="+mn-ea"/>
+        <a:cs typeface="+mn-cs"/>
+      </a:defRPr>
+    </a:lvl4pPr>
+    <a:lvl5pPr marL="1828800" algn="l" defTabSz="914400" rtl="0" eaLnBrk="1" latinLnBrk="0" hangingPunct="1">
+      <a:defRPr sz="1200" kern="1200">
+        <a:solidFill>
+          <a:schemeClr val="tx1"/>
+        </a:solidFill>
+        <a:latin typeface="+mn-lt"/>
+        <a:ea typeface="+mn-ea"/>
+        <a:cs typeface="+mn-cs"/>
+      </a:defRPr>
+    </a:lvl5pPr>
+    <a:lvl6pPr marL="2286000" algn="l" defTabSz="914400" rtl="0" eaLnBrk="1" latinLnBrk="0" hangingPunct="1">
+      <a:defRPr sz="1200" kern="1200">
+        <a:solidFill>
+          <a:schemeClr val="tx1"/>
+        </a:solidFill>
+        <a:latin typeface="+mn-lt"/>
+        <a:ea typeface="+mn-ea"/>
+        <a:cs typeface="+mn-cs"/>
+      </a:defRPr>
+    </a:lvl6pPr>
+    <a:lvl7pPr marL="2743200" algn="l" defTabSz="914400" rtl="0" eaLnBrk="1" latinLnBrk="0" hangingPunct="1">
+      <a:defRPr sz="1200" kern="1200">
+        <a:solidFill>
+          <a:schemeClr val="tx1"/>
+        </a:solidFill>
+        <a:latin typeface="+mn-lt"/>
+        <a:ea typeface="+mn-ea"/>
+        <a:cs typeface="+mn-cs"/>
+      </a:defRPr>
+    </a:lvl7pPr>
+    <a:lvl8pPr marL="3200400" algn="l" defTabSz="914400" rtl="0" eaLnBrk="1" latinLnBrk="0" hangingPunct="1">
+      <a:defRPr sz="1200" kern="1200">
+        <a:solidFill>
+          <a:schemeClr val="tx1"/>
+        </a:solidFill>
+        <a:latin typeface="+mn-lt"/>
+        <a:ea typeface="+mn-ea"/>
+        <a:cs typeface="+mn-cs"/>
+      </a:defRPr>
+    </a:lvl8pPr>
+    <a:lvl9pPr marL="3657600" algn="l" defTabSz="914400" rtl="0" eaLnBrk="1" latinLnBrk="0" hangingPunct="1">
+      <a:defRPr sz="1200" kern="1200">
+        <a:solidFill>
+          <a:schemeClr val="tx1"/>
+        </a:solidFill>
+        <a:latin typeface="+mn-lt"/>
+        <a:ea typeface="+mn-ea"/>
+        <a:cs typeface="+mn-cs"/>
+      </a:defRPr>
+    </a:lvl9pPr>
+  </p:notesStyle>
+</p:notesMaster>
+</file>
+
+<file path=ppt/notesSlides/notesSlide1.xml><?xml version="1.0" encoding="utf-8"?>
+<p:notes xmlns:a="http://schemas.openxmlformats.org/drawingml/2006/main" xmlns:r="http://schemas.openxmlformats.org/officeDocument/2006/relationships" xmlns:p="http://schemas.openxmlformats.org/presentationml/2006/main">
+  <p:cSld>
+    <p:spTree>
+      <p:nvGrpSpPr>
+        <p:cNvPr id="1" name=""/>
+        <p:cNvGrpSpPr/>
+        <p:nvPr/>
+      </p:nvGrpSpPr>
+      <p:grpSpPr>
+        <a:xfrm>
+          <a:off x="0" y="0"/>
+          <a:ext cx="0" cy="0"/>
+          <a:chOff x="0" y="0"/>
+          <a:chExt cx="0" cy="0"/>
+        </a:xfrm>
+      </p:grpSpPr>
+      <p:sp>
+        <p:nvSpPr>
+          <p:cNvPr id="2" name="Slide Image Placeholder 1"/>
+          <p:cNvSpPr>
+            <a:spLocks noGrp="1" noRot="1" noChangeAspect="1"/>
+          </p:cNvSpPr>
+          <p:nvPr>
+            <p:ph type="sldImg"/>
+          </p:nvPr>
+        </p:nvSpPr>
+        <p:spPr/>
+      </p:sp>
+      <p:sp>
+        <p:nvSpPr>
+          <p:cNvPr id="3" name="Notes Placeholder 2"/>
+          <p:cNvSpPr>
+            <a:spLocks noGrp="1"/>
+          </p:cNvSpPr>
+          <p:nvPr>
+            <p:ph type="body" idx="1"/>
+          </p:nvPr>
+        </p:nvSpPr>
+        <p:spPr/>
+        <p:txBody>
+          <a:bodyPr/>
+          <a:lstStyle/>
+          <a:p>
+            <a:r>
+              <a:rPr lang="en-US" dirty="0"/>
+              <a:t>The scanning procedure ensures the presence of the victim. The victim is verified with a high decibel level, a red thermal reading, and a high visual probability.</a:t>
+            </a:r>
+            <a:endParaRPr lang="en-ZA" dirty="0"/>
+          </a:p>
+        </p:txBody>
+      </p:sp>
+      <p:sp>
+        <p:nvSpPr>
+          <p:cNvPr id="4" name="Slide Number Placeholder 3"/>
+          <p:cNvSpPr>
+            <a:spLocks noGrp="1"/>
+          </p:cNvSpPr>
+          <p:nvPr>
+            <p:ph type="sldNum" sz="quarter" idx="5"/>
+          </p:nvPr>
+        </p:nvSpPr>
+        <p:spPr/>
+        <p:txBody>
+          <a:bodyPr/>
+          <a:lstStyle/>
+          <a:p>
+            <a:fld id="{C388E905-4B39-4285-AC49-8524FEB5A25F}" type="slidenum">
+              <a:rPr lang="en-ZA" smtClean="0"/>
+              <a:t>9</a:t>
+            </a:fld>
+            <a:endParaRPr lang="en-ZA"/>
+          </a:p>
+        </p:txBody>
+      </p:sp>
+    </p:spTree>
+    <p:extLst>
+      <p:ext uri="{BB962C8B-B14F-4D97-AF65-F5344CB8AC3E}">
+        <p14:creationId xmlns:p14="http://schemas.microsoft.com/office/powerpoint/2010/main" val="972696143"/>
+      </p:ext>
+    </p:extLst>
+  </p:cSld>
+  <p:clrMapOvr>
+    <a:masterClrMapping/>
+  </p:clrMapOvr>
+</p:notes>
+</file>
+
+<file path=ppt/notesSlides/notesSlide2.xml><?xml version="1.0" encoding="utf-8"?>
+<p:notes xmlns:a="http://schemas.openxmlformats.org/drawingml/2006/main" xmlns:r="http://schemas.openxmlformats.org/officeDocument/2006/relationships" xmlns:p="http://schemas.openxmlformats.org/presentationml/2006/main">
+  <p:cSld>
+    <p:spTree>
+      <p:nvGrpSpPr>
+        <p:cNvPr id="1" name=""/>
+        <p:cNvGrpSpPr/>
+        <p:nvPr/>
+      </p:nvGrpSpPr>
+      <p:grpSpPr>
+        <a:xfrm>
+          <a:off x="0" y="0"/>
+          <a:ext cx="0" cy="0"/>
+          <a:chOff x="0" y="0"/>
+          <a:chExt cx="0" cy="0"/>
+        </a:xfrm>
+      </p:grpSpPr>
+      <p:sp>
+        <p:nvSpPr>
+          <p:cNvPr id="2" name="Slide Image Placeholder 1"/>
+          <p:cNvSpPr>
+            <a:spLocks noGrp="1" noRot="1" noChangeAspect="1"/>
+          </p:cNvSpPr>
+          <p:nvPr>
+            <p:ph type="sldImg"/>
+          </p:nvPr>
+        </p:nvSpPr>
+        <p:spPr/>
+      </p:sp>
+      <p:sp>
+        <p:nvSpPr>
+          <p:cNvPr id="3" name="Notes Placeholder 2"/>
+          <p:cNvSpPr>
+            <a:spLocks noGrp="1"/>
+          </p:cNvSpPr>
+          <p:nvPr>
+            <p:ph type="body" idx="1"/>
+          </p:nvPr>
+        </p:nvSpPr>
+        <p:spPr/>
+        <p:txBody>
+          <a:bodyPr/>
+          <a:lstStyle/>
+          <a:p>
+            <a:r>
+              <a:rPr lang="en-US" dirty="0"/>
+              <a:t>The scanning procedure ensures the presence of the victim. </a:t>
+            </a:r>
+            <a:r>
+              <a:rPr lang="en-US"/>
+              <a:t>The victim is verified with a high decibel level, a red thermal reading, and a high visual probability.</a:t>
+            </a:r>
+            <a:endParaRPr lang="en-ZA"/>
+          </a:p>
+        </p:txBody>
+      </p:sp>
+      <p:sp>
+        <p:nvSpPr>
+          <p:cNvPr id="4" name="Slide Number Placeholder 3"/>
+          <p:cNvSpPr>
+            <a:spLocks noGrp="1"/>
+          </p:cNvSpPr>
+          <p:nvPr>
+            <p:ph type="sldNum" sz="quarter" idx="5"/>
+          </p:nvPr>
+        </p:nvSpPr>
+        <p:spPr/>
+        <p:txBody>
+          <a:bodyPr/>
+          <a:lstStyle/>
+          <a:p>
+            <a:fld id="{C388E905-4B39-4285-AC49-8524FEB5A25F}" type="slidenum">
+              <a:rPr lang="en-ZA" smtClean="0"/>
+              <a:t>11</a:t>
+            </a:fld>
+            <a:endParaRPr lang="en-ZA"/>
+          </a:p>
+        </p:txBody>
+      </p:sp>
+    </p:spTree>
+    <p:extLst>
+      <p:ext uri="{BB962C8B-B14F-4D97-AF65-F5344CB8AC3E}">
+        <p14:creationId xmlns:p14="http://schemas.microsoft.com/office/powerpoint/2010/main" val="3694154207"/>
+      </p:ext>
+    </p:extLst>
+  </p:cSld>
+  <p:clrMapOvr>
+    <a:masterClrMapping/>
+  </p:clrMapOvr>
+</p:notes>
+</file>
+
+<file path=ppt/notesSlides/notesSlide3.xml><?xml version="1.0" encoding="utf-8"?>
+<p:notes xmlns:a="http://schemas.openxmlformats.org/drawingml/2006/main" xmlns:r="http://schemas.openxmlformats.org/officeDocument/2006/relationships" xmlns:p="http://schemas.openxmlformats.org/presentationml/2006/main">
+  <p:cSld>
+    <p:spTree>
+      <p:nvGrpSpPr>
+        <p:cNvPr id="1" name=""/>
+        <p:cNvGrpSpPr/>
+        <p:nvPr/>
+      </p:nvGrpSpPr>
+      <p:grpSpPr>
+        <a:xfrm>
+          <a:off x="0" y="0"/>
+          <a:ext cx="0" cy="0"/>
+          <a:chOff x="0" y="0"/>
+          <a:chExt cx="0" cy="0"/>
+        </a:xfrm>
+      </p:grpSpPr>
+      <p:sp>
+        <p:nvSpPr>
+          <p:cNvPr id="2" name="Slide Image Placeholder 1"/>
+          <p:cNvSpPr>
+            <a:spLocks noGrp="1" noRot="1" noChangeAspect="1"/>
+          </p:cNvSpPr>
+          <p:nvPr>
+            <p:ph type="sldImg"/>
+          </p:nvPr>
+        </p:nvSpPr>
+        <p:spPr/>
+      </p:sp>
+      <p:sp>
+        <p:nvSpPr>
+          <p:cNvPr id="3" name="Notes Placeholder 2"/>
+          <p:cNvSpPr>
+            <a:spLocks noGrp="1"/>
+          </p:cNvSpPr>
+          <p:nvPr>
+            <p:ph type="body" idx="1"/>
+          </p:nvPr>
+        </p:nvSpPr>
+        <p:spPr/>
+        <p:txBody>
+          <a:bodyPr/>
+          <a:lstStyle/>
+          <a:p>
+            <a:pPr marL="0" marR="0" lvl="0" indent="0" algn="l" defTabSz="914400" rtl="0" eaLnBrk="1" fontAlgn="auto" latinLnBrk="0" hangingPunct="1">
+              <a:lnSpc>
+                <a:spcPct val="100000"/>
+              </a:lnSpc>
+              <a:spcBef>
+                <a:spcPts val="0"/>
+              </a:spcBef>
+              <a:spcAft>
+                <a:spcPts val="0"/>
+              </a:spcAft>
+              <a:buClrTx/>
+              <a:buSzTx/>
+              <a:buFontTx/>
+              <a:buNone/>
+              <a:tabLst/>
+              <a:defRPr/>
+            </a:pPr>
+            <a:r>
+              <a:rPr lang="en-ZA" dirty="0">
+                <a:solidFill>
+                  <a:schemeClr val="bg1"/>
+                </a:solidFill>
+              </a:rPr>
+              <a:t>The system assumes </a:t>
+            </a:r>
+            <a:r>
+              <a:rPr lang="en-ZA" b="1" dirty="0">
+                <a:solidFill>
+                  <a:srgbClr val="FFC000"/>
+                </a:solidFill>
+              </a:rPr>
+              <a:t>optimal conditions</a:t>
+            </a:r>
+            <a:r>
+              <a:rPr lang="en-ZA" dirty="0">
+                <a:solidFill>
+                  <a:schemeClr val="bg1"/>
+                </a:solidFill>
+              </a:rPr>
+              <a:t>, leading to </a:t>
+            </a:r>
+            <a:r>
+              <a:rPr lang="en-ZA" b="1" dirty="0">
+                <a:solidFill>
+                  <a:srgbClr val="FFC000"/>
+                </a:solidFill>
+              </a:rPr>
+              <a:t>challenges</a:t>
+            </a:r>
+            <a:r>
+              <a:rPr lang="en-ZA" dirty="0">
+                <a:solidFill>
+                  <a:schemeClr val="bg1"/>
+                </a:solidFill>
+              </a:rPr>
+              <a:t> in handling </a:t>
+            </a:r>
+            <a:r>
+              <a:rPr lang="en-ZA" b="1" dirty="0">
+                <a:solidFill>
+                  <a:srgbClr val="FFC000"/>
+                </a:solidFill>
+              </a:rPr>
+              <a:t>uncertainties</a:t>
+            </a:r>
+            <a:r>
+              <a:rPr lang="en-ZA" dirty="0">
+                <a:solidFill>
+                  <a:schemeClr val="bg1"/>
+                </a:solidFill>
+              </a:rPr>
+              <a:t>, like camera detection failures resulting in false negatives.</a:t>
+            </a:r>
+          </a:p>
+          <a:p>
+            <a:endParaRPr lang="en-ZA" dirty="0"/>
+          </a:p>
+        </p:txBody>
+      </p:sp>
+      <p:sp>
+        <p:nvSpPr>
+          <p:cNvPr id="4" name="Slide Number Placeholder 3"/>
+          <p:cNvSpPr>
+            <a:spLocks noGrp="1"/>
+          </p:cNvSpPr>
+          <p:nvPr>
+            <p:ph type="sldNum" sz="quarter" idx="5"/>
+          </p:nvPr>
+        </p:nvSpPr>
+        <p:spPr/>
+        <p:txBody>
+          <a:bodyPr/>
+          <a:lstStyle/>
+          <a:p>
+            <a:fld id="{C388E905-4B39-4285-AC49-8524FEB5A25F}" type="slidenum">
+              <a:rPr lang="en-ZA" smtClean="0"/>
+              <a:t>20</a:t>
+            </a:fld>
+            <a:endParaRPr lang="en-ZA"/>
+          </a:p>
+        </p:txBody>
+      </p:sp>
+    </p:spTree>
+    <p:extLst>
+      <p:ext uri="{BB962C8B-B14F-4D97-AF65-F5344CB8AC3E}">
+        <p14:creationId xmlns:p14="http://schemas.microsoft.com/office/powerpoint/2010/main" val="1727755288"/>
+      </p:ext>
+    </p:extLst>
+  </p:cSld>
+  <p:clrMapOvr>
+    <a:masterClrMapping/>
+  </p:clrMapOvr>
+</p:notes>
+</file>
+
 <file path=ppt/slideLayouts/slideLayout1.xml><?xml version="1.0" encoding="utf-8"?>
 <p:sldLayout xmlns:a="http://schemas.openxmlformats.org/drawingml/2006/main" xmlns:r="http://schemas.openxmlformats.org/officeDocument/2006/relationships" xmlns:p="http://schemas.openxmlformats.org/presentationml/2006/main" type="title" preserve="1">
   <p:cSld name="Title Slide">
@@ -1696,7 +2444,7 @@
           <a:p>
             <a:fld id="{69BCD296-6245-4EA2-A5B5-33069CFA9DD2}" type="datetimeFigureOut">
               <a:rPr lang="en-ZA" smtClean="0"/>
-              <a:t>2026/06/26</a:t>
+              <a:t>2026/06/27</a:t>
             </a:fld>
             <a:endParaRPr lang="en-ZA"/>
           </a:p>
@@ -1896,7 +2644,7 @@
           <a:p>
             <a:fld id="{69BCD296-6245-4EA2-A5B5-33069CFA9DD2}" type="datetimeFigureOut">
               <a:rPr lang="en-ZA" smtClean="0"/>
-              <a:t>2026/06/26</a:t>
+              <a:t>2026/06/27</a:t>
             </a:fld>
             <a:endParaRPr lang="en-ZA"/>
           </a:p>
@@ -2106,7 +2854,7 @@
           <a:p>
             <a:fld id="{69BCD296-6245-4EA2-A5B5-33069CFA9DD2}" type="datetimeFigureOut">
               <a:rPr lang="en-ZA" smtClean="0"/>
-              <a:t>2026/06/26</a:t>
+              <a:t>2026/06/27</a:t>
             </a:fld>
             <a:endParaRPr lang="en-ZA"/>
           </a:p>
@@ -2306,7 +3054,7 @@
           <a:p>
             <a:fld id="{69BCD296-6245-4EA2-A5B5-33069CFA9DD2}" type="datetimeFigureOut">
               <a:rPr lang="en-ZA" smtClean="0"/>
-              <a:t>2026/06/26</a:t>
+              <a:t>2026/06/27</a:t>
             </a:fld>
             <a:endParaRPr lang="en-ZA"/>
           </a:p>
@@ -2582,7 +3330,7 @@
           <a:p>
             <a:fld id="{69BCD296-6245-4EA2-A5B5-33069CFA9DD2}" type="datetimeFigureOut">
               <a:rPr lang="en-ZA" smtClean="0"/>
-              <a:t>2026/06/26</a:t>
+              <a:t>2026/06/27</a:t>
             </a:fld>
             <a:endParaRPr lang="en-ZA"/>
           </a:p>
@@ -2850,7 +3598,7 @@
           <a:p>
             <a:fld id="{69BCD296-6245-4EA2-A5B5-33069CFA9DD2}" type="datetimeFigureOut">
               <a:rPr lang="en-ZA" smtClean="0"/>
-              <a:t>2026/06/26</a:t>
+              <a:t>2026/06/27</a:t>
             </a:fld>
             <a:endParaRPr lang="en-ZA"/>
           </a:p>
@@ -3265,7 +4013,7 @@
           <a:p>
             <a:fld id="{69BCD296-6245-4EA2-A5B5-33069CFA9DD2}" type="datetimeFigureOut">
               <a:rPr lang="en-ZA" smtClean="0"/>
-              <a:t>2026/06/26</a:t>
+              <a:t>2026/06/27</a:t>
             </a:fld>
             <a:endParaRPr lang="en-ZA"/>
           </a:p>
@@ -3407,7 +4155,7 @@
           <a:p>
             <a:fld id="{69BCD296-6245-4EA2-A5B5-33069CFA9DD2}" type="datetimeFigureOut">
               <a:rPr lang="en-ZA" smtClean="0"/>
-              <a:t>2026/06/26</a:t>
+              <a:t>2026/06/27</a:t>
             </a:fld>
             <a:endParaRPr lang="en-ZA"/>
           </a:p>
@@ -3520,7 +4268,7 @@
           <a:p>
             <a:fld id="{69BCD296-6245-4EA2-A5B5-33069CFA9DD2}" type="datetimeFigureOut">
               <a:rPr lang="en-ZA" smtClean="0"/>
-              <a:t>2026/06/26</a:t>
+              <a:t>2026/06/27</a:t>
             </a:fld>
             <a:endParaRPr lang="en-ZA"/>
           </a:p>
@@ -3833,7 +4581,7 @@
           <a:p>
             <a:fld id="{69BCD296-6245-4EA2-A5B5-33069CFA9DD2}" type="datetimeFigureOut">
               <a:rPr lang="en-ZA" smtClean="0"/>
-              <a:t>2026/06/26</a:t>
+              <a:t>2026/06/27</a:t>
             </a:fld>
             <a:endParaRPr lang="en-ZA"/>
           </a:p>
@@ -4122,7 +4870,7 @@
           <a:p>
             <a:fld id="{69BCD296-6245-4EA2-A5B5-33069CFA9DD2}" type="datetimeFigureOut">
               <a:rPr lang="en-ZA" smtClean="0"/>
-              <a:t>2026/06/26</a:t>
+              <a:t>2026/06/27</a:t>
             </a:fld>
             <a:endParaRPr lang="en-ZA"/>
           </a:p>
@@ -4368,7 +5116,7 @@
           <a:p>
             <a:fld id="{69BCD296-6245-4EA2-A5B5-33069CFA9DD2}" type="datetimeFigureOut">
               <a:rPr lang="en-ZA" smtClean="0"/>
-              <a:t>2026/06/26</a:t>
+              <a:t>2026/06/27</a:t>
             </a:fld>
             <a:endParaRPr lang="en-ZA"/>
           </a:p>
@@ -5739,7 +6487,7 @@
         </p:nvSpPr>
         <p:spPr>
           <a:xfrm>
-            <a:off x="4813138" y="3239004"/>
+            <a:off x="4813138" y="3218138"/>
             <a:ext cx="2440907" cy="923330"/>
           </a:xfrm>
           <a:prstGeom prst="rect">
@@ -5835,7 +6583,7 @@
         </p:nvSpPr>
         <p:spPr>
           <a:xfrm>
-            <a:off x="8898324" y="5419674"/>
+            <a:off x="8950412" y="5419674"/>
             <a:ext cx="2440907" cy="646331"/>
           </a:xfrm>
           <a:prstGeom prst="rect">
@@ -5883,7 +6631,7 @@
         </p:nvSpPr>
         <p:spPr>
           <a:xfrm>
-            <a:off x="4813137" y="5480472"/>
+            <a:off x="4813138" y="5419674"/>
             <a:ext cx="2440907" cy="923330"/>
           </a:xfrm>
           <a:prstGeom prst="rect">
@@ -6167,666 +6915,6 @@
 </file>
 
 <file path=ppt/slides/slide14.xml><?xml version="1.0" encoding="utf-8"?>
-<p:sld xmlns:a="http://schemas.openxmlformats.org/drawingml/2006/main" xmlns:r="http://schemas.openxmlformats.org/officeDocument/2006/relationships" xmlns:p="http://schemas.openxmlformats.org/presentationml/2006/main">
-  <p:cSld>
-    <p:spTree>
-      <p:nvGrpSpPr>
-        <p:cNvPr id="1" name=""/>
-        <p:cNvGrpSpPr/>
-        <p:nvPr/>
-      </p:nvGrpSpPr>
-      <p:grpSpPr>
-        <a:xfrm>
-          <a:off x="0" y="0"/>
-          <a:ext cx="0" cy="0"/>
-          <a:chOff x="0" y="0"/>
-          <a:chExt cx="0" cy="0"/>
-        </a:xfrm>
-      </p:grpSpPr>
-      <p:sp>
-        <p:nvSpPr>
-          <p:cNvPr id="3" name="Content Placeholder 2">
-            <a:extLst>
-              <a:ext uri="{FF2B5EF4-FFF2-40B4-BE49-F238E27FC236}">
-                <a16:creationId xmlns:a16="http://schemas.microsoft.com/office/drawing/2014/main" id="{49F91204-60F1-168F-4115-CF156827380B}"/>
-              </a:ext>
-            </a:extLst>
-          </p:cNvPr>
-          <p:cNvSpPr>
-            <a:spLocks noGrp="1"/>
-          </p:cNvSpPr>
-          <p:nvPr>
-            <p:ph idx="1"/>
-          </p:nvPr>
-        </p:nvSpPr>
-        <p:spPr>
-          <a:xfrm>
-            <a:off x="844952" y="1763551"/>
-            <a:ext cx="10515600" cy="1703067"/>
-          </a:xfrm>
-        </p:spPr>
-        <p:txBody>
-          <a:bodyPr>
-            <a:noAutofit/>
-          </a:bodyPr>
-          <a:lstStyle/>
-          <a:p>
-            <a:r>
-              <a:rPr lang="en-ZA" sz="1800" dirty="0">
-                <a:solidFill>
-                  <a:schemeClr val="bg1"/>
-                </a:solidFill>
-              </a:rPr>
-              <a:t>Its reliance on </a:t>
-            </a:r>
-            <a:r>
-              <a:rPr lang="en-ZA" sz="1800" b="1" dirty="0">
-                <a:solidFill>
-                  <a:srgbClr val="FFC000"/>
-                </a:solidFill>
-              </a:rPr>
-              <a:t>spatial abstraction</a:t>
-            </a:r>
-            <a:r>
-              <a:rPr lang="en-ZA" sz="1800" dirty="0">
-                <a:solidFill>
-                  <a:schemeClr val="bg1"/>
-                </a:solidFill>
-              </a:rPr>
-              <a:t>, lacking </a:t>
-            </a:r>
-            <a:r>
-              <a:rPr lang="en-ZA" sz="1800" b="1" dirty="0">
-                <a:solidFill>
-                  <a:srgbClr val="FFC000"/>
-                </a:solidFill>
-              </a:rPr>
-              <a:t>continuous geometric representation </a:t>
-            </a:r>
-            <a:r>
-              <a:rPr lang="en-ZA" sz="1800" dirty="0">
-                <a:solidFill>
-                  <a:schemeClr val="bg1"/>
-                </a:solidFill>
-              </a:rPr>
-              <a:t>of the environment.</a:t>
-            </a:r>
-          </a:p>
-          <a:p>
-            <a:r>
-              <a:rPr lang="en-ZA" sz="1800" dirty="0">
-                <a:solidFill>
-                  <a:schemeClr val="bg1"/>
-                </a:solidFill>
-              </a:rPr>
-              <a:t>The problem file defines </a:t>
-            </a:r>
-            <a:r>
-              <a:rPr lang="en-ZA" sz="1800" b="1" dirty="0">
-                <a:solidFill>
-                  <a:srgbClr val="FFC000"/>
-                </a:solidFill>
-              </a:rPr>
-              <a:t>world variables </a:t>
-            </a:r>
-            <a:r>
-              <a:rPr lang="en-ZA" sz="1800" dirty="0">
-                <a:solidFill>
-                  <a:schemeClr val="bg1"/>
-                </a:solidFill>
-              </a:rPr>
-              <a:t>but does not </a:t>
-            </a:r>
-            <a:r>
-              <a:rPr lang="en-ZA" sz="1800" b="1" dirty="0">
-                <a:solidFill>
-                  <a:srgbClr val="FFC000"/>
-                </a:solidFill>
-              </a:rPr>
-              <a:t>consider geometric conditions</a:t>
-            </a:r>
-            <a:r>
-              <a:rPr lang="en-ZA" sz="1800" dirty="0">
-                <a:solidFill>
-                  <a:schemeClr val="bg1"/>
-                </a:solidFill>
-              </a:rPr>
-              <a:t>, impacting the robot's ability to determine its </a:t>
-            </a:r>
-            <a:r>
-              <a:rPr lang="en-ZA" sz="1800" b="1" dirty="0">
-                <a:solidFill>
-                  <a:srgbClr val="FFC000"/>
-                </a:solidFill>
-              </a:rPr>
-              <a:t>exact location</a:t>
-            </a:r>
-            <a:r>
-              <a:rPr lang="en-ZA" sz="1800" dirty="0">
-                <a:solidFill>
-                  <a:schemeClr val="bg1"/>
-                </a:solidFill>
-              </a:rPr>
-              <a:t>.</a:t>
-            </a:r>
-          </a:p>
-          <a:p>
-            <a:r>
-              <a:rPr lang="en-ZA" sz="1800" dirty="0">
-                <a:solidFill>
-                  <a:schemeClr val="bg1"/>
-                </a:solidFill>
-              </a:rPr>
-              <a:t>The </a:t>
-            </a:r>
-            <a:r>
-              <a:rPr lang="en-ZA" sz="1800" b="1" dirty="0">
-                <a:solidFill>
-                  <a:srgbClr val="FFC000"/>
-                </a:solidFill>
-              </a:rPr>
-              <a:t>scenario </a:t>
-            </a:r>
-            <a:r>
-              <a:rPr lang="en-ZA" sz="1800" dirty="0">
-                <a:solidFill>
-                  <a:schemeClr val="bg1"/>
-                </a:solidFill>
-              </a:rPr>
-              <a:t>demonstrates this limitation, as the </a:t>
-            </a:r>
-            <a:r>
-              <a:rPr lang="en-ZA" sz="1800" b="1" dirty="0">
-                <a:solidFill>
-                  <a:srgbClr val="FFC000"/>
-                </a:solidFill>
-              </a:rPr>
-              <a:t>robot </a:t>
-            </a:r>
-            <a:r>
-              <a:rPr lang="en-ZA" sz="1800" dirty="0">
-                <a:solidFill>
-                  <a:schemeClr val="bg1"/>
-                </a:solidFill>
-              </a:rPr>
-              <a:t>needs to adjust its position to </a:t>
-            </a:r>
-            <a:r>
-              <a:rPr lang="en-ZA" sz="1800" b="1" dirty="0">
-                <a:solidFill>
-                  <a:srgbClr val="FFC000"/>
-                </a:solidFill>
-              </a:rPr>
-              <a:t>assess a victim's vitals,</a:t>
-            </a:r>
-            <a:r>
-              <a:rPr lang="en-ZA" sz="1800" dirty="0">
-                <a:solidFill>
-                  <a:schemeClr val="bg1"/>
-                </a:solidFill>
-              </a:rPr>
-              <a:t> ignoring the </a:t>
-            </a:r>
-            <a:r>
-              <a:rPr lang="en-ZA" sz="1800" b="1" dirty="0">
-                <a:solidFill>
-                  <a:srgbClr val="FFC000"/>
-                </a:solidFill>
-              </a:rPr>
-              <a:t>room's dimensions </a:t>
-            </a:r>
-            <a:r>
-              <a:rPr lang="en-ZA" sz="1800" dirty="0">
-                <a:solidFill>
-                  <a:schemeClr val="bg1"/>
-                </a:solidFill>
-              </a:rPr>
-              <a:t>and </a:t>
-            </a:r>
-            <a:r>
-              <a:rPr lang="en-ZA" sz="1800" b="1" dirty="0">
-                <a:solidFill>
-                  <a:srgbClr val="FFC000"/>
-                </a:solidFill>
-              </a:rPr>
-              <a:t>movement requirements within the room</a:t>
-            </a:r>
-            <a:r>
-              <a:rPr lang="en-ZA" sz="1800" dirty="0">
-                <a:solidFill>
-                  <a:schemeClr val="bg1"/>
-                </a:solidFill>
-              </a:rPr>
-              <a:t>.</a:t>
-            </a:r>
-          </a:p>
-        </p:txBody>
-      </p:sp>
-      <p:sp>
-        <p:nvSpPr>
-          <p:cNvPr id="5" name="TextBox 4">
-            <a:extLst>
-              <a:ext uri="{FF2B5EF4-FFF2-40B4-BE49-F238E27FC236}">
-                <a16:creationId xmlns:a16="http://schemas.microsoft.com/office/drawing/2014/main" id="{8D10DA55-BA46-CCBC-26C2-20AB0EE49D9F}"/>
-              </a:ext>
-            </a:extLst>
-          </p:cNvPr>
-          <p:cNvSpPr txBox="1"/>
-          <p:nvPr/>
-        </p:nvSpPr>
-        <p:spPr>
-          <a:xfrm>
-            <a:off x="578734" y="497711"/>
-            <a:ext cx="7974957" cy="707886"/>
-          </a:xfrm>
-          <a:prstGeom prst="rect">
-            <a:avLst/>
-          </a:prstGeom>
-          <a:noFill/>
-        </p:spPr>
-        <p:txBody>
-          <a:bodyPr wrap="square" rtlCol="0">
-            <a:spAutoFit/>
-          </a:bodyPr>
-          <a:lstStyle/>
-          <a:p>
-            <a:r>
-              <a:rPr lang="en-US" sz="4000" b="1" dirty="0">
-                <a:solidFill>
-                  <a:schemeClr val="bg1"/>
-                </a:solidFill>
-              </a:rPr>
-              <a:t>Limitations:</a:t>
-            </a:r>
-            <a:endParaRPr lang="en-ZA" sz="4000" b="1" dirty="0">
-              <a:solidFill>
-                <a:schemeClr val="bg1"/>
-              </a:solidFill>
-            </a:endParaRPr>
-          </a:p>
-        </p:txBody>
-      </p:sp>
-      <p:sp>
-        <p:nvSpPr>
-          <p:cNvPr id="6" name="TextBox 5">
-            <a:extLst>
-              <a:ext uri="{FF2B5EF4-FFF2-40B4-BE49-F238E27FC236}">
-                <a16:creationId xmlns:a16="http://schemas.microsoft.com/office/drawing/2014/main" id="{DFC8A3C3-5042-06C2-ED0D-02AD9D7F5389}"/>
-              </a:ext>
-            </a:extLst>
-          </p:cNvPr>
-          <p:cNvSpPr txBox="1"/>
-          <p:nvPr/>
-        </p:nvSpPr>
-        <p:spPr>
-          <a:xfrm>
-            <a:off x="844952" y="3715473"/>
-            <a:ext cx="10567686" cy="1477328"/>
-          </a:xfrm>
-          <a:prstGeom prst="rect">
-            <a:avLst/>
-          </a:prstGeom>
-          <a:noFill/>
-        </p:spPr>
-        <p:txBody>
-          <a:bodyPr wrap="square" rtlCol="0">
-            <a:spAutoFit/>
-          </a:bodyPr>
-          <a:lstStyle/>
-          <a:p>
-            <a:pPr marL="285750" indent="-285750">
-              <a:buFont typeface="Arial" panose="020B0604020202020204" pitchFamily="34" charset="0"/>
-              <a:buChar char="•"/>
-            </a:pPr>
-            <a:r>
-              <a:rPr lang="en-ZA" dirty="0">
-                <a:solidFill>
-                  <a:schemeClr val="bg1"/>
-                </a:solidFill>
-              </a:rPr>
-              <a:t>PDDL+ vs PDDL: </a:t>
-            </a:r>
-          </a:p>
-          <a:p>
-            <a:pPr marL="285750" indent="-285750">
-              <a:buFont typeface="Arial" panose="020B0604020202020204" pitchFamily="34" charset="0"/>
-              <a:buChar char="•"/>
-            </a:pPr>
-            <a:r>
-              <a:rPr lang="en-ZA" dirty="0">
-                <a:solidFill>
-                  <a:schemeClr val="bg1"/>
-                </a:solidFill>
-              </a:rPr>
-              <a:t>Converted into </a:t>
-            </a:r>
-            <a:r>
-              <a:rPr lang="en-ZA" b="1" dirty="0">
-                <a:solidFill>
-                  <a:srgbClr val="FFC000"/>
-                </a:solidFill>
-              </a:rPr>
-              <a:t>durative actions </a:t>
-            </a:r>
-            <a:r>
-              <a:rPr lang="en-ZA" dirty="0">
-                <a:solidFill>
-                  <a:schemeClr val="bg1"/>
-                </a:solidFill>
-              </a:rPr>
-              <a:t>to prevent battery depletion issues caused by </a:t>
-            </a:r>
-            <a:r>
-              <a:rPr lang="en-ZA" b="1" dirty="0">
-                <a:solidFill>
-                  <a:srgbClr val="FFC000"/>
-                </a:solidFill>
-              </a:rPr>
-              <a:t>time conflicts </a:t>
-            </a:r>
-            <a:r>
-              <a:rPr lang="en-ZA" dirty="0">
-                <a:solidFill>
-                  <a:schemeClr val="bg1"/>
-                </a:solidFill>
-              </a:rPr>
-              <a:t>in the planner.</a:t>
-            </a:r>
-          </a:p>
-          <a:p>
-            <a:pPr marL="285750" indent="-285750">
-              <a:buFont typeface="Arial" panose="020B0604020202020204" pitchFamily="34" charset="0"/>
-              <a:buChar char="•"/>
-            </a:pPr>
-            <a:r>
-              <a:rPr lang="en-ZA" dirty="0">
-                <a:solidFill>
-                  <a:schemeClr val="bg1"/>
-                </a:solidFill>
-              </a:rPr>
-              <a:t>Durative actions </a:t>
-            </a:r>
-            <a:r>
-              <a:rPr lang="en-ZA" b="1" dirty="0">
-                <a:solidFill>
-                  <a:srgbClr val="FFC000"/>
-                </a:solidFill>
-              </a:rPr>
-              <a:t>cannot be interrupted</a:t>
-            </a:r>
-            <a:r>
-              <a:rPr lang="en-ZA" dirty="0">
-                <a:solidFill>
-                  <a:schemeClr val="bg1"/>
-                </a:solidFill>
-              </a:rPr>
-              <a:t>, a limitation of PDDL; PDDL+ addresses this by permitting the use of "events" to manage processes more effectively.</a:t>
-            </a:r>
-          </a:p>
-        </p:txBody>
-      </p:sp>
-    </p:spTree>
-    <p:extLst>
-      <p:ext uri="{BB962C8B-B14F-4D97-AF65-F5344CB8AC3E}">
-        <p14:creationId xmlns:p14="http://schemas.microsoft.com/office/powerpoint/2010/main" val="3900484608"/>
-      </p:ext>
-    </p:extLst>
-  </p:cSld>
-  <p:clrMapOvr>
-    <a:masterClrMapping/>
-  </p:clrMapOvr>
-  <p:timing>
-    <p:tnLst>
-      <p:par>
-        <p:cTn id="1" dur="indefinite" restart="never" nodeType="tmRoot">
-          <p:childTnLst>
-            <p:seq concurrent="1" nextAc="seek">
-              <p:cTn id="2" dur="indefinite" nodeType="mainSeq">
-                <p:childTnLst>
-                  <p:par>
-                    <p:cTn id="3" fill="hold">
-                      <p:stCondLst>
-                        <p:cond delay="indefinite"/>
-                      </p:stCondLst>
-                      <p:childTnLst>
-                        <p:par>
-                          <p:cTn id="4" fill="hold">
-                            <p:stCondLst>
-                              <p:cond delay="0"/>
-                            </p:stCondLst>
-                            <p:childTnLst>
-                              <p:par>
-                                <p:cTn id="5" presetID="42" presetClass="entr" presetSubtype="0" fill="hold" grpId="0" nodeType="clickEffect">
-                                  <p:stCondLst>
-                                    <p:cond delay="0"/>
-                                  </p:stCondLst>
-                                  <p:childTnLst>
-                                    <p:set>
-                                      <p:cBhvr>
-                                        <p:cTn id="6" dur="1" fill="hold">
-                                          <p:stCondLst>
-                                            <p:cond delay="0"/>
-                                          </p:stCondLst>
-                                        </p:cTn>
-                                        <p:tgtEl>
-                                          <p:spTgt spid="3">
-                                            <p:txEl>
-                                              <p:pRg st="0" end="0"/>
-                                            </p:txEl>
-                                          </p:spTgt>
-                                        </p:tgtEl>
-                                        <p:attrNameLst>
-                                          <p:attrName>style.visibility</p:attrName>
-                                        </p:attrNameLst>
-                                      </p:cBhvr>
-                                      <p:to>
-                                        <p:strVal val="visible"/>
-                                      </p:to>
-                                    </p:set>
-                                    <p:animEffect transition="in" filter="fade">
-                                      <p:cBhvr>
-                                        <p:cTn id="7" dur="500"/>
-                                        <p:tgtEl>
-                                          <p:spTgt spid="3">
-                                            <p:txEl>
-                                              <p:pRg st="0" end="0"/>
-                                            </p:txEl>
-                                          </p:spTgt>
-                                        </p:tgtEl>
-                                      </p:cBhvr>
-                                    </p:animEffect>
-                                    <p:anim calcmode="lin" valueType="num">
-                                      <p:cBhvr>
-                                        <p:cTn id="8" dur="500" fill="hold"/>
-                                        <p:tgtEl>
-                                          <p:spTgt spid="3">
-                                            <p:txEl>
-                                              <p:pRg st="0" end="0"/>
-                                            </p:txEl>
-                                          </p:spTgt>
-                                        </p:tgtEl>
-                                        <p:attrNameLst>
-                                          <p:attrName>ppt_x</p:attrName>
-                                        </p:attrNameLst>
-                                      </p:cBhvr>
-                                      <p:tavLst>
-                                        <p:tav tm="0">
-                                          <p:val>
-                                            <p:strVal val="#ppt_x"/>
-                                          </p:val>
-                                        </p:tav>
-                                        <p:tav tm="100000">
-                                          <p:val>
-                                            <p:strVal val="#ppt_x"/>
-                                          </p:val>
-                                        </p:tav>
-                                      </p:tavLst>
-                                    </p:anim>
-                                    <p:anim calcmode="lin" valueType="num">
-                                      <p:cBhvr>
-                                        <p:cTn id="9" dur="500" fill="hold"/>
-                                        <p:tgtEl>
-                                          <p:spTgt spid="3">
-                                            <p:txEl>
-                                              <p:pRg st="0" end="0"/>
-                                            </p:txEl>
-                                          </p:spTgt>
-                                        </p:tgtEl>
-                                        <p:attrNameLst>
-                                          <p:attrName>ppt_y</p:attrName>
-                                        </p:attrNameLst>
-                                      </p:cBhvr>
-                                      <p:tavLst>
-                                        <p:tav tm="0">
-                                          <p:val>
-                                            <p:strVal val="#ppt_y+.1"/>
-                                          </p:val>
-                                        </p:tav>
-                                        <p:tav tm="100000">
-                                          <p:val>
-                                            <p:strVal val="#ppt_y"/>
-                                          </p:val>
-                                        </p:tav>
-                                      </p:tavLst>
-                                    </p:anim>
-                                  </p:childTnLst>
-                                </p:cTn>
-                              </p:par>
-                            </p:childTnLst>
-                          </p:cTn>
-                        </p:par>
-                      </p:childTnLst>
-                    </p:cTn>
-                  </p:par>
-                  <p:par>
-                    <p:cTn id="10" fill="hold">
-                      <p:stCondLst>
-                        <p:cond delay="indefinite"/>
-                      </p:stCondLst>
-                      <p:childTnLst>
-                        <p:par>
-                          <p:cTn id="11" fill="hold">
-                            <p:stCondLst>
-                              <p:cond delay="0"/>
-                            </p:stCondLst>
-                            <p:childTnLst>
-                              <p:par>
-                                <p:cTn id="12" presetID="42" presetClass="entr" presetSubtype="0" fill="hold" grpId="0" nodeType="clickEffect">
-                                  <p:stCondLst>
-                                    <p:cond delay="0"/>
-                                  </p:stCondLst>
-                                  <p:childTnLst>
-                                    <p:set>
-                                      <p:cBhvr>
-                                        <p:cTn id="13" dur="1" fill="hold">
-                                          <p:stCondLst>
-                                            <p:cond delay="0"/>
-                                          </p:stCondLst>
-                                        </p:cTn>
-                                        <p:tgtEl>
-                                          <p:spTgt spid="6"/>
-                                        </p:tgtEl>
-                                        <p:attrNameLst>
-                                          <p:attrName>style.visibility</p:attrName>
-                                        </p:attrNameLst>
-                                      </p:cBhvr>
-                                      <p:to>
-                                        <p:strVal val="visible"/>
-                                      </p:to>
-                                    </p:set>
-                                    <p:animEffect transition="in" filter="fade">
-                                      <p:cBhvr>
-                                        <p:cTn id="14" dur="500"/>
-                                        <p:tgtEl>
-                                          <p:spTgt spid="6"/>
-                                        </p:tgtEl>
-                                      </p:cBhvr>
-                                    </p:animEffect>
-                                    <p:anim calcmode="lin" valueType="num">
-                                      <p:cBhvr>
-                                        <p:cTn id="15" dur="500" fill="hold"/>
-                                        <p:tgtEl>
-                                          <p:spTgt spid="6"/>
-                                        </p:tgtEl>
-                                        <p:attrNameLst>
-                                          <p:attrName>ppt_x</p:attrName>
-                                        </p:attrNameLst>
-                                      </p:cBhvr>
-                                      <p:tavLst>
-                                        <p:tav tm="0">
-                                          <p:val>
-                                            <p:strVal val="#ppt_x"/>
-                                          </p:val>
-                                        </p:tav>
-                                        <p:tav tm="100000">
-                                          <p:val>
-                                            <p:strVal val="#ppt_x"/>
-                                          </p:val>
-                                        </p:tav>
-                                      </p:tavLst>
-                                    </p:anim>
-                                    <p:anim calcmode="lin" valueType="num">
-                                      <p:cBhvr>
-                                        <p:cTn id="16" dur="500" fill="hold"/>
-                                        <p:tgtEl>
-                                          <p:spTgt spid="6"/>
-                                        </p:tgtEl>
-                                        <p:attrNameLst>
-                                          <p:attrName>ppt_y</p:attrName>
-                                        </p:attrNameLst>
-                                      </p:cBhvr>
-                                      <p:tavLst>
-                                        <p:tav tm="0">
-                                          <p:val>
-                                            <p:strVal val="#ppt_y+.1"/>
-                                          </p:val>
-                                        </p:tav>
-                                        <p:tav tm="100000">
-                                          <p:val>
-                                            <p:strVal val="#ppt_y"/>
-                                          </p:val>
-                                        </p:tav>
-                                      </p:tavLst>
-                                    </p:anim>
-                                  </p:childTnLst>
-                                </p:cTn>
-                              </p:par>
-                            </p:childTnLst>
-                          </p:cTn>
-                        </p:par>
-                      </p:childTnLst>
-                    </p:cTn>
-                  </p:par>
-                </p:childTnLst>
-              </p:cTn>
-              <p:prevCondLst>
-                <p:cond evt="onPrev" delay="0">
-                  <p:tgtEl>
-                    <p:sldTgt/>
-                  </p:tgtEl>
-                </p:cond>
-              </p:prevCondLst>
-              <p:nextCondLst>
-                <p:cond evt="onNext" delay="0">
-                  <p:tgtEl>
-                    <p:sldTgt/>
-                  </p:tgtEl>
-                </p:cond>
-              </p:nextCondLst>
-            </p:seq>
-          </p:childTnLst>
-        </p:cTn>
-      </p:par>
-    </p:tnLst>
-    <p:bldLst>
-      <p:bldP spid="3" grpId="0" uiExpand="1" build="p"/>
-      <p:bldP spid="6" grpId="0"/>
-    </p:bldLst>
-  </p:timing>
-</p:sld>
-</file>
-
-<file path=ppt/slides/slide15.xml><?xml version="1.0" encoding="utf-8"?>
 <p:sld xmlns:a="http://schemas.openxmlformats.org/drawingml/2006/main" xmlns:r="http://schemas.openxmlformats.org/officeDocument/2006/relationships" xmlns:p="http://schemas.openxmlformats.org/presentationml/2006/main">
   <p:cSld>
     <p:spTree>
@@ -6991,7 +7079,7 @@
 </p:sld>
 </file>
 
-<file path=ppt/slides/slide16.xml><?xml version="1.0" encoding="utf-8"?>
+<file path=ppt/slides/slide15.xml><?xml version="1.0" encoding="utf-8"?>
 <p:sld xmlns:a="http://schemas.openxmlformats.org/drawingml/2006/main" xmlns:r="http://schemas.openxmlformats.org/officeDocument/2006/relationships" xmlns:p="http://schemas.openxmlformats.org/presentationml/2006/main">
   <p:cSld>
     <p:spTree>
@@ -7646,7 +7734,7 @@
         </p:nvSpPr>
         <p:spPr>
           <a:xfrm>
-            <a:off x="4813138" y="3239004"/>
+            <a:off x="4813137" y="3213947"/>
             <a:ext cx="2440907" cy="923330"/>
           </a:xfrm>
           <a:prstGeom prst="rect">
@@ -7742,7 +7830,7 @@
         </p:nvSpPr>
         <p:spPr>
           <a:xfrm>
-            <a:off x="8898324" y="5419674"/>
+            <a:off x="8898323" y="5419674"/>
             <a:ext cx="2440907" cy="646331"/>
           </a:xfrm>
           <a:prstGeom prst="rect">
@@ -7790,7 +7878,7 @@
         </p:nvSpPr>
         <p:spPr>
           <a:xfrm>
-            <a:off x="4813137" y="5480472"/>
+            <a:off x="4813137" y="5419674"/>
             <a:ext cx="2440907" cy="923330"/>
           </a:xfrm>
           <a:prstGeom prst="rect">
@@ -9197,7 +9285,7 @@
 </p:sld>
 </file>
 
-<file path=ppt/slides/slide17.xml><?xml version="1.0" encoding="utf-8"?>
+<file path=ppt/slides/slide16.xml><?xml version="1.0" encoding="utf-8"?>
 <p:sld xmlns:a="http://schemas.openxmlformats.org/drawingml/2006/main" xmlns:r="http://schemas.openxmlformats.org/officeDocument/2006/relationships" xmlns:p="http://schemas.openxmlformats.org/presentationml/2006/main">
   <p:cSld>
     <p:spTree>
@@ -10671,7 +10759,7 @@
 </p:sld>
 </file>
 
-<file path=ppt/slides/slide18.xml><?xml version="1.0" encoding="utf-8"?>
+<file path=ppt/slides/slide17.xml><?xml version="1.0" encoding="utf-8"?>
 <p:sld xmlns:a="http://schemas.openxmlformats.org/drawingml/2006/main" xmlns:r="http://schemas.openxmlformats.org/officeDocument/2006/relationships" xmlns:p="http://schemas.openxmlformats.org/presentationml/2006/main">
   <p:cSld>
     <p:spTree>
@@ -11409,7 +11497,7 @@
 </p:sld>
 </file>
 
-<file path=ppt/slides/slide19.xml><?xml version="1.0" encoding="utf-8"?>
+<file path=ppt/slides/slide18.xml><?xml version="1.0" encoding="utf-8"?>
 <p:sld xmlns:a="http://schemas.openxmlformats.org/drawingml/2006/main" xmlns:r="http://schemas.openxmlformats.org/officeDocument/2006/relationships" xmlns:p="http://schemas.openxmlformats.org/presentationml/2006/main">
   <p:cSld>
     <p:spTree>
@@ -11568,6 +11656,776 @@
 </p:sld>
 </file>
 
+<file path=ppt/slides/slide19.xml><?xml version="1.0" encoding="utf-8"?>
+<p:sld xmlns:a="http://schemas.openxmlformats.org/drawingml/2006/main" xmlns:r="http://schemas.openxmlformats.org/officeDocument/2006/relationships" xmlns:p="http://schemas.openxmlformats.org/presentationml/2006/main">
+  <p:cSld>
+    <p:spTree>
+      <p:nvGrpSpPr>
+        <p:cNvPr id="1" name=""/>
+        <p:cNvGrpSpPr/>
+        <p:nvPr/>
+      </p:nvGrpSpPr>
+      <p:grpSpPr>
+        <a:xfrm>
+          <a:off x="0" y="0"/>
+          <a:ext cx="0" cy="0"/>
+          <a:chOff x="0" y="0"/>
+          <a:chExt cx="0" cy="0"/>
+        </a:xfrm>
+      </p:grpSpPr>
+      <p:sp>
+        <p:nvSpPr>
+          <p:cNvPr id="5" name="TextBox 4">
+            <a:extLst>
+              <a:ext uri="{FF2B5EF4-FFF2-40B4-BE49-F238E27FC236}">
+                <a16:creationId xmlns:a16="http://schemas.microsoft.com/office/drawing/2014/main" id="{2A141594-C01A-3C1D-3636-69DF5CDD133B}"/>
+              </a:ext>
+            </a:extLst>
+          </p:cNvPr>
+          <p:cNvSpPr txBox="1"/>
+          <p:nvPr/>
+        </p:nvSpPr>
+        <p:spPr>
+          <a:xfrm>
+            <a:off x="578734" y="497711"/>
+            <a:ext cx="7974957" cy="707886"/>
+          </a:xfrm>
+          <a:prstGeom prst="rect">
+            <a:avLst/>
+          </a:prstGeom>
+          <a:noFill/>
+        </p:spPr>
+        <p:txBody>
+          <a:bodyPr wrap="square" rtlCol="0">
+            <a:spAutoFit/>
+          </a:bodyPr>
+          <a:lstStyle/>
+          <a:p>
+            <a:r>
+              <a:rPr lang="en-US" sz="4000" b="1" dirty="0">
+                <a:solidFill>
+                  <a:schemeClr val="bg1"/>
+                </a:solidFill>
+              </a:rPr>
+              <a:t>Scenarios:</a:t>
+            </a:r>
+            <a:endParaRPr lang="en-ZA" sz="4000" b="1" dirty="0">
+              <a:solidFill>
+                <a:schemeClr val="bg1"/>
+              </a:solidFill>
+            </a:endParaRPr>
+          </a:p>
+        </p:txBody>
+      </p:sp>
+      <p:sp>
+        <p:nvSpPr>
+          <p:cNvPr id="7" name="Rectangle: Rounded Corners 6">
+            <a:extLst>
+              <a:ext uri="{FF2B5EF4-FFF2-40B4-BE49-F238E27FC236}">
+                <a16:creationId xmlns:a16="http://schemas.microsoft.com/office/drawing/2014/main" id="{7FC4446B-18E2-8F6B-D17F-1175AEDE4ABB}"/>
+              </a:ext>
+            </a:extLst>
+          </p:cNvPr>
+          <p:cNvSpPr/>
+          <p:nvPr/>
+        </p:nvSpPr>
+        <p:spPr>
+          <a:xfrm>
+            <a:off x="2578902" y="2240179"/>
+            <a:ext cx="2774066" cy="923330"/>
+          </a:xfrm>
+          <a:prstGeom prst="roundRect">
+            <a:avLst/>
+          </a:prstGeom>
+          <a:solidFill>
+            <a:srgbClr val="FF99FF"/>
+          </a:solidFill>
+          <a:ln>
+            <a:solidFill>
+              <a:schemeClr val="bg1"/>
+            </a:solidFill>
+          </a:ln>
+        </p:spPr>
+        <p:style>
+          <a:lnRef idx="2">
+            <a:schemeClr val="accent1">
+              <a:shade val="15000"/>
+            </a:schemeClr>
+          </a:lnRef>
+          <a:fillRef idx="1">
+            <a:schemeClr val="accent1"/>
+          </a:fillRef>
+          <a:effectRef idx="0">
+            <a:schemeClr val="accent1"/>
+          </a:effectRef>
+          <a:fontRef idx="minor">
+            <a:schemeClr val="lt1"/>
+          </a:fontRef>
+        </p:style>
+        <p:txBody>
+          <a:bodyPr rtlCol="0" anchor="ctr"/>
+          <a:lstStyle/>
+          <a:p>
+            <a:pPr algn="ctr"/>
+            <a:r>
+              <a:rPr lang="en-US" sz="2000" dirty="0">
+                <a:solidFill>
+                  <a:schemeClr val="bg1"/>
+                </a:solidFill>
+              </a:rPr>
+              <a:t>Battery below 120</a:t>
+            </a:r>
+            <a:endParaRPr lang="en-ZA" sz="2000" dirty="0">
+              <a:solidFill>
+                <a:schemeClr val="bg1"/>
+              </a:solidFill>
+            </a:endParaRPr>
+          </a:p>
+        </p:txBody>
+      </p:sp>
+      <p:sp>
+        <p:nvSpPr>
+          <p:cNvPr id="8" name="Rectangle: Rounded Corners 7">
+            <a:extLst>
+              <a:ext uri="{FF2B5EF4-FFF2-40B4-BE49-F238E27FC236}">
+                <a16:creationId xmlns:a16="http://schemas.microsoft.com/office/drawing/2014/main" id="{C8D52053-329C-EBBE-E5A3-C745A6F2108E}"/>
+              </a:ext>
+            </a:extLst>
+          </p:cNvPr>
+          <p:cNvSpPr/>
+          <p:nvPr/>
+        </p:nvSpPr>
+        <p:spPr>
+          <a:xfrm>
+            <a:off x="6619960" y="2240179"/>
+            <a:ext cx="2774066" cy="923330"/>
+          </a:xfrm>
+          <a:prstGeom prst="roundRect">
+            <a:avLst/>
+          </a:prstGeom>
+          <a:solidFill>
+            <a:srgbClr val="FF99FF"/>
+          </a:solidFill>
+          <a:ln>
+            <a:solidFill>
+              <a:schemeClr val="bg1"/>
+            </a:solidFill>
+          </a:ln>
+        </p:spPr>
+        <p:style>
+          <a:lnRef idx="2">
+            <a:schemeClr val="accent1">
+              <a:shade val="15000"/>
+            </a:schemeClr>
+          </a:lnRef>
+          <a:fillRef idx="1">
+            <a:schemeClr val="accent1"/>
+          </a:fillRef>
+          <a:effectRef idx="0">
+            <a:schemeClr val="accent1"/>
+          </a:effectRef>
+          <a:fontRef idx="minor">
+            <a:schemeClr val="lt1"/>
+          </a:fontRef>
+        </p:style>
+        <p:txBody>
+          <a:bodyPr rtlCol="0" anchor="ctr"/>
+          <a:lstStyle/>
+          <a:p>
+            <a:pPr algn="ctr"/>
+            <a:r>
+              <a:rPr lang="en-US" sz="2000" dirty="0">
+                <a:solidFill>
+                  <a:schemeClr val="bg1"/>
+                </a:solidFill>
+              </a:rPr>
+              <a:t>Victim’s Health below 120</a:t>
+            </a:r>
+            <a:endParaRPr lang="en-ZA" sz="2000" dirty="0">
+              <a:solidFill>
+                <a:schemeClr val="bg1"/>
+              </a:solidFill>
+            </a:endParaRPr>
+          </a:p>
+        </p:txBody>
+      </p:sp>
+      <p:sp>
+        <p:nvSpPr>
+          <p:cNvPr id="9" name="Rectangle: Rounded Corners 8">
+            <a:extLst>
+              <a:ext uri="{FF2B5EF4-FFF2-40B4-BE49-F238E27FC236}">
+                <a16:creationId xmlns:a16="http://schemas.microsoft.com/office/drawing/2014/main" id="{55CC42EA-4CEA-FED2-13F2-9B450501841E}"/>
+              </a:ext>
+            </a:extLst>
+          </p:cNvPr>
+          <p:cNvSpPr/>
+          <p:nvPr/>
+        </p:nvSpPr>
+        <p:spPr>
+          <a:xfrm>
+            <a:off x="2578902" y="4157470"/>
+            <a:ext cx="2774066" cy="923330"/>
+          </a:xfrm>
+          <a:prstGeom prst="roundRect">
+            <a:avLst/>
+          </a:prstGeom>
+          <a:solidFill>
+            <a:srgbClr val="FF99FF"/>
+          </a:solidFill>
+          <a:ln>
+            <a:solidFill>
+              <a:schemeClr val="bg1"/>
+            </a:solidFill>
+          </a:ln>
+        </p:spPr>
+        <p:style>
+          <a:lnRef idx="2">
+            <a:schemeClr val="accent1">
+              <a:shade val="15000"/>
+            </a:schemeClr>
+          </a:lnRef>
+          <a:fillRef idx="1">
+            <a:schemeClr val="accent1"/>
+          </a:fillRef>
+          <a:effectRef idx="0">
+            <a:schemeClr val="accent1"/>
+          </a:effectRef>
+          <a:fontRef idx="minor">
+            <a:schemeClr val="lt1"/>
+          </a:fontRef>
+        </p:style>
+        <p:txBody>
+          <a:bodyPr rtlCol="0" anchor="ctr"/>
+          <a:lstStyle/>
+          <a:p>
+            <a:pPr algn="ctr"/>
+            <a:r>
+              <a:rPr lang="en-US" sz="2000" dirty="0">
+                <a:solidFill>
+                  <a:schemeClr val="bg1"/>
+                </a:solidFill>
+              </a:rPr>
+              <a:t>Time below 360</a:t>
+            </a:r>
+            <a:endParaRPr lang="en-ZA" sz="2000" dirty="0">
+              <a:solidFill>
+                <a:schemeClr val="bg1"/>
+              </a:solidFill>
+            </a:endParaRPr>
+          </a:p>
+        </p:txBody>
+      </p:sp>
+      <p:sp>
+        <p:nvSpPr>
+          <p:cNvPr id="10" name="Rectangle: Rounded Corners 9">
+            <a:extLst>
+              <a:ext uri="{FF2B5EF4-FFF2-40B4-BE49-F238E27FC236}">
+                <a16:creationId xmlns:a16="http://schemas.microsoft.com/office/drawing/2014/main" id="{281E541B-EF75-CED0-8D88-F739035F5A55}"/>
+              </a:ext>
+            </a:extLst>
+          </p:cNvPr>
+          <p:cNvSpPr/>
+          <p:nvPr/>
+        </p:nvSpPr>
+        <p:spPr>
+          <a:xfrm>
+            <a:off x="6619960" y="4157470"/>
+            <a:ext cx="2774066" cy="923330"/>
+          </a:xfrm>
+          <a:prstGeom prst="roundRect">
+            <a:avLst/>
+          </a:prstGeom>
+          <a:solidFill>
+            <a:srgbClr val="FF99FF"/>
+          </a:solidFill>
+          <a:ln>
+            <a:solidFill>
+              <a:schemeClr val="bg1"/>
+            </a:solidFill>
+          </a:ln>
+        </p:spPr>
+        <p:style>
+          <a:lnRef idx="2">
+            <a:schemeClr val="accent1">
+              <a:shade val="15000"/>
+            </a:schemeClr>
+          </a:lnRef>
+          <a:fillRef idx="1">
+            <a:schemeClr val="accent1"/>
+          </a:fillRef>
+          <a:effectRef idx="0">
+            <a:schemeClr val="accent1"/>
+          </a:effectRef>
+          <a:fontRef idx="minor">
+            <a:schemeClr val="lt1"/>
+          </a:fontRef>
+        </p:style>
+        <p:txBody>
+          <a:bodyPr rtlCol="0" anchor="ctr"/>
+          <a:lstStyle/>
+          <a:p>
+            <a:pPr algn="ctr"/>
+            <a:r>
+              <a:rPr lang="en-US" sz="2000" dirty="0">
+                <a:solidFill>
+                  <a:schemeClr val="bg1"/>
+                </a:solidFill>
+              </a:rPr>
+              <a:t>Obstacle</a:t>
+            </a:r>
+            <a:endParaRPr lang="en-ZA" sz="2000" dirty="0">
+              <a:solidFill>
+                <a:schemeClr val="bg1"/>
+              </a:solidFill>
+            </a:endParaRPr>
+          </a:p>
+        </p:txBody>
+      </p:sp>
+    </p:spTree>
+    <p:extLst>
+      <p:ext uri="{BB962C8B-B14F-4D97-AF65-F5344CB8AC3E}">
+        <p14:creationId xmlns:p14="http://schemas.microsoft.com/office/powerpoint/2010/main" val="575089625"/>
+      </p:ext>
+    </p:extLst>
+  </p:cSld>
+  <p:clrMapOvr>
+    <a:masterClrMapping/>
+  </p:clrMapOvr>
+  <p:timing>
+    <p:tnLst>
+      <p:par>
+        <p:cTn id="1" dur="indefinite" restart="never" nodeType="tmRoot">
+          <p:childTnLst>
+            <p:seq concurrent="1" nextAc="seek">
+              <p:cTn id="2" dur="indefinite" nodeType="mainSeq">
+                <p:childTnLst>
+                  <p:par>
+                    <p:cTn id="3" fill="hold">
+                      <p:stCondLst>
+                        <p:cond delay="indefinite"/>
+                      </p:stCondLst>
+                      <p:childTnLst>
+                        <p:par>
+                          <p:cTn id="4" fill="hold">
+                            <p:stCondLst>
+                              <p:cond delay="0"/>
+                            </p:stCondLst>
+                            <p:childTnLst>
+                              <p:par>
+                                <p:cTn id="5" presetID="42" presetClass="entr" presetSubtype="0" fill="hold" grpId="0" nodeType="clickEffect">
+                                  <p:stCondLst>
+                                    <p:cond delay="0"/>
+                                  </p:stCondLst>
+                                  <p:childTnLst>
+                                    <p:set>
+                                      <p:cBhvr>
+                                        <p:cTn id="6" dur="1" fill="hold">
+                                          <p:stCondLst>
+                                            <p:cond delay="0"/>
+                                          </p:stCondLst>
+                                        </p:cTn>
+                                        <p:tgtEl>
+                                          <p:spTgt spid="7"/>
+                                        </p:tgtEl>
+                                        <p:attrNameLst>
+                                          <p:attrName>style.visibility</p:attrName>
+                                        </p:attrNameLst>
+                                      </p:cBhvr>
+                                      <p:to>
+                                        <p:strVal val="visible"/>
+                                      </p:to>
+                                    </p:set>
+                                    <p:animEffect transition="in" filter="fade">
+                                      <p:cBhvr>
+                                        <p:cTn id="7" dur="1000"/>
+                                        <p:tgtEl>
+                                          <p:spTgt spid="7"/>
+                                        </p:tgtEl>
+                                      </p:cBhvr>
+                                    </p:animEffect>
+                                    <p:anim calcmode="lin" valueType="num">
+                                      <p:cBhvr>
+                                        <p:cTn id="8" dur="1000" fill="hold"/>
+                                        <p:tgtEl>
+                                          <p:spTgt spid="7"/>
+                                        </p:tgtEl>
+                                        <p:attrNameLst>
+                                          <p:attrName>ppt_x</p:attrName>
+                                        </p:attrNameLst>
+                                      </p:cBhvr>
+                                      <p:tavLst>
+                                        <p:tav tm="0">
+                                          <p:val>
+                                            <p:strVal val="#ppt_x"/>
+                                          </p:val>
+                                        </p:tav>
+                                        <p:tav tm="100000">
+                                          <p:val>
+                                            <p:strVal val="#ppt_x"/>
+                                          </p:val>
+                                        </p:tav>
+                                      </p:tavLst>
+                                    </p:anim>
+                                    <p:anim calcmode="lin" valueType="num">
+                                      <p:cBhvr>
+                                        <p:cTn id="9" dur="1000" fill="hold"/>
+                                        <p:tgtEl>
+                                          <p:spTgt spid="7"/>
+                                        </p:tgtEl>
+                                        <p:attrNameLst>
+                                          <p:attrName>ppt_y</p:attrName>
+                                        </p:attrNameLst>
+                                      </p:cBhvr>
+                                      <p:tavLst>
+                                        <p:tav tm="0">
+                                          <p:val>
+                                            <p:strVal val="#ppt_y+.1"/>
+                                          </p:val>
+                                        </p:tav>
+                                        <p:tav tm="100000">
+                                          <p:val>
+                                            <p:strVal val="#ppt_y"/>
+                                          </p:val>
+                                        </p:tav>
+                                      </p:tavLst>
+                                    </p:anim>
+                                  </p:childTnLst>
+                                </p:cTn>
+                              </p:par>
+                            </p:childTnLst>
+                          </p:cTn>
+                        </p:par>
+                      </p:childTnLst>
+                    </p:cTn>
+                  </p:par>
+                  <p:par>
+                    <p:cTn id="10" fill="hold">
+                      <p:stCondLst>
+                        <p:cond delay="indefinite"/>
+                      </p:stCondLst>
+                      <p:childTnLst>
+                        <p:par>
+                          <p:cTn id="11" fill="hold">
+                            <p:stCondLst>
+                              <p:cond delay="0"/>
+                            </p:stCondLst>
+                            <p:childTnLst>
+                              <p:par>
+                                <p:cTn id="12" presetID="42" presetClass="entr" presetSubtype="0" fill="hold" grpId="0" nodeType="clickEffect">
+                                  <p:stCondLst>
+                                    <p:cond delay="0"/>
+                                  </p:stCondLst>
+                                  <p:childTnLst>
+                                    <p:set>
+                                      <p:cBhvr>
+                                        <p:cTn id="13" dur="1" fill="hold">
+                                          <p:stCondLst>
+                                            <p:cond delay="0"/>
+                                          </p:stCondLst>
+                                        </p:cTn>
+                                        <p:tgtEl>
+                                          <p:spTgt spid="8"/>
+                                        </p:tgtEl>
+                                        <p:attrNameLst>
+                                          <p:attrName>style.visibility</p:attrName>
+                                        </p:attrNameLst>
+                                      </p:cBhvr>
+                                      <p:to>
+                                        <p:strVal val="visible"/>
+                                      </p:to>
+                                    </p:set>
+                                    <p:animEffect transition="in" filter="fade">
+                                      <p:cBhvr>
+                                        <p:cTn id="14" dur="1000"/>
+                                        <p:tgtEl>
+                                          <p:spTgt spid="8"/>
+                                        </p:tgtEl>
+                                      </p:cBhvr>
+                                    </p:animEffect>
+                                    <p:anim calcmode="lin" valueType="num">
+                                      <p:cBhvr>
+                                        <p:cTn id="15" dur="1000" fill="hold"/>
+                                        <p:tgtEl>
+                                          <p:spTgt spid="8"/>
+                                        </p:tgtEl>
+                                        <p:attrNameLst>
+                                          <p:attrName>ppt_x</p:attrName>
+                                        </p:attrNameLst>
+                                      </p:cBhvr>
+                                      <p:tavLst>
+                                        <p:tav tm="0">
+                                          <p:val>
+                                            <p:strVal val="#ppt_x"/>
+                                          </p:val>
+                                        </p:tav>
+                                        <p:tav tm="100000">
+                                          <p:val>
+                                            <p:strVal val="#ppt_x"/>
+                                          </p:val>
+                                        </p:tav>
+                                      </p:tavLst>
+                                    </p:anim>
+                                    <p:anim calcmode="lin" valueType="num">
+                                      <p:cBhvr>
+                                        <p:cTn id="16" dur="1000" fill="hold"/>
+                                        <p:tgtEl>
+                                          <p:spTgt spid="8"/>
+                                        </p:tgtEl>
+                                        <p:attrNameLst>
+                                          <p:attrName>ppt_y</p:attrName>
+                                        </p:attrNameLst>
+                                      </p:cBhvr>
+                                      <p:tavLst>
+                                        <p:tav tm="0">
+                                          <p:val>
+                                            <p:strVal val="#ppt_y+.1"/>
+                                          </p:val>
+                                        </p:tav>
+                                        <p:tav tm="100000">
+                                          <p:val>
+                                            <p:strVal val="#ppt_y"/>
+                                          </p:val>
+                                        </p:tav>
+                                      </p:tavLst>
+                                    </p:anim>
+                                  </p:childTnLst>
+                                </p:cTn>
+                              </p:par>
+                            </p:childTnLst>
+                          </p:cTn>
+                        </p:par>
+                      </p:childTnLst>
+                    </p:cTn>
+                  </p:par>
+                  <p:par>
+                    <p:cTn id="17" fill="hold">
+                      <p:stCondLst>
+                        <p:cond delay="indefinite"/>
+                      </p:stCondLst>
+                      <p:childTnLst>
+                        <p:par>
+                          <p:cTn id="18" fill="hold">
+                            <p:stCondLst>
+                              <p:cond delay="0"/>
+                            </p:stCondLst>
+                            <p:childTnLst>
+                              <p:par>
+                                <p:cTn id="19" presetID="42" presetClass="entr" presetSubtype="0" fill="hold" grpId="0" nodeType="clickEffect">
+                                  <p:stCondLst>
+                                    <p:cond delay="0"/>
+                                  </p:stCondLst>
+                                  <p:childTnLst>
+                                    <p:set>
+                                      <p:cBhvr>
+                                        <p:cTn id="20" dur="1" fill="hold">
+                                          <p:stCondLst>
+                                            <p:cond delay="0"/>
+                                          </p:stCondLst>
+                                        </p:cTn>
+                                        <p:tgtEl>
+                                          <p:spTgt spid="9"/>
+                                        </p:tgtEl>
+                                        <p:attrNameLst>
+                                          <p:attrName>style.visibility</p:attrName>
+                                        </p:attrNameLst>
+                                      </p:cBhvr>
+                                      <p:to>
+                                        <p:strVal val="visible"/>
+                                      </p:to>
+                                    </p:set>
+                                    <p:animEffect transition="in" filter="fade">
+                                      <p:cBhvr>
+                                        <p:cTn id="21" dur="1000"/>
+                                        <p:tgtEl>
+                                          <p:spTgt spid="9"/>
+                                        </p:tgtEl>
+                                      </p:cBhvr>
+                                    </p:animEffect>
+                                    <p:anim calcmode="lin" valueType="num">
+                                      <p:cBhvr>
+                                        <p:cTn id="22" dur="1000" fill="hold"/>
+                                        <p:tgtEl>
+                                          <p:spTgt spid="9"/>
+                                        </p:tgtEl>
+                                        <p:attrNameLst>
+                                          <p:attrName>ppt_x</p:attrName>
+                                        </p:attrNameLst>
+                                      </p:cBhvr>
+                                      <p:tavLst>
+                                        <p:tav tm="0">
+                                          <p:val>
+                                            <p:strVal val="#ppt_x"/>
+                                          </p:val>
+                                        </p:tav>
+                                        <p:tav tm="100000">
+                                          <p:val>
+                                            <p:strVal val="#ppt_x"/>
+                                          </p:val>
+                                        </p:tav>
+                                      </p:tavLst>
+                                    </p:anim>
+                                    <p:anim calcmode="lin" valueType="num">
+                                      <p:cBhvr>
+                                        <p:cTn id="23" dur="1000" fill="hold"/>
+                                        <p:tgtEl>
+                                          <p:spTgt spid="9"/>
+                                        </p:tgtEl>
+                                        <p:attrNameLst>
+                                          <p:attrName>ppt_y</p:attrName>
+                                        </p:attrNameLst>
+                                      </p:cBhvr>
+                                      <p:tavLst>
+                                        <p:tav tm="0">
+                                          <p:val>
+                                            <p:strVal val="#ppt_y+.1"/>
+                                          </p:val>
+                                        </p:tav>
+                                        <p:tav tm="100000">
+                                          <p:val>
+                                            <p:strVal val="#ppt_y"/>
+                                          </p:val>
+                                        </p:tav>
+                                      </p:tavLst>
+                                    </p:anim>
+                                  </p:childTnLst>
+                                </p:cTn>
+                              </p:par>
+                            </p:childTnLst>
+                          </p:cTn>
+                        </p:par>
+                      </p:childTnLst>
+                    </p:cTn>
+                  </p:par>
+                  <p:par>
+                    <p:cTn id="24" fill="hold">
+                      <p:stCondLst>
+                        <p:cond delay="indefinite"/>
+                      </p:stCondLst>
+                      <p:childTnLst>
+                        <p:par>
+                          <p:cTn id="25" fill="hold">
+                            <p:stCondLst>
+                              <p:cond delay="0"/>
+                            </p:stCondLst>
+                            <p:childTnLst>
+                              <p:par>
+                                <p:cTn id="26" presetID="42" presetClass="entr" presetSubtype="0" fill="hold" grpId="0" nodeType="clickEffect">
+                                  <p:stCondLst>
+                                    <p:cond delay="0"/>
+                                  </p:stCondLst>
+                                  <p:childTnLst>
+                                    <p:set>
+                                      <p:cBhvr>
+                                        <p:cTn id="27" dur="1" fill="hold">
+                                          <p:stCondLst>
+                                            <p:cond delay="0"/>
+                                          </p:stCondLst>
+                                        </p:cTn>
+                                        <p:tgtEl>
+                                          <p:spTgt spid="10"/>
+                                        </p:tgtEl>
+                                        <p:attrNameLst>
+                                          <p:attrName>style.visibility</p:attrName>
+                                        </p:attrNameLst>
+                                      </p:cBhvr>
+                                      <p:to>
+                                        <p:strVal val="visible"/>
+                                      </p:to>
+                                    </p:set>
+                                    <p:animEffect transition="in" filter="fade">
+                                      <p:cBhvr>
+                                        <p:cTn id="28" dur="1000"/>
+                                        <p:tgtEl>
+                                          <p:spTgt spid="10"/>
+                                        </p:tgtEl>
+                                      </p:cBhvr>
+                                    </p:animEffect>
+                                    <p:anim calcmode="lin" valueType="num">
+                                      <p:cBhvr>
+                                        <p:cTn id="29" dur="1000" fill="hold"/>
+                                        <p:tgtEl>
+                                          <p:spTgt spid="10"/>
+                                        </p:tgtEl>
+                                        <p:attrNameLst>
+                                          <p:attrName>ppt_x</p:attrName>
+                                        </p:attrNameLst>
+                                      </p:cBhvr>
+                                      <p:tavLst>
+                                        <p:tav tm="0">
+                                          <p:val>
+                                            <p:strVal val="#ppt_x"/>
+                                          </p:val>
+                                        </p:tav>
+                                        <p:tav tm="100000">
+                                          <p:val>
+                                            <p:strVal val="#ppt_x"/>
+                                          </p:val>
+                                        </p:tav>
+                                      </p:tavLst>
+                                    </p:anim>
+                                    <p:anim calcmode="lin" valueType="num">
+                                      <p:cBhvr>
+                                        <p:cTn id="30" dur="1000" fill="hold"/>
+                                        <p:tgtEl>
+                                          <p:spTgt spid="10"/>
+                                        </p:tgtEl>
+                                        <p:attrNameLst>
+                                          <p:attrName>ppt_y</p:attrName>
+                                        </p:attrNameLst>
+                                      </p:cBhvr>
+                                      <p:tavLst>
+                                        <p:tav tm="0">
+                                          <p:val>
+                                            <p:strVal val="#ppt_y+.1"/>
+                                          </p:val>
+                                        </p:tav>
+                                        <p:tav tm="100000">
+                                          <p:val>
+                                            <p:strVal val="#ppt_y"/>
+                                          </p:val>
+                                        </p:tav>
+                                      </p:tavLst>
+                                    </p:anim>
+                                  </p:childTnLst>
+                                </p:cTn>
+                              </p:par>
+                            </p:childTnLst>
+                          </p:cTn>
+                        </p:par>
+                      </p:childTnLst>
+                    </p:cTn>
+                  </p:par>
+                </p:childTnLst>
+              </p:cTn>
+              <p:prevCondLst>
+                <p:cond evt="onPrev" delay="0">
+                  <p:tgtEl>
+                    <p:sldTgt/>
+                  </p:tgtEl>
+                </p:cond>
+              </p:prevCondLst>
+              <p:nextCondLst>
+                <p:cond evt="onNext" delay="0">
+                  <p:tgtEl>
+                    <p:sldTgt/>
+                  </p:tgtEl>
+                </p:cond>
+              </p:nextCondLst>
+            </p:seq>
+          </p:childTnLst>
+        </p:cTn>
+      </p:par>
+    </p:tnLst>
+    <p:bldLst>
+      <p:bldP spid="7" grpId="0" animBg="1"/>
+      <p:bldP spid="8" grpId="0" animBg="1"/>
+      <p:bldP spid="9" grpId="0" animBg="1"/>
+      <p:bldP spid="10" grpId="0" animBg="1"/>
+    </p:bldLst>
+  </p:timing>
+</p:sld>
+</file>
+
 <file path=ppt/slides/slide2.xml><?xml version="1.0" encoding="utf-8"?>
 <p:sld xmlns:a="http://schemas.openxmlformats.org/drawingml/2006/main" xmlns:r="http://schemas.openxmlformats.org/officeDocument/2006/relationships" xmlns:p="http://schemas.openxmlformats.org/presentationml/2006/main">
   <p:cSld>
@@ -12651,10 +13509,139 @@
       </p:grpSpPr>
       <p:sp>
         <p:nvSpPr>
+          <p:cNvPr id="3" name="Content Placeholder 2">
+            <a:extLst>
+              <a:ext uri="{FF2B5EF4-FFF2-40B4-BE49-F238E27FC236}">
+                <a16:creationId xmlns:a16="http://schemas.microsoft.com/office/drawing/2014/main" id="{49F91204-60F1-168F-4115-CF156827380B}"/>
+              </a:ext>
+            </a:extLst>
+          </p:cNvPr>
+          <p:cNvSpPr>
+            <a:spLocks noGrp="1"/>
+          </p:cNvSpPr>
+          <p:nvPr>
+            <p:ph idx="1"/>
+          </p:nvPr>
+        </p:nvSpPr>
+        <p:spPr>
+          <a:xfrm>
+            <a:off x="844952" y="1763552"/>
+            <a:ext cx="10515600" cy="1037522"/>
+          </a:xfrm>
+        </p:spPr>
+        <p:txBody>
+          <a:bodyPr>
+            <a:noAutofit/>
+          </a:bodyPr>
+          <a:lstStyle/>
+          <a:p>
+            <a:r>
+              <a:rPr lang="en-ZA" sz="1800" dirty="0">
+                <a:solidFill>
+                  <a:schemeClr val="bg1"/>
+                </a:solidFill>
+              </a:rPr>
+              <a:t>Its reliance on </a:t>
+            </a:r>
+            <a:r>
+              <a:rPr lang="en-ZA" sz="1800" b="1" dirty="0">
+                <a:solidFill>
+                  <a:srgbClr val="FFC000"/>
+                </a:solidFill>
+              </a:rPr>
+              <a:t>spatial abstraction</a:t>
+            </a:r>
+            <a:r>
+              <a:rPr lang="en-ZA" sz="1800" dirty="0">
+                <a:solidFill>
+                  <a:schemeClr val="bg1"/>
+                </a:solidFill>
+              </a:rPr>
+              <a:t>, lacking </a:t>
+            </a:r>
+            <a:r>
+              <a:rPr lang="en-ZA" sz="1800" b="1" dirty="0">
+                <a:solidFill>
+                  <a:srgbClr val="FFC000"/>
+                </a:solidFill>
+              </a:rPr>
+              <a:t>continuous geometric representation </a:t>
+            </a:r>
+            <a:r>
+              <a:rPr lang="en-ZA" sz="1800" dirty="0">
+                <a:solidFill>
+                  <a:schemeClr val="bg1"/>
+                </a:solidFill>
+              </a:rPr>
+              <a:t>of the environment.</a:t>
+            </a:r>
+          </a:p>
+          <a:p>
+            <a:r>
+              <a:rPr lang="en-ZA" sz="1800" dirty="0">
+                <a:solidFill>
+                  <a:schemeClr val="bg1"/>
+                </a:solidFill>
+              </a:rPr>
+              <a:t>The problem file defines </a:t>
+            </a:r>
+            <a:r>
+              <a:rPr lang="en-ZA" sz="1800" b="1" dirty="0">
+                <a:solidFill>
+                  <a:srgbClr val="FFC000"/>
+                </a:solidFill>
+              </a:rPr>
+              <a:t>world variables </a:t>
+            </a:r>
+            <a:r>
+              <a:rPr lang="en-ZA" sz="1800" dirty="0">
+                <a:solidFill>
+                  <a:schemeClr val="bg1"/>
+                </a:solidFill>
+              </a:rPr>
+              <a:t>but does not </a:t>
+            </a:r>
+            <a:r>
+              <a:rPr lang="en-ZA" sz="1800" b="1" dirty="0">
+                <a:solidFill>
+                  <a:srgbClr val="FFC000"/>
+                </a:solidFill>
+              </a:rPr>
+              <a:t>consider geometric conditions</a:t>
+            </a:r>
+            <a:r>
+              <a:rPr lang="en-ZA" sz="1800" dirty="0">
+                <a:solidFill>
+                  <a:schemeClr val="bg1"/>
+                </a:solidFill>
+              </a:rPr>
+              <a:t>, impacting the robot's ability to determine its </a:t>
+            </a:r>
+            <a:r>
+              <a:rPr lang="en-ZA" sz="1800" b="1" dirty="0">
+                <a:solidFill>
+                  <a:srgbClr val="FFC000"/>
+                </a:solidFill>
+              </a:rPr>
+              <a:t>exact location</a:t>
+            </a:r>
+            <a:r>
+              <a:rPr lang="en-ZA" sz="1800" dirty="0">
+                <a:solidFill>
+                  <a:schemeClr val="bg1"/>
+                </a:solidFill>
+              </a:rPr>
+              <a:t>.</a:t>
+            </a:r>
+          </a:p>
+        </p:txBody>
+      </p:sp>
+      <p:sp>
+        <p:nvSpPr>
           <p:cNvPr id="5" name="TextBox 4">
             <a:extLst>
               <a:ext uri="{FF2B5EF4-FFF2-40B4-BE49-F238E27FC236}">
-                <a16:creationId xmlns:a16="http://schemas.microsoft.com/office/drawing/2014/main" id="{2A141594-C01A-3C1D-3636-69DF5CDD133B}"/>
+                <a16:creationId xmlns:a16="http://schemas.microsoft.com/office/drawing/2014/main" id="{8D10DA55-BA46-CCBC-26C2-20AB0EE49D9F}"/>
               </a:ext>
             </a:extLst>
           </p:cNvPr>
@@ -12683,7 +13670,7 @@
                   <a:schemeClr val="bg1"/>
                 </a:solidFill>
               </a:rPr>
-              <a:t>Scenarios:</a:t>
+              <a:t>Limitations:</a:t>
             </a:r>
             <a:endParaRPr lang="en-ZA" sz="4000" b="1" dirty="0">
               <a:solidFill>
@@ -12695,272 +13682,305 @@
       </p:sp>
       <p:sp>
         <p:nvSpPr>
-          <p:cNvPr id="7" name="Rectangle: Rounded Corners 6">
+          <p:cNvPr id="4" name="TextBox 3">
             <a:extLst>
               <a:ext uri="{FF2B5EF4-FFF2-40B4-BE49-F238E27FC236}">
-                <a16:creationId xmlns:a16="http://schemas.microsoft.com/office/drawing/2014/main" id="{7FC4446B-18E2-8F6B-D17F-1175AEDE4ABB}"/>
+                <a16:creationId xmlns:a16="http://schemas.microsoft.com/office/drawing/2014/main" id="{A96A2E3E-49AE-58F5-6FBB-DB65E89EAE02}"/>
               </a:ext>
             </a:extLst>
           </p:cNvPr>
-          <p:cNvSpPr/>
+          <p:cNvSpPr txBox="1"/>
           <p:nvPr/>
         </p:nvSpPr>
         <p:spPr>
           <a:xfrm>
-            <a:off x="2578902" y="2240179"/>
-            <a:ext cx="2774066" cy="923330"/>
+            <a:off x="844952" y="4396792"/>
+            <a:ext cx="10515600" cy="1631216"/>
           </a:xfrm>
-          <a:prstGeom prst="roundRect">
+          <a:prstGeom prst="rect">
             <a:avLst/>
           </a:prstGeom>
-          <a:solidFill>
-            <a:srgbClr val="FF99FF"/>
-          </a:solidFill>
-          <a:ln>
-            <a:solidFill>
-              <a:schemeClr val="bg1"/>
-            </a:solidFill>
-          </a:ln>
+          <a:noFill/>
         </p:spPr>
-        <p:style>
-          <a:lnRef idx="2">
-            <a:schemeClr val="accent1">
-              <a:shade val="15000"/>
-            </a:schemeClr>
-          </a:lnRef>
-          <a:fillRef idx="1">
-            <a:schemeClr val="accent1"/>
-          </a:fillRef>
-          <a:effectRef idx="0">
-            <a:schemeClr val="accent1"/>
-          </a:effectRef>
-          <a:fontRef idx="minor">
-            <a:schemeClr val="lt1"/>
-          </a:fontRef>
-        </p:style>
         <p:txBody>
-          <a:bodyPr rtlCol="0" anchor="ctr"/>
+          <a:bodyPr wrap="square">
+            <a:spAutoFit/>
+          </a:bodyPr>
           <a:lstStyle/>
           <a:p>
-            <a:pPr algn="ctr"/>
-            <a:r>
-              <a:rPr lang="en-US" sz="2000" dirty="0">
+            <a:pPr marL="285750" indent="-285750">
+              <a:spcBef>
+                <a:spcPts val="600"/>
+              </a:spcBef>
+              <a:buFont typeface="Arial" panose="020B0604020202020204" pitchFamily="34" charset="0"/>
+              <a:buChar char="•"/>
+            </a:pPr>
+            <a:r>
+              <a:rPr lang="en-ZA" b="1" dirty="0">
+                <a:solidFill>
+                  <a:srgbClr val="FFC000"/>
+                </a:solidFill>
+              </a:rPr>
+              <a:t>Rigidity in goal states </a:t>
+            </a:r>
+            <a:r>
+              <a:rPr lang="en-ZA" dirty="0">
                 <a:solidFill>
                   <a:schemeClr val="bg1"/>
                 </a:solidFill>
               </a:rPr>
-              <a:t>Battery below 120</a:t>
-            </a:r>
-            <a:endParaRPr lang="en-ZA" sz="2000" dirty="0">
-              <a:solidFill>
-                <a:schemeClr val="bg1"/>
-              </a:solidFill>
-            </a:endParaRPr>
+              <a:t>poses issues- leads to decisions that disregard the appropriate sequence of actions in search and rescue (SAR) scenarios.</a:t>
+            </a:r>
+          </a:p>
+          <a:p>
+            <a:pPr marL="285750" indent="-285750">
+              <a:spcBef>
+                <a:spcPts val="600"/>
+              </a:spcBef>
+              <a:buFont typeface="Arial" panose="020B0604020202020204" pitchFamily="34" charset="0"/>
+              <a:buChar char="•"/>
+            </a:pPr>
+            <a:r>
+              <a:rPr lang="en-ZA" dirty="0">
+                <a:solidFill>
+                  <a:schemeClr val="bg1"/>
+                </a:solidFill>
+              </a:rPr>
+              <a:t>The </a:t>
+            </a:r>
+            <a:r>
+              <a:rPr lang="en-ZA" b="1" dirty="0">
+                <a:solidFill>
+                  <a:srgbClr val="FFC000"/>
+                </a:solidFill>
+              </a:rPr>
+              <a:t>heuristic planner </a:t>
+            </a:r>
+            <a:r>
+              <a:rPr lang="en-ZA" dirty="0">
+                <a:solidFill>
+                  <a:schemeClr val="bg1"/>
+                </a:solidFill>
+              </a:rPr>
+              <a:t>tends to avoid challenging paths</a:t>
+            </a:r>
+          </a:p>
+          <a:p>
+            <a:pPr marL="285750" indent="-285750">
+              <a:spcBef>
+                <a:spcPts val="600"/>
+              </a:spcBef>
+              <a:buFont typeface="Arial" panose="020B0604020202020204" pitchFamily="34" charset="0"/>
+              <a:buChar char="•"/>
+            </a:pPr>
+            <a:r>
+              <a:rPr lang="en-ZA" dirty="0">
+                <a:solidFill>
+                  <a:schemeClr val="bg1"/>
+                </a:solidFill>
+              </a:rPr>
+              <a:t>Implementing an </a:t>
+            </a:r>
+            <a:r>
+              <a:rPr lang="en-ZA" b="1" dirty="0">
+                <a:solidFill>
+                  <a:srgbClr val="FFC000"/>
+                </a:solidFill>
+              </a:rPr>
+              <a:t>"abort-mission" effect </a:t>
+            </a:r>
+            <a:r>
+              <a:rPr lang="en-ZA" dirty="0">
+                <a:solidFill>
+                  <a:schemeClr val="bg1"/>
+                </a:solidFill>
+              </a:rPr>
+              <a:t>prevents continuation of processes if certain conditions are met, aiming to align actions with logical SAR sequences.</a:t>
+            </a:r>
           </a:p>
         </p:txBody>
       </p:sp>
       <p:sp>
         <p:nvSpPr>
-          <p:cNvPr id="8" name="Rectangle: Rounded Corners 7">
+          <p:cNvPr id="8" name="TextBox 7">
             <a:extLst>
               <a:ext uri="{FF2B5EF4-FFF2-40B4-BE49-F238E27FC236}">
-                <a16:creationId xmlns:a16="http://schemas.microsoft.com/office/drawing/2014/main" id="{C8D52053-329C-EBBE-E5A3-C745A6F2108E}"/>
+                <a16:creationId xmlns:a16="http://schemas.microsoft.com/office/drawing/2014/main" id="{E7413D2C-20FC-587F-7770-A9F2E8F8A10A}"/>
               </a:ext>
             </a:extLst>
           </p:cNvPr>
-          <p:cNvSpPr/>
+          <p:cNvSpPr txBox="1"/>
           <p:nvPr/>
         </p:nvSpPr>
         <p:spPr>
           <a:xfrm>
-            <a:off x="6619960" y="2240179"/>
-            <a:ext cx="2774066" cy="923330"/>
+            <a:off x="844952" y="3137268"/>
+            <a:ext cx="10426861" cy="923330"/>
           </a:xfrm>
-          <a:prstGeom prst="roundRect">
+          <a:prstGeom prst="rect">
             <a:avLst/>
           </a:prstGeom>
-          <a:solidFill>
-            <a:srgbClr val="FF99FF"/>
-          </a:solidFill>
-          <a:ln>
-            <a:solidFill>
-              <a:schemeClr val="bg1"/>
-            </a:solidFill>
-          </a:ln>
+          <a:noFill/>
         </p:spPr>
-        <p:style>
-          <a:lnRef idx="2">
-            <a:schemeClr val="accent1">
-              <a:shade val="15000"/>
-            </a:schemeClr>
-          </a:lnRef>
-          <a:fillRef idx="1">
-            <a:schemeClr val="accent1"/>
-          </a:fillRef>
-          <a:effectRef idx="0">
-            <a:schemeClr val="accent1"/>
-          </a:effectRef>
-          <a:fontRef idx="minor">
-            <a:schemeClr val="lt1"/>
-          </a:fontRef>
-        </p:style>
         <p:txBody>
-          <a:bodyPr rtlCol="0" anchor="ctr"/>
+          <a:bodyPr wrap="square">
+            <a:spAutoFit/>
+          </a:bodyPr>
           <a:lstStyle/>
           <a:p>
-            <a:pPr algn="ctr"/>
-            <a:r>
-              <a:rPr lang="en-US" sz="2000" dirty="0">
+            <a:pPr marL="285750" indent="-285750">
+              <a:buFont typeface="Arial" panose="020B0604020202020204" pitchFamily="34" charset="0"/>
+              <a:buChar char="•"/>
+            </a:pPr>
+            <a:r>
+              <a:rPr lang="en-ZA" sz="1800" dirty="0">
                 <a:solidFill>
                   <a:schemeClr val="bg1"/>
                 </a:solidFill>
               </a:rPr>
-              <a:t>Victim’s Health below 120</a:t>
-            </a:r>
-            <a:endParaRPr lang="en-ZA" sz="2000" dirty="0">
-              <a:solidFill>
-                <a:schemeClr val="bg1"/>
-              </a:solidFill>
-            </a:endParaRPr>
-          </a:p>
-        </p:txBody>
-      </p:sp>
-      <p:sp>
-        <p:nvSpPr>
-          <p:cNvPr id="9" name="Rectangle: Rounded Corners 8">
-            <a:extLst>
-              <a:ext uri="{FF2B5EF4-FFF2-40B4-BE49-F238E27FC236}">
-                <a16:creationId xmlns:a16="http://schemas.microsoft.com/office/drawing/2014/main" id="{55CC42EA-4CEA-FED2-13F2-9B450501841E}"/>
-              </a:ext>
-            </a:extLst>
-          </p:cNvPr>
-          <p:cNvSpPr/>
-          <p:nvPr/>
-        </p:nvSpPr>
-        <p:spPr>
-          <a:xfrm>
-            <a:off x="2578902" y="4157470"/>
-            <a:ext cx="2774066" cy="923330"/>
-          </a:xfrm>
-          <a:prstGeom prst="roundRect">
-            <a:avLst/>
-          </a:prstGeom>
-          <a:solidFill>
-            <a:srgbClr val="FF99FF"/>
-          </a:solidFill>
-          <a:ln>
-            <a:solidFill>
-              <a:schemeClr val="bg1"/>
-            </a:solidFill>
-          </a:ln>
-        </p:spPr>
-        <p:style>
-          <a:lnRef idx="2">
-            <a:schemeClr val="accent1">
-              <a:shade val="15000"/>
-            </a:schemeClr>
-          </a:lnRef>
-          <a:fillRef idx="1">
-            <a:schemeClr val="accent1"/>
-          </a:fillRef>
-          <a:effectRef idx="0">
-            <a:schemeClr val="accent1"/>
-          </a:effectRef>
-          <a:fontRef idx="minor">
-            <a:schemeClr val="lt1"/>
-          </a:fontRef>
-        </p:style>
-        <p:txBody>
-          <a:bodyPr rtlCol="0" anchor="ctr"/>
-          <a:lstStyle/>
-          <a:p>
-            <a:pPr algn="ctr"/>
-            <a:r>
-              <a:rPr lang="en-US" sz="2000" dirty="0">
+              <a:t>The </a:t>
+            </a:r>
+            <a:r>
+              <a:rPr lang="en-ZA" sz="1800" b="1" dirty="0">
+                <a:solidFill>
+                  <a:srgbClr val="FFC000"/>
+                </a:solidFill>
+              </a:rPr>
+              <a:t>scenario </a:t>
+            </a:r>
+            <a:r>
+              <a:rPr lang="en-ZA" sz="1800" dirty="0">
                 <a:solidFill>
                   <a:schemeClr val="bg1"/>
                 </a:solidFill>
               </a:rPr>
-              <a:t>Time below 360</a:t>
-            </a:r>
-            <a:endParaRPr lang="en-ZA" sz="2000" dirty="0">
-              <a:solidFill>
-                <a:schemeClr val="bg1"/>
-              </a:solidFill>
-            </a:endParaRPr>
-          </a:p>
-        </p:txBody>
-      </p:sp>
-      <p:sp>
-        <p:nvSpPr>
-          <p:cNvPr id="10" name="Rectangle: Rounded Corners 9">
-            <a:extLst>
-              <a:ext uri="{FF2B5EF4-FFF2-40B4-BE49-F238E27FC236}">
-                <a16:creationId xmlns:a16="http://schemas.microsoft.com/office/drawing/2014/main" id="{281E541B-EF75-CED0-8D88-F739035F5A55}"/>
-              </a:ext>
-            </a:extLst>
-          </p:cNvPr>
-          <p:cNvSpPr/>
-          <p:nvPr/>
-        </p:nvSpPr>
-        <p:spPr>
-          <a:xfrm>
-            <a:off x="6619960" y="4157470"/>
-            <a:ext cx="2774066" cy="923330"/>
-          </a:xfrm>
-          <a:prstGeom prst="roundRect">
-            <a:avLst/>
-          </a:prstGeom>
-          <a:solidFill>
-            <a:srgbClr val="FF99FF"/>
-          </a:solidFill>
-          <a:ln>
-            <a:solidFill>
-              <a:schemeClr val="bg1"/>
-            </a:solidFill>
-          </a:ln>
-        </p:spPr>
-        <p:style>
-          <a:lnRef idx="2">
-            <a:schemeClr val="accent1">
-              <a:shade val="15000"/>
-            </a:schemeClr>
-          </a:lnRef>
-          <a:fillRef idx="1">
-            <a:schemeClr val="accent1"/>
-          </a:fillRef>
-          <a:effectRef idx="0">
-            <a:schemeClr val="accent1"/>
-          </a:effectRef>
-          <a:fontRef idx="minor">
-            <a:schemeClr val="lt1"/>
-          </a:fontRef>
-        </p:style>
-        <p:txBody>
-          <a:bodyPr rtlCol="0" anchor="ctr"/>
-          <a:lstStyle/>
-          <a:p>
-            <a:pPr algn="ctr"/>
-            <a:r>
-              <a:rPr lang="en-US" sz="2000" dirty="0">
+              <a:t>demonstrates this limitation, as the </a:t>
+            </a:r>
+            <a:r>
+              <a:rPr lang="en-ZA" sz="1800" b="1" dirty="0">
+                <a:solidFill>
+                  <a:srgbClr val="FFC000"/>
+                </a:solidFill>
+              </a:rPr>
+              <a:t>robot </a:t>
+            </a:r>
+            <a:r>
+              <a:rPr lang="en-ZA" sz="1800" dirty="0">
                 <a:solidFill>
                   <a:schemeClr val="bg1"/>
                 </a:solidFill>
               </a:rPr>
-              <a:t>Obstacle</a:t>
-            </a:r>
-            <a:endParaRPr lang="en-ZA" sz="2000" dirty="0">
-              <a:solidFill>
-                <a:schemeClr val="bg1"/>
-              </a:solidFill>
-            </a:endParaRPr>
+              <a:t>needs to adjust its position to </a:t>
+            </a:r>
+            <a:r>
+              <a:rPr lang="en-ZA" sz="1800" b="1" dirty="0">
+                <a:solidFill>
+                  <a:srgbClr val="FFC000"/>
+                </a:solidFill>
+              </a:rPr>
+              <a:t>assess a victim's vitals,</a:t>
+            </a:r>
+            <a:r>
+              <a:rPr lang="en-ZA" sz="1800" dirty="0">
+                <a:solidFill>
+                  <a:schemeClr val="bg1"/>
+                </a:solidFill>
+              </a:rPr>
+              <a:t> ignoring the </a:t>
+            </a:r>
+            <a:r>
+              <a:rPr lang="en-ZA" sz="1800" b="1" dirty="0">
+                <a:solidFill>
+                  <a:srgbClr val="FFC000"/>
+                </a:solidFill>
+              </a:rPr>
+              <a:t>room's dimensions </a:t>
+            </a:r>
+            <a:r>
+              <a:rPr lang="en-ZA" sz="1800" dirty="0">
+                <a:solidFill>
+                  <a:schemeClr val="bg1"/>
+                </a:solidFill>
+              </a:rPr>
+              <a:t>and </a:t>
+            </a:r>
+            <a:r>
+              <a:rPr lang="en-ZA" sz="1800" b="1" dirty="0">
+                <a:solidFill>
+                  <a:srgbClr val="FFC000"/>
+                </a:solidFill>
+              </a:rPr>
+              <a:t>movement requirements within the room</a:t>
+            </a:r>
+            <a:r>
+              <a:rPr lang="en-ZA" sz="1800" dirty="0">
+                <a:solidFill>
+                  <a:schemeClr val="bg1"/>
+                </a:solidFill>
+              </a:rPr>
+              <a:t>.</a:t>
+            </a:r>
+          </a:p>
+          <a:p>
+            <a:pPr marL="285750" indent="-285750">
+              <a:buFont typeface="Arial" panose="020B0604020202020204" pitchFamily="34" charset="0"/>
+              <a:buChar char="•"/>
+            </a:pPr>
+            <a:r>
+              <a:rPr lang="en-ZA" dirty="0">
+                <a:solidFill>
+                  <a:schemeClr val="bg1"/>
+                </a:solidFill>
+              </a:rPr>
+              <a:t>The system assumes </a:t>
+            </a:r>
+            <a:r>
+              <a:rPr lang="en-ZA" b="1" dirty="0">
+                <a:solidFill>
+                  <a:srgbClr val="FFC000"/>
+                </a:solidFill>
+              </a:rPr>
+              <a:t>optimal conditions</a:t>
+            </a:r>
+            <a:r>
+              <a:rPr lang="en-ZA" dirty="0">
+                <a:solidFill>
+                  <a:schemeClr val="bg1"/>
+                </a:solidFill>
+              </a:rPr>
+              <a:t>, leading to </a:t>
+            </a:r>
+            <a:r>
+              <a:rPr lang="en-ZA" b="1" dirty="0">
+                <a:solidFill>
+                  <a:srgbClr val="FFC000"/>
+                </a:solidFill>
+              </a:rPr>
+              <a:t>challenges</a:t>
+            </a:r>
+            <a:r>
+              <a:rPr lang="en-ZA" dirty="0">
+                <a:solidFill>
+                  <a:schemeClr val="bg1"/>
+                </a:solidFill>
+              </a:rPr>
+              <a:t> in handling </a:t>
+            </a:r>
+            <a:r>
+              <a:rPr lang="en-ZA" b="1" dirty="0">
+                <a:solidFill>
+                  <a:srgbClr val="FFC000"/>
+                </a:solidFill>
+              </a:rPr>
+              <a:t>uncertainties</a:t>
+            </a:r>
           </a:p>
         </p:txBody>
       </p:sp>
     </p:spTree>
     <p:extLst>
       <p:ext uri="{BB962C8B-B14F-4D97-AF65-F5344CB8AC3E}">
-        <p14:creationId xmlns:p14="http://schemas.microsoft.com/office/powerpoint/2010/main" val="575089625"/>
+        <p14:creationId xmlns:p14="http://schemas.microsoft.com/office/powerpoint/2010/main" val="3900484608"/>
       </p:ext>
     </p:extLst>
   </p:cSld>
@@ -13001,7 +14021,11 @@
                                           </p:stCondLst>
                                         </p:cTn>
                                         <p:tgtEl>
-                                          <p:spTgt spid="7"/>
+                                          <p:spTgt spid="3">
+                                            <p:txEl>
+                                              <p:pRg st="0" end="0"/>
+                                            </p:txEl>
+                                          </p:spTgt>
                                         </p:tgtEl>
                                         <p:attrNameLst>
                                           <p:attrName>style.visibility</p:attrName>
@@ -13013,17 +14037,25 @@
                                     </p:set>
                                     <p:animEffect transition="in" filter="fade">
                                       <p:cBhvr>
-                                        <p:cTn id="7" dur="1000"/>
-                                        <p:tgtEl>
-                                          <p:spTgt spid="7"/>
+                                        <p:cTn id="7" dur="500"/>
+                                        <p:tgtEl>
+                                          <p:spTgt spid="3">
+                                            <p:txEl>
+                                              <p:pRg st="0" end="0"/>
+                                            </p:txEl>
+                                          </p:spTgt>
                                         </p:tgtEl>
                                       </p:cBhvr>
                                     </p:animEffect>
                                     <p:anim calcmode="lin" valueType="num">
                                       <p:cBhvr>
-                                        <p:cTn id="8" dur="1000" fill="hold"/>
-                                        <p:tgtEl>
-                                          <p:spTgt spid="7"/>
+                                        <p:cTn id="8" dur="500" fill="hold"/>
+                                        <p:tgtEl>
+                                          <p:spTgt spid="3">
+                                            <p:txEl>
+                                              <p:pRg st="0" end="0"/>
+                                            </p:txEl>
+                                          </p:spTgt>
                                         </p:tgtEl>
                                         <p:attrNameLst>
                                           <p:attrName>ppt_x</p:attrName>
@@ -13044,9 +14076,13 @@
                                     </p:anim>
                                     <p:anim calcmode="lin" valueType="num">
                                       <p:cBhvr>
-                                        <p:cTn id="9" dur="1000" fill="hold"/>
-                                        <p:tgtEl>
-                                          <p:spTgt spid="7"/>
+                                        <p:cTn id="9" dur="500" fill="hold"/>
+                                        <p:tgtEl>
+                                          <p:spTgt spid="3">
+                                            <p:txEl>
+                                              <p:pRg st="0" end="0"/>
+                                            </p:txEl>
+                                          </p:spTgt>
                                         </p:tgtEl>
                                         <p:attrNameLst>
                                           <p:attrName>ppt_y</p:attrName>
@@ -13112,7 +14148,7 @@
                                     </p:set>
                                     <p:animEffect transition="in" filter="fade">
                                       <p:cBhvr>
-                                        <p:cTn id="14" dur="1000"/>
+                                        <p:cTn id="14" dur="500"/>
                                         <p:tgtEl>
                                           <p:spTgt spid="8"/>
                                         </p:tgtEl>
@@ -13120,7 +14156,7 @@
                                     </p:animEffect>
                                     <p:anim calcmode="lin" valueType="num">
                                       <p:cBhvr>
-                                        <p:cTn id="15" dur="1000" fill="hold"/>
+                                        <p:cTn id="15" dur="500" fill="hold"/>
                                         <p:tgtEl>
                                           <p:spTgt spid="8"/>
                                         </p:tgtEl>
@@ -13143,7 +14179,7 @@
                                     </p:anim>
                                     <p:anim calcmode="lin" valueType="num">
                                       <p:cBhvr>
-                                        <p:cTn id="16" dur="1000" fill="hold"/>
+                                        <p:cTn id="16" dur="500" fill="hold"/>
                                         <p:tgtEl>
                                           <p:spTgt spid="8"/>
                                         </p:tgtEl>
@@ -13199,7 +14235,7 @@
                                           </p:stCondLst>
                                         </p:cTn>
                                         <p:tgtEl>
-                                          <p:spTgt spid="9"/>
+                                          <p:spTgt spid="4"/>
                                         </p:tgtEl>
                                         <p:attrNameLst>
                                           <p:attrName>style.visibility</p:attrName>
@@ -13211,17 +14247,17 @@
                                     </p:set>
                                     <p:animEffect transition="in" filter="fade">
                                       <p:cBhvr>
-                                        <p:cTn id="21" dur="1000"/>
-                                        <p:tgtEl>
-                                          <p:spTgt spid="9"/>
+                                        <p:cTn id="21" dur="500"/>
+                                        <p:tgtEl>
+                                          <p:spTgt spid="4"/>
                                         </p:tgtEl>
                                       </p:cBhvr>
                                     </p:animEffect>
                                     <p:anim calcmode="lin" valueType="num">
                                       <p:cBhvr>
-                                        <p:cTn id="22" dur="1000" fill="hold"/>
-                                        <p:tgtEl>
-                                          <p:spTgt spid="9"/>
+                                        <p:cTn id="22" dur="500" fill="hold"/>
+                                        <p:tgtEl>
+                                          <p:spTgt spid="4"/>
                                         </p:tgtEl>
                                         <p:attrNameLst>
                                           <p:attrName>ppt_x</p:attrName>
@@ -13242,108 +14278,9 @@
                                     </p:anim>
                                     <p:anim calcmode="lin" valueType="num">
                                       <p:cBhvr>
-                                        <p:cTn id="23" dur="1000" fill="hold"/>
-                                        <p:tgtEl>
-                                          <p:spTgt spid="9"/>
-                                        </p:tgtEl>
-                                        <p:attrNameLst>
-                                          <p:attrName>ppt_y</p:attrName>
-                                        </p:attrNameLst>
-                                      </p:cBhvr>
-                                      <p:tavLst>
-                                        <p:tav tm="0">
-                                          <p:val>
-                                            <p:strVal val="#ppt_y+.1"/>
-                                          </p:val>
-                                        </p:tav>
-                                        <p:tav tm="100000">
-                                          <p:val>
-                                            <p:strVal val="#ppt_y"/>
-                                          </p:val>
-                                        </p:tav>
-                                      </p:tavLst>
-                                    </p:anim>
-                                  </p:childTnLst>
-                                </p:cTn>
-                              </p:par>
-                            </p:childTnLst>
-                          </p:cTn>
-                        </p:par>
-                      </p:childTnLst>
-                    </p:cTn>
-                  </p:par>
-                  <p:par>
-                    <p:cTn id="24" fill="hold">
-                      <p:stCondLst>
-                        <p:cond delay="indefinite"/>
-                      </p:stCondLst>
-                      <p:childTnLst>
-                        <p:par>
-                          <p:cTn id="25" fill="hold">
-                            <p:stCondLst>
-                              <p:cond delay="0"/>
-                            </p:stCondLst>
-                            <p:childTnLst>
-                              <p:par>
-                                <p:cTn id="26" presetID="42" presetClass="entr" presetSubtype="0" fill="hold" grpId="0" nodeType="clickEffect">
-                                  <p:stCondLst>
-                                    <p:cond delay="0"/>
-                                  </p:stCondLst>
-                                  <p:childTnLst>
-                                    <p:set>
-                                      <p:cBhvr>
-                                        <p:cTn id="27" dur="1" fill="hold">
-                                          <p:stCondLst>
-                                            <p:cond delay="0"/>
-                                          </p:stCondLst>
-                                        </p:cTn>
-                                        <p:tgtEl>
-                                          <p:spTgt spid="10"/>
-                                        </p:tgtEl>
-                                        <p:attrNameLst>
-                                          <p:attrName>style.visibility</p:attrName>
-                                        </p:attrNameLst>
-                                      </p:cBhvr>
-                                      <p:to>
-                                        <p:strVal val="visible"/>
-                                      </p:to>
-                                    </p:set>
-                                    <p:animEffect transition="in" filter="fade">
-                                      <p:cBhvr>
-                                        <p:cTn id="28" dur="1000"/>
-                                        <p:tgtEl>
-                                          <p:spTgt spid="10"/>
-                                        </p:tgtEl>
-                                      </p:cBhvr>
-                                    </p:animEffect>
-                                    <p:anim calcmode="lin" valueType="num">
-                                      <p:cBhvr>
-                                        <p:cTn id="29" dur="1000" fill="hold"/>
-                                        <p:tgtEl>
-                                          <p:spTgt spid="10"/>
-                                        </p:tgtEl>
-                                        <p:attrNameLst>
-                                          <p:attrName>ppt_x</p:attrName>
-                                        </p:attrNameLst>
-                                      </p:cBhvr>
-                                      <p:tavLst>
-                                        <p:tav tm="0">
-                                          <p:val>
-                                            <p:strVal val="#ppt_x"/>
-                                          </p:val>
-                                        </p:tav>
-                                        <p:tav tm="100000">
-                                          <p:val>
-                                            <p:strVal val="#ppt_x"/>
-                                          </p:val>
-                                        </p:tav>
-                                      </p:tavLst>
-                                    </p:anim>
-                                    <p:anim calcmode="lin" valueType="num">
-                                      <p:cBhvr>
-                                        <p:cTn id="30" dur="1000" fill="hold"/>
-                                        <p:tgtEl>
-                                          <p:spTgt spid="10"/>
+                                        <p:cTn id="23" dur="500" fill="hold"/>
+                                        <p:tgtEl>
+                                          <p:spTgt spid="4"/>
                                         </p:tgtEl>
                                         <p:attrNameLst>
                                           <p:attrName>ppt_y</p:attrName>
@@ -13393,10 +14330,9 @@
       </p:par>
     </p:tnLst>
     <p:bldLst>
-      <p:bldP spid="7" grpId="0" animBg="1"/>
-      <p:bldP spid="8" grpId="0" animBg="1"/>
-      <p:bldP spid="9" grpId="0" animBg="1"/>
-      <p:bldP spid="10" grpId="0" animBg="1"/>
+      <p:bldP spid="3" grpId="0" uiExpand="1" build="p"/>
+      <p:bldP spid="4" grpId="0"/>
+      <p:bldP spid="8" grpId="0"/>
     </p:bldLst>
   </p:timing>
 </p:sld>
@@ -13469,10 +14405,434 @@
           </a:p>
         </p:txBody>
       </p:sp>
+      <p:sp>
+        <p:nvSpPr>
+          <p:cNvPr id="4" name="TextBox 3">
+            <a:extLst>
+              <a:ext uri="{FF2B5EF4-FFF2-40B4-BE49-F238E27FC236}">
+                <a16:creationId xmlns:a16="http://schemas.microsoft.com/office/drawing/2014/main" id="{0684D011-B193-E8AD-CC52-0402F7FC19A9}"/>
+              </a:ext>
+            </a:extLst>
+          </p:cNvPr>
+          <p:cNvSpPr txBox="1"/>
+          <p:nvPr/>
+        </p:nvSpPr>
+        <p:spPr>
+          <a:xfrm>
+            <a:off x="812157" y="2197893"/>
+            <a:ext cx="10567686" cy="2462213"/>
+          </a:xfrm>
+          <a:prstGeom prst="rect">
+            <a:avLst/>
+          </a:prstGeom>
+          <a:noFill/>
+        </p:spPr>
+        <p:txBody>
+          <a:bodyPr wrap="square" rtlCol="0">
+            <a:spAutoFit/>
+          </a:bodyPr>
+          <a:lstStyle/>
+          <a:p>
+            <a:pPr marL="285750" indent="-285750">
+              <a:spcBef>
+                <a:spcPts val="600"/>
+              </a:spcBef>
+              <a:buFont typeface="Arial" panose="020B0604020202020204" pitchFamily="34" charset="0"/>
+              <a:buChar char="•"/>
+            </a:pPr>
+            <a:r>
+              <a:rPr lang="en-ZA" sz="2400" dirty="0">
+                <a:solidFill>
+                  <a:schemeClr val="bg1"/>
+                </a:solidFill>
+              </a:rPr>
+              <a:t>PDDL+ vs PDDL: </a:t>
+            </a:r>
+          </a:p>
+          <a:p>
+            <a:pPr marL="285750" indent="-285750">
+              <a:spcBef>
+                <a:spcPts val="600"/>
+              </a:spcBef>
+              <a:buFont typeface="Arial" panose="020B0604020202020204" pitchFamily="34" charset="0"/>
+              <a:buChar char="•"/>
+            </a:pPr>
+            <a:r>
+              <a:rPr lang="en-ZA" sz="2400" dirty="0">
+                <a:solidFill>
+                  <a:schemeClr val="bg1"/>
+                </a:solidFill>
+              </a:rPr>
+              <a:t>Converted into </a:t>
+            </a:r>
+            <a:r>
+              <a:rPr lang="en-ZA" sz="2400" b="1" dirty="0">
+                <a:solidFill>
+                  <a:srgbClr val="FFC000"/>
+                </a:solidFill>
+              </a:rPr>
+              <a:t>durative actions </a:t>
+            </a:r>
+            <a:r>
+              <a:rPr lang="en-ZA" sz="2400" dirty="0">
+                <a:solidFill>
+                  <a:schemeClr val="bg1"/>
+                </a:solidFill>
+              </a:rPr>
+              <a:t>to prevent battery depletion issues caused by </a:t>
+            </a:r>
+            <a:r>
+              <a:rPr lang="en-ZA" sz="2400" b="1" dirty="0">
+                <a:solidFill>
+                  <a:srgbClr val="FFC000"/>
+                </a:solidFill>
+              </a:rPr>
+              <a:t>time conflicts </a:t>
+            </a:r>
+            <a:r>
+              <a:rPr lang="en-ZA" sz="2400" dirty="0">
+                <a:solidFill>
+                  <a:schemeClr val="bg1"/>
+                </a:solidFill>
+              </a:rPr>
+              <a:t>in the planner.</a:t>
+            </a:r>
+          </a:p>
+          <a:p>
+            <a:pPr marL="285750" indent="-285750">
+              <a:spcBef>
+                <a:spcPts val="600"/>
+              </a:spcBef>
+              <a:buFont typeface="Arial" panose="020B0604020202020204" pitchFamily="34" charset="0"/>
+              <a:buChar char="•"/>
+            </a:pPr>
+            <a:r>
+              <a:rPr lang="en-ZA" sz="2400" dirty="0">
+                <a:solidFill>
+                  <a:schemeClr val="bg1"/>
+                </a:solidFill>
+              </a:rPr>
+              <a:t>Durative actions </a:t>
+            </a:r>
+            <a:r>
+              <a:rPr lang="en-ZA" sz="2400" b="1" dirty="0">
+                <a:solidFill>
+                  <a:srgbClr val="FFC000"/>
+                </a:solidFill>
+              </a:rPr>
+              <a:t>cannot be interrupted</a:t>
+            </a:r>
+            <a:r>
+              <a:rPr lang="en-ZA" sz="2400" dirty="0">
+                <a:solidFill>
+                  <a:schemeClr val="bg1"/>
+                </a:solidFill>
+              </a:rPr>
+              <a:t>, a limitation of PDDL; PDDL+ addresses this by permitting the use of "events" to manage processes more effectively.</a:t>
+            </a:r>
+          </a:p>
+        </p:txBody>
+      </p:sp>
     </p:spTree>
     <p:extLst>
       <p:ext uri="{BB962C8B-B14F-4D97-AF65-F5344CB8AC3E}">
         <p14:creationId xmlns:p14="http://schemas.microsoft.com/office/powerpoint/2010/main" val="1649146526"/>
+      </p:ext>
+    </p:extLst>
+  </p:cSld>
+  <p:clrMapOvr>
+    <a:masterClrMapping/>
+  </p:clrMapOvr>
+  <p:timing>
+    <p:tnLst>
+      <p:par>
+        <p:cTn id="1" dur="indefinite" restart="never" nodeType="tmRoot">
+          <p:childTnLst>
+            <p:seq concurrent="1" nextAc="seek">
+              <p:cTn id="2" dur="indefinite" nodeType="mainSeq">
+                <p:childTnLst>
+                  <p:par>
+                    <p:cTn id="3" fill="hold">
+                      <p:stCondLst>
+                        <p:cond delay="indefinite"/>
+                      </p:stCondLst>
+                      <p:childTnLst>
+                        <p:par>
+                          <p:cTn id="4" fill="hold">
+                            <p:stCondLst>
+                              <p:cond delay="0"/>
+                            </p:stCondLst>
+                            <p:childTnLst>
+                              <p:par>
+                                <p:cTn id="5" presetID="42" presetClass="entr" presetSubtype="0" fill="hold" grpId="0" nodeType="clickEffect">
+                                  <p:stCondLst>
+                                    <p:cond delay="0"/>
+                                  </p:stCondLst>
+                                  <p:childTnLst>
+                                    <p:set>
+                                      <p:cBhvr>
+                                        <p:cTn id="6" dur="1" fill="hold">
+                                          <p:stCondLst>
+                                            <p:cond delay="0"/>
+                                          </p:stCondLst>
+                                        </p:cTn>
+                                        <p:tgtEl>
+                                          <p:spTgt spid="4"/>
+                                        </p:tgtEl>
+                                        <p:attrNameLst>
+                                          <p:attrName>style.visibility</p:attrName>
+                                        </p:attrNameLst>
+                                      </p:cBhvr>
+                                      <p:to>
+                                        <p:strVal val="visible"/>
+                                      </p:to>
+                                    </p:set>
+                                    <p:animEffect transition="in" filter="fade">
+                                      <p:cBhvr>
+                                        <p:cTn id="7" dur="500"/>
+                                        <p:tgtEl>
+                                          <p:spTgt spid="4"/>
+                                        </p:tgtEl>
+                                      </p:cBhvr>
+                                    </p:animEffect>
+                                    <p:anim calcmode="lin" valueType="num">
+                                      <p:cBhvr>
+                                        <p:cTn id="8" dur="500" fill="hold"/>
+                                        <p:tgtEl>
+                                          <p:spTgt spid="4"/>
+                                        </p:tgtEl>
+                                        <p:attrNameLst>
+                                          <p:attrName>ppt_x</p:attrName>
+                                        </p:attrNameLst>
+                                      </p:cBhvr>
+                                      <p:tavLst>
+                                        <p:tav tm="0">
+                                          <p:val>
+                                            <p:strVal val="#ppt_x"/>
+                                          </p:val>
+                                        </p:tav>
+                                        <p:tav tm="100000">
+                                          <p:val>
+                                            <p:strVal val="#ppt_x"/>
+                                          </p:val>
+                                        </p:tav>
+                                      </p:tavLst>
+                                    </p:anim>
+                                    <p:anim calcmode="lin" valueType="num">
+                                      <p:cBhvr>
+                                        <p:cTn id="9" dur="500" fill="hold"/>
+                                        <p:tgtEl>
+                                          <p:spTgt spid="4"/>
+                                        </p:tgtEl>
+                                        <p:attrNameLst>
+                                          <p:attrName>ppt_y</p:attrName>
+                                        </p:attrNameLst>
+                                      </p:cBhvr>
+                                      <p:tavLst>
+                                        <p:tav tm="0">
+                                          <p:val>
+                                            <p:strVal val="#ppt_y+.1"/>
+                                          </p:val>
+                                        </p:tav>
+                                        <p:tav tm="100000">
+                                          <p:val>
+                                            <p:strVal val="#ppt_y"/>
+                                          </p:val>
+                                        </p:tav>
+                                      </p:tavLst>
+                                    </p:anim>
+                                  </p:childTnLst>
+                                </p:cTn>
+                              </p:par>
+                            </p:childTnLst>
+                          </p:cTn>
+                        </p:par>
+                      </p:childTnLst>
+                    </p:cTn>
+                  </p:par>
+                </p:childTnLst>
+              </p:cTn>
+              <p:prevCondLst>
+                <p:cond evt="onPrev" delay="0">
+                  <p:tgtEl>
+                    <p:sldTgt/>
+                  </p:tgtEl>
+                </p:cond>
+              </p:prevCondLst>
+              <p:nextCondLst>
+                <p:cond evt="onNext" delay="0">
+                  <p:tgtEl>
+                    <p:sldTgt/>
+                  </p:tgtEl>
+                </p:cond>
+              </p:nextCondLst>
+            </p:seq>
+          </p:childTnLst>
+        </p:cTn>
+      </p:par>
+    </p:tnLst>
+    <p:bldLst>
+      <p:bldP spid="4" grpId="0"/>
+    </p:bldLst>
+  </p:timing>
+</p:sld>
+</file>
+
+<file path=ppt/slides/slide22.xml><?xml version="1.0" encoding="utf-8"?>
+<p:sld xmlns:a="http://schemas.openxmlformats.org/drawingml/2006/main" xmlns:r="http://schemas.openxmlformats.org/officeDocument/2006/relationships" xmlns:p="http://schemas.openxmlformats.org/presentationml/2006/main">
+  <p:cSld>
+    <p:spTree>
+      <p:nvGrpSpPr>
+        <p:cNvPr id="1" name="">
+          <a:extLst>
+            <a:ext uri="{FF2B5EF4-FFF2-40B4-BE49-F238E27FC236}">
+              <a16:creationId xmlns:a16="http://schemas.microsoft.com/office/drawing/2014/main" id="{E0D45E03-08E5-A77A-AA08-7915119DE425}"/>
+            </a:ext>
+          </a:extLst>
+        </p:cNvPr>
+        <p:cNvGrpSpPr/>
+        <p:nvPr/>
+      </p:nvGrpSpPr>
+      <p:grpSpPr>
+        <a:xfrm>
+          <a:off x="0" y="0"/>
+          <a:ext cx="0" cy="0"/>
+          <a:chOff x="0" y="0"/>
+          <a:chExt cx="0" cy="0"/>
+        </a:xfrm>
+      </p:grpSpPr>
+      <p:pic>
+        <p:nvPicPr>
+          <p:cNvPr id="5" name="Picture 4">
+            <a:extLst>
+              <a:ext uri="{FF2B5EF4-FFF2-40B4-BE49-F238E27FC236}">
+                <a16:creationId xmlns:a16="http://schemas.microsoft.com/office/drawing/2014/main" id="{D5441A46-DB72-28D2-CBA3-9B5F7C766C26}"/>
+              </a:ext>
+            </a:extLst>
+          </p:cNvPr>
+          <p:cNvPicPr>
+            <a:picLocks noChangeAspect="1"/>
+          </p:cNvPicPr>
+          <p:nvPr/>
+        </p:nvPicPr>
+        <p:blipFill>
+          <a:blip r:embed="rId2">
+            <a:extLst>
+              <a:ext uri="{28A0092B-C50C-407E-A947-70E740481C1C}">
+                <a14:useLocalDpi xmlns:a14="http://schemas.microsoft.com/office/drawing/2010/main" val="0"/>
+              </a:ext>
+            </a:extLst>
+          </a:blip>
+          <a:srcRect/>
+          <a:stretch/>
+        </p:blipFill>
+        <p:spPr>
+          <a:xfrm>
+            <a:off x="0" y="-15240"/>
+            <a:ext cx="12192000" cy="6405562"/>
+          </a:xfrm>
+          <a:prstGeom prst="rect">
+            <a:avLst/>
+          </a:prstGeom>
+        </p:spPr>
+      </p:pic>
+      <p:sp>
+        <p:nvSpPr>
+          <p:cNvPr id="6" name="Rectangle 5">
+            <a:extLst>
+              <a:ext uri="{FF2B5EF4-FFF2-40B4-BE49-F238E27FC236}">
+                <a16:creationId xmlns:a16="http://schemas.microsoft.com/office/drawing/2014/main" id="{118A3D9F-332E-91DA-D206-EB3D44D354CA}"/>
+              </a:ext>
+            </a:extLst>
+          </p:cNvPr>
+          <p:cNvSpPr/>
+          <p:nvPr/>
+        </p:nvSpPr>
+        <p:spPr>
+          <a:xfrm>
+            <a:off x="0" y="4988689"/>
+            <a:ext cx="12192000" cy="1869311"/>
+          </a:xfrm>
+          <a:prstGeom prst="rect">
+            <a:avLst/>
+          </a:prstGeom>
+          <a:solidFill>
+            <a:srgbClr val="312D2F"/>
+          </a:solidFill>
+        </p:spPr>
+        <p:style>
+          <a:lnRef idx="2">
+            <a:schemeClr val="accent1">
+              <a:shade val="15000"/>
+            </a:schemeClr>
+          </a:lnRef>
+          <a:fillRef idx="1">
+            <a:schemeClr val="accent1"/>
+          </a:fillRef>
+          <a:effectRef idx="0">
+            <a:schemeClr val="accent1"/>
+          </a:effectRef>
+          <a:fontRef idx="minor">
+            <a:schemeClr val="lt1"/>
+          </a:fontRef>
+        </p:style>
+        <p:txBody>
+          <a:bodyPr rtlCol="0" anchor="ctr"/>
+          <a:lstStyle/>
+          <a:p>
+            <a:pPr algn="ctr"/>
+            <a:endParaRPr lang="en-ZA"/>
+          </a:p>
+        </p:txBody>
+      </p:sp>
+      <p:sp>
+        <p:nvSpPr>
+          <p:cNvPr id="7" name="TextBox 6">
+            <a:extLst>
+              <a:ext uri="{FF2B5EF4-FFF2-40B4-BE49-F238E27FC236}">
+                <a16:creationId xmlns:a16="http://schemas.microsoft.com/office/drawing/2014/main" id="{182420EB-26F4-D76B-8240-F0F242267FDE}"/>
+              </a:ext>
+            </a:extLst>
+          </p:cNvPr>
+          <p:cNvSpPr txBox="1"/>
+          <p:nvPr/>
+        </p:nvSpPr>
+        <p:spPr>
+          <a:xfrm>
+            <a:off x="3300714" y="5425128"/>
+            <a:ext cx="5590572" cy="584775"/>
+          </a:xfrm>
+          <a:prstGeom prst="rect">
+            <a:avLst/>
+          </a:prstGeom>
+          <a:noFill/>
+        </p:spPr>
+        <p:txBody>
+          <a:bodyPr wrap="square" rtlCol="0">
+            <a:spAutoFit/>
+          </a:bodyPr>
+          <a:lstStyle/>
+          <a:p>
+            <a:r>
+              <a:rPr lang="en-ZA" sz="3200" b="1" dirty="0">
+                <a:solidFill>
+                  <a:schemeClr val="bg1"/>
+                </a:solidFill>
+              </a:rPr>
+              <a:t>Thank you for your attention!</a:t>
+            </a:r>
+            <a:endParaRPr lang="en-ZA" sz="3200" dirty="0">
+              <a:solidFill>
+                <a:schemeClr val="bg1"/>
+              </a:solidFill>
+            </a:endParaRPr>
+          </a:p>
+        </p:txBody>
+      </p:sp>
+    </p:spTree>
+    <p:extLst>
+      <p:ext uri="{BB962C8B-B14F-4D97-AF65-F5344CB8AC3E}">
+        <p14:creationId xmlns:p14="http://schemas.microsoft.com/office/powerpoint/2010/main" val="2126524839"/>
       </p:ext>
     </p:extLst>
   </p:cSld>
@@ -13719,7 +15079,7 @@
         </p:nvSpPr>
         <p:spPr>
           <a:xfrm>
-            <a:off x="786580" y="1766198"/>
+            <a:off x="786580" y="2012004"/>
             <a:ext cx="10550013" cy="1000274"/>
           </a:xfrm>
           <a:prstGeom prst="rect">
@@ -13812,93 +15172,6 @@
                 </a:solidFill>
               </a:rPr>
               <a:t>.</a:t>
-            </a:r>
-          </a:p>
-        </p:txBody>
-      </p:sp>
-      <p:sp>
-        <p:nvSpPr>
-          <p:cNvPr id="3" name="TextBox 2">
-            <a:extLst>
-              <a:ext uri="{FF2B5EF4-FFF2-40B4-BE49-F238E27FC236}">
-                <a16:creationId xmlns:a16="http://schemas.microsoft.com/office/drawing/2014/main" id="{31D903DA-BCE3-0EF2-FEAB-A849BA217D03}"/>
-              </a:ext>
-            </a:extLst>
-          </p:cNvPr>
-          <p:cNvSpPr txBox="1"/>
-          <p:nvPr/>
-        </p:nvSpPr>
-        <p:spPr>
-          <a:xfrm>
-            <a:off x="786580" y="3091255"/>
-            <a:ext cx="10432026" cy="1000274"/>
-          </a:xfrm>
-          <a:prstGeom prst="rect">
-            <a:avLst/>
-          </a:prstGeom>
-          <a:noFill/>
-        </p:spPr>
-        <p:txBody>
-          <a:bodyPr wrap="square" rtlCol="0">
-            <a:spAutoFit/>
-          </a:bodyPr>
-          <a:lstStyle/>
-          <a:p>
-            <a:pPr marL="285750" indent="-285750">
-              <a:spcBef>
-                <a:spcPts val="600"/>
-              </a:spcBef>
-              <a:buFont typeface="Arial" panose="020B0604020202020204" pitchFamily="34" charset="0"/>
-              <a:buChar char="•"/>
-            </a:pPr>
-            <a:r>
-              <a:rPr lang="en-ZA" dirty="0">
-                <a:solidFill>
-                  <a:schemeClr val="bg1"/>
-                </a:solidFill>
-              </a:rPr>
-              <a:t>For identifying living victims, there must be a void concentration of volatile organic compounds (VOCs) at least 10 times greater than the ambient air, indicating an enclosed environment.</a:t>
-            </a:r>
-          </a:p>
-          <a:p>
-            <a:pPr marL="285750" indent="-285750">
-              <a:spcBef>
-                <a:spcPts val="600"/>
-              </a:spcBef>
-              <a:buFont typeface="Arial" panose="020B0604020202020204" pitchFamily="34" charset="0"/>
-              <a:buChar char="•"/>
-            </a:pPr>
-            <a:r>
-              <a:rPr lang="en-ZA" b="1" dirty="0">
-                <a:solidFill>
-                  <a:srgbClr val="FFC000"/>
-                </a:solidFill>
-              </a:rPr>
-              <a:t>Humans release VOCs </a:t>
-            </a:r>
-            <a:r>
-              <a:rPr lang="en-ZA" dirty="0">
-                <a:solidFill>
-                  <a:schemeClr val="bg1"/>
-                </a:solidFill>
-              </a:rPr>
-              <a:t>through </a:t>
-            </a:r>
-            <a:r>
-              <a:rPr lang="en-ZA" dirty="0" err="1">
-                <a:solidFill>
-                  <a:schemeClr val="bg1"/>
-                </a:solidFill>
-              </a:rPr>
-              <a:t>feces</a:t>
-            </a:r>
-            <a:r>
-              <a:rPr lang="en-ZA" dirty="0">
-                <a:solidFill>
-                  <a:schemeClr val="bg1"/>
-                </a:solidFill>
-              </a:rPr>
-              <a:t>, urine, breath, skin, milk, blood, and saliva.</a:t>
             </a:r>
           </a:p>
         </p:txBody>
@@ -13917,8 +15190,8 @@
         </p:nvSpPr>
         <p:spPr>
           <a:xfrm>
-            <a:off x="786580" y="4416312"/>
-            <a:ext cx="10432026" cy="1277273"/>
+            <a:off x="786580" y="3275921"/>
+            <a:ext cx="10432026" cy="1631216"/>
           </a:xfrm>
           <a:prstGeom prst="rect">
             <a:avLst/>
@@ -13930,6 +15203,47 @@
             <a:spAutoFit/>
           </a:bodyPr>
           <a:lstStyle/>
+          <a:p>
+            <a:pPr marL="285750" indent="-285750">
+              <a:spcBef>
+                <a:spcPts val="600"/>
+              </a:spcBef>
+              <a:buFont typeface="Arial" panose="020B0604020202020204" pitchFamily="34" charset="0"/>
+              <a:buChar char="•"/>
+            </a:pPr>
+            <a:r>
+              <a:rPr lang="en-ZA" b="1" dirty="0">
+                <a:solidFill>
+                  <a:srgbClr val="FFC000"/>
+                </a:solidFill>
+              </a:rPr>
+              <a:t>Humans release VOCs </a:t>
+            </a:r>
+            <a:r>
+              <a:rPr lang="en-ZA" dirty="0">
+                <a:solidFill>
+                  <a:schemeClr val="bg1"/>
+                </a:solidFill>
+              </a:rPr>
+              <a:t>through </a:t>
+            </a:r>
+            <a:r>
+              <a:rPr lang="en-ZA" dirty="0" err="1">
+                <a:solidFill>
+                  <a:schemeClr val="bg1"/>
+                </a:solidFill>
+              </a:rPr>
+              <a:t>feces</a:t>
+            </a:r>
+            <a:r>
+              <a:rPr lang="en-ZA" dirty="0">
+                <a:solidFill>
+                  <a:schemeClr val="bg1"/>
+                </a:solidFill>
+              </a:rPr>
+              <a:t>, urine, breath, skin, milk, blood, and saliva.</a:t>
+            </a:r>
+          </a:p>
           <a:p>
             <a:pPr marL="285750" indent="-285750">
               <a:spcBef>
@@ -14130,7 +15444,7 @@
                                           </p:stCondLst>
                                         </p:cTn>
                                         <p:tgtEl>
-                                          <p:spTgt spid="3"/>
+                                          <p:spTgt spid="4"/>
                                         </p:tgtEl>
                                         <p:attrNameLst>
                                           <p:attrName>style.visibility</p:attrName>
@@ -14144,7 +15458,7 @@
                                       <p:cBhvr>
                                         <p:cTn id="14" dur="500"/>
                                         <p:tgtEl>
-                                          <p:spTgt spid="3"/>
+                                          <p:spTgt spid="4"/>
                                         </p:tgtEl>
                                       </p:cBhvr>
                                     </p:animEffect>
@@ -14152,7 +15466,7 @@
                                       <p:cBhvr>
                                         <p:cTn id="15" dur="500" fill="hold"/>
                                         <p:tgtEl>
-                                          <p:spTgt spid="3"/>
+                                          <p:spTgt spid="4"/>
                                         </p:tgtEl>
                                         <p:attrNameLst>
                                           <p:attrName>ppt_x</p:attrName>
@@ -14174,105 +15488,6 @@
                                     <p:anim calcmode="lin" valueType="num">
                                       <p:cBhvr>
                                         <p:cTn id="16" dur="500" fill="hold"/>
-                                        <p:tgtEl>
-                                          <p:spTgt spid="3"/>
-                                        </p:tgtEl>
-                                        <p:attrNameLst>
-                                          <p:attrName>ppt_y</p:attrName>
-                                        </p:attrNameLst>
-                                      </p:cBhvr>
-                                      <p:tavLst>
-                                        <p:tav tm="0">
-                                          <p:val>
-                                            <p:strVal val="#ppt_y+.1"/>
-                                          </p:val>
-                                        </p:tav>
-                                        <p:tav tm="100000">
-                                          <p:val>
-                                            <p:strVal val="#ppt_y"/>
-                                          </p:val>
-                                        </p:tav>
-                                      </p:tavLst>
-                                    </p:anim>
-                                  </p:childTnLst>
-                                </p:cTn>
-                              </p:par>
-                            </p:childTnLst>
-                          </p:cTn>
-                        </p:par>
-                      </p:childTnLst>
-                    </p:cTn>
-                  </p:par>
-                  <p:par>
-                    <p:cTn id="17" fill="hold">
-                      <p:stCondLst>
-                        <p:cond delay="indefinite"/>
-                      </p:stCondLst>
-                      <p:childTnLst>
-                        <p:par>
-                          <p:cTn id="18" fill="hold">
-                            <p:stCondLst>
-                              <p:cond delay="0"/>
-                            </p:stCondLst>
-                            <p:childTnLst>
-                              <p:par>
-                                <p:cTn id="19" presetID="42" presetClass="entr" presetSubtype="0" fill="hold" grpId="0" nodeType="clickEffect">
-                                  <p:stCondLst>
-                                    <p:cond delay="0"/>
-                                  </p:stCondLst>
-                                  <p:childTnLst>
-                                    <p:set>
-                                      <p:cBhvr>
-                                        <p:cTn id="20" dur="1" fill="hold">
-                                          <p:stCondLst>
-                                            <p:cond delay="0"/>
-                                          </p:stCondLst>
-                                        </p:cTn>
-                                        <p:tgtEl>
-                                          <p:spTgt spid="4"/>
-                                        </p:tgtEl>
-                                        <p:attrNameLst>
-                                          <p:attrName>style.visibility</p:attrName>
-                                        </p:attrNameLst>
-                                      </p:cBhvr>
-                                      <p:to>
-                                        <p:strVal val="visible"/>
-                                      </p:to>
-                                    </p:set>
-                                    <p:animEffect transition="in" filter="fade">
-                                      <p:cBhvr>
-                                        <p:cTn id="21" dur="500"/>
-                                        <p:tgtEl>
-                                          <p:spTgt spid="4"/>
-                                        </p:tgtEl>
-                                      </p:cBhvr>
-                                    </p:animEffect>
-                                    <p:anim calcmode="lin" valueType="num">
-                                      <p:cBhvr>
-                                        <p:cTn id="22" dur="500" fill="hold"/>
-                                        <p:tgtEl>
-                                          <p:spTgt spid="4"/>
-                                        </p:tgtEl>
-                                        <p:attrNameLst>
-                                          <p:attrName>ppt_x</p:attrName>
-                                        </p:attrNameLst>
-                                      </p:cBhvr>
-                                      <p:tavLst>
-                                        <p:tav tm="0">
-                                          <p:val>
-                                            <p:strVal val="#ppt_x"/>
-                                          </p:val>
-                                        </p:tav>
-                                        <p:tav tm="100000">
-                                          <p:val>
-                                            <p:strVal val="#ppt_x"/>
-                                          </p:val>
-                                        </p:tav>
-                                      </p:tavLst>
-                                    </p:anim>
-                                    <p:anim calcmode="lin" valueType="num">
-                                      <p:cBhvr>
-                                        <p:cTn id="23" dur="500" fill="hold"/>
                                         <p:tgtEl>
                                           <p:spTgt spid="4"/>
                                         </p:tgtEl>
@@ -14325,7 +15540,6 @@
     </p:tnLst>
     <p:bldLst>
       <p:bldP spid="2" grpId="0"/>
-      <p:bldP spid="3" grpId="0"/>
       <p:bldP spid="4" grpId="0"/>
     </p:bldLst>
   </p:timing>
@@ -14726,7 +15940,7 @@
         <p:spPr>
           <a:xfrm>
             <a:off x="820993" y="1837248"/>
-            <a:ext cx="10550013" cy="1000274"/>
+            <a:ext cx="10452449" cy="1000274"/>
           </a:xfrm>
           <a:prstGeom prst="rect">
             <a:avLst/>
@@ -14889,7 +16103,7 @@
         <p:spPr>
           <a:xfrm>
             <a:off x="821803" y="3098141"/>
-            <a:ext cx="10579260" cy="2539157"/>
+            <a:ext cx="10452448" cy="1277273"/>
           </a:xfrm>
           <a:prstGeom prst="rect">
             <a:avLst/>
@@ -14951,6 +16165,38 @@
               <a:t>for victim location.</a:t>
             </a:r>
           </a:p>
+          <a:p>
+            <a:endParaRPr lang="en-ZA" dirty="0"/>
+          </a:p>
+        </p:txBody>
+      </p:sp>
+      <p:sp>
+        <p:nvSpPr>
+          <p:cNvPr id="2" name="TextBox 1">
+            <a:extLst>
+              <a:ext uri="{FF2B5EF4-FFF2-40B4-BE49-F238E27FC236}">
+                <a16:creationId xmlns:a16="http://schemas.microsoft.com/office/drawing/2014/main" id="{396BDDA5-063D-CC21-FE54-A1F27BA67A11}"/>
+              </a:ext>
+            </a:extLst>
+          </p:cNvPr>
+          <p:cNvSpPr txBox="1"/>
+          <p:nvPr/>
+        </p:nvSpPr>
+        <p:spPr>
+          <a:xfrm>
+            <a:off x="820993" y="4379795"/>
+            <a:ext cx="10550013" cy="1554272"/>
+          </a:xfrm>
+          <a:prstGeom prst="rect">
+            <a:avLst/>
+          </a:prstGeom>
+          <a:noFill/>
+        </p:spPr>
+        <p:txBody>
+          <a:bodyPr wrap="square" rtlCol="0">
+            <a:spAutoFit/>
+          </a:bodyPr>
+          <a:lstStyle/>
           <a:p>
             <a:pPr marL="285750" indent="-285750">
               <a:spcBef>
@@ -15214,6 +16460,105 @@
                       </p:childTnLst>
                     </p:cTn>
                   </p:par>
+                  <p:par>
+                    <p:cTn id="17" fill="hold">
+                      <p:stCondLst>
+                        <p:cond delay="indefinite"/>
+                      </p:stCondLst>
+                      <p:childTnLst>
+                        <p:par>
+                          <p:cTn id="18" fill="hold">
+                            <p:stCondLst>
+                              <p:cond delay="0"/>
+                            </p:stCondLst>
+                            <p:childTnLst>
+                              <p:par>
+                                <p:cTn id="19" presetID="42" presetClass="entr" presetSubtype="0" fill="hold" grpId="0" nodeType="clickEffect">
+                                  <p:stCondLst>
+                                    <p:cond delay="0"/>
+                                  </p:stCondLst>
+                                  <p:childTnLst>
+                                    <p:set>
+                                      <p:cBhvr>
+                                        <p:cTn id="20" dur="1" fill="hold">
+                                          <p:stCondLst>
+                                            <p:cond delay="0"/>
+                                          </p:stCondLst>
+                                        </p:cTn>
+                                        <p:tgtEl>
+                                          <p:spTgt spid="2"/>
+                                        </p:tgtEl>
+                                        <p:attrNameLst>
+                                          <p:attrName>style.visibility</p:attrName>
+                                        </p:attrNameLst>
+                                      </p:cBhvr>
+                                      <p:to>
+                                        <p:strVal val="visible"/>
+                                      </p:to>
+                                    </p:set>
+                                    <p:animEffect transition="in" filter="fade">
+                                      <p:cBhvr>
+                                        <p:cTn id="21" dur="500"/>
+                                        <p:tgtEl>
+                                          <p:spTgt spid="2"/>
+                                        </p:tgtEl>
+                                      </p:cBhvr>
+                                    </p:animEffect>
+                                    <p:anim calcmode="lin" valueType="num">
+                                      <p:cBhvr>
+                                        <p:cTn id="22" dur="500" fill="hold"/>
+                                        <p:tgtEl>
+                                          <p:spTgt spid="2"/>
+                                        </p:tgtEl>
+                                        <p:attrNameLst>
+                                          <p:attrName>ppt_x</p:attrName>
+                                        </p:attrNameLst>
+                                      </p:cBhvr>
+                                      <p:tavLst>
+                                        <p:tav tm="0">
+                                          <p:val>
+                                            <p:strVal val="#ppt_x"/>
+                                          </p:val>
+                                        </p:tav>
+                                        <p:tav tm="100000">
+                                          <p:val>
+                                            <p:strVal val="#ppt_x"/>
+                                          </p:val>
+                                        </p:tav>
+                                      </p:tavLst>
+                                    </p:anim>
+                                    <p:anim calcmode="lin" valueType="num">
+                                      <p:cBhvr>
+                                        <p:cTn id="23" dur="500" fill="hold"/>
+                                        <p:tgtEl>
+                                          <p:spTgt spid="2"/>
+                                        </p:tgtEl>
+                                        <p:attrNameLst>
+                                          <p:attrName>ppt_y</p:attrName>
+                                        </p:attrNameLst>
+                                      </p:cBhvr>
+                                      <p:tavLst>
+                                        <p:tav tm="0">
+                                          <p:val>
+                                            <p:strVal val="#ppt_y+.1"/>
+                                          </p:val>
+                                        </p:tav>
+                                        <p:tav tm="100000">
+                                          <p:val>
+                                            <p:strVal val="#ppt_y"/>
+                                          </p:val>
+                                        </p:tav>
+                                      </p:tavLst>
+                                    </p:anim>
+                                  </p:childTnLst>
+                                </p:cTn>
+                              </p:par>
+                            </p:childTnLst>
+                          </p:cTn>
+                        </p:par>
+                      </p:childTnLst>
+                    </p:cTn>
+                  </p:par>
                 </p:childTnLst>
               </p:cTn>
               <p:prevCondLst>
@@ -15238,6 +16583,7 @@
     <p:bldLst>
       <p:bldP spid="7" grpId="0"/>
       <p:bldP spid="8" grpId="0"/>
+      <p:bldP spid="2" grpId="0"/>
     </p:bldLst>
   </p:timing>
 </p:sld>
@@ -15395,7 +16741,7 @@
                   <a:schemeClr val="bg1"/>
                 </a:solidFill>
               </a:rPr>
-              <a:t>Video Camera :</a:t>
+              <a:t>Two Microphones:</a:t>
             </a:r>
             <a:endParaRPr lang="en-ZA" sz="4000" b="1" dirty="0">
               <a:solidFill>
@@ -16317,7 +17663,7 @@
         </p:nvSpPr>
         <p:spPr>
           <a:xfrm>
-            <a:off x="578734" y="4053781"/>
+            <a:off x="663326" y="4053781"/>
             <a:ext cx="2545079" cy="646331"/>
           </a:xfrm>
           <a:prstGeom prst="rect">
@@ -16365,7 +17711,7 @@
         </p:nvSpPr>
         <p:spPr>
           <a:xfrm>
-            <a:off x="5232118" y="4019190"/>
+            <a:off x="5095899" y="4053781"/>
             <a:ext cx="2000202" cy="369332"/>
           </a:xfrm>
           <a:prstGeom prst="rect">
@@ -16413,7 +17759,7 @@
         </p:nvSpPr>
         <p:spPr>
           <a:xfrm>
-            <a:off x="9340625" y="4053781"/>
+            <a:off x="9256033" y="4053781"/>
             <a:ext cx="2000202" cy="369332"/>
           </a:xfrm>
           <a:prstGeom prst="rect">
@@ -17371,4 +18717,319 @@
     </a:ext>
   </a:extLst>
 </a:theme>
+</file>
+
+<file path=ppt/theme/theme2.xml><?xml version="1.0" encoding="utf-8"?>
+<a:theme xmlns:a="http://schemas.openxmlformats.org/drawingml/2006/main" name="Office Theme">
+  <a:themeElements>
+    <a:clrScheme name="Office">
+      <a:dk1>
+        <a:sysClr val="windowText" lastClr="000000"/>
+      </a:dk1>
+      <a:lt1>
+        <a:sysClr val="window" lastClr="FFFFFF"/>
+      </a:lt1>
+      <a:dk2>
+        <a:srgbClr val="0E2841"/>
+      </a:dk2>
+      <a:lt2>
+        <a:srgbClr val="E8E8E8"/>
+      </a:lt2>
+      <a:accent1>
+        <a:srgbClr val="156082"/>
+      </a:accent1>
+      <a:accent2>
+        <a:srgbClr val="E97132"/>
+      </a:accent2>
+      <a:accent3>
+        <a:srgbClr val="196B24"/>
+      </a:accent3>
+      <a:accent4>
+        <a:srgbClr val="0F9ED5"/>
+      </a:accent4>
+      <a:accent5>
+        <a:srgbClr val="A02B93"/>
+      </a:accent5>
+      <a:accent6>
+        <a:srgbClr val="4EA72E"/>
+      </a:accent6>
+      <a:hlink>
+        <a:srgbClr val="467886"/>
+      </a:hlink>
+      <a:folHlink>
+        <a:srgbClr val="96607D"/>
+      </a:folHlink>
+    </a:clrScheme>
+    <a:fontScheme name="Office">
+      <a:majorFont>
+        <a:latin typeface="Aptos Display" panose="02110004020202020204"/>
+        <a:ea typeface=""/>
+        <a:cs typeface=""/>
+        <a:font script="Jpan" typeface="游ゴシック Light"/>
+        <a:font script="Hang" typeface="맑은 고딕"/>
+        <a:font script="Hans" typeface="等线 Light"/>
+        <a:font script="Hant" typeface="新細明體"/>
+        <a:font script="Arab" typeface="Times New Roman"/>
+        <a:font script="Hebr" typeface="Times New Roman"/>
+        <a:font script="Thai" typeface="Angsana New"/>
+        <a:font script="Ethi" typeface="Nyala"/>
+        <a:font script="Beng" typeface="Vrinda"/>
+        <a:font script="Gujr" typeface="Shruti"/>
+        <a:font script="Khmr" typeface="MoolBoran"/>
+        <a:font script="Knda" typeface="Tunga"/>
+        <a:font script="Guru" typeface="Raavi"/>
+        <a:font script="Cans" typeface="Euphemia"/>
+        <a:font script="Cher" typeface="Plantagenet Cherokee"/>
+        <a:font script="Yiii" typeface="Microsoft Yi Baiti"/>
+        <a:font script="Tibt" typeface="Microsoft Himalaya"/>
+        <a:font script="Thaa" typeface="MV Boli"/>
+        <a:font script="Deva" typeface="Mangal"/>
+        <a:font script="Telu" typeface="Gautami"/>
+        <a:font script="Taml" typeface="Latha"/>
+        <a:font script="Syrc" typeface="Estrangelo Edessa"/>
+        <a:font script="Orya" typeface="Kalinga"/>
+        <a:font script="Mlym" typeface="Kartika"/>
+        <a:font script="Laoo" typeface="DokChampa"/>
+        <a:font script="Sinh" typeface="Iskoola Pota"/>
+        <a:font script="Mong" typeface="Mongolian Baiti"/>
+        <a:font script="Viet" typeface="Times New Roman"/>
+        <a:font script="Uigh" typeface="Microsoft Uighur"/>
+        <a:font script="Geor" typeface="Sylfaen"/>
+        <a:font script="Armn" typeface="Arial"/>
+        <a:font script="Bugi" typeface="Leelawadee UI"/>
+        <a:font script="Bopo" typeface="Microsoft JhengHei"/>
+        <a:font script="Java" typeface="Javanese Text"/>
+        <a:font script="Lisu" typeface="Segoe UI"/>
+        <a:font script="Mymr" typeface="Myanmar Text"/>
+        <a:font script="Nkoo" typeface="Ebrima"/>
+        <a:font script="Olck" typeface="Nirmala UI"/>
+        <a:font script="Osma" typeface="Ebrima"/>
+        <a:font script="Phag" typeface="Phagspa"/>
+        <a:font script="Syrn" typeface="Estrangelo Edessa"/>
+        <a:font script="Syrj" typeface="Estrangelo Edessa"/>
+        <a:font script="Syre" typeface="Estrangelo Edessa"/>
+        <a:font script="Sora" typeface="Nirmala UI"/>
+        <a:font script="Tale" typeface="Microsoft Tai Le"/>
+        <a:font script="Talu" typeface="Microsoft New Tai Lue"/>
+        <a:font script="Tfng" typeface="Ebrima"/>
+      </a:majorFont>
+      <a:minorFont>
+        <a:latin typeface="Aptos" panose="02110004020202020204"/>
+        <a:ea typeface=""/>
+        <a:cs typeface=""/>
+        <a:font script="Jpan" typeface="游ゴシック"/>
+        <a:font script="Hang" typeface="맑은 고딕"/>
+        <a:font script="Hans" typeface="等线"/>
+        <a:font script="Hant" typeface="新細明體"/>
+        <a:font script="Arab" typeface="Arial"/>
+        <a:font script="Hebr" typeface="Arial"/>
+        <a:font script="Thai" typeface="Cordia New"/>
+        <a:font script="Ethi" typeface="Nyala"/>
+        <a:font script="Beng" typeface="Vrinda"/>
+        <a:font script="Gujr" typeface="Shruti"/>
+        <a:font script="Khmr" typeface="DaunPenh"/>
+        <a:font script="Knda" typeface="Tunga"/>
+        <a:font script="Guru" typeface="Raavi"/>
+        <a:font script="Cans" typeface="Euphemia"/>
+        <a:font script="Cher" typeface="Plantagenet Cherokee"/>
+        <a:font script="Yiii" typeface="Microsoft Yi Baiti"/>
+        <a:font script="Tibt" typeface="Microsoft Himalaya"/>
+        <a:font script="Thaa" typeface="MV Boli"/>
+        <a:font script="Deva" typeface="Mangal"/>
+        <a:font script="Telu" typeface="Gautami"/>
+        <a:font script="Taml" typeface="Latha"/>
+        <a:font script="Syrc" typeface="Estrangelo Edessa"/>
+        <a:font script="Orya" typeface="Kalinga"/>
+        <a:font script="Mlym" typeface="Kartika"/>
+        <a:font script="Laoo" typeface="DokChampa"/>
+        <a:font script="Sinh" typeface="Iskoola Pota"/>
+        <a:font script="Mong" typeface="Mongolian Baiti"/>
+        <a:font script="Viet" typeface="Arial"/>
+        <a:font script="Uigh" typeface="Microsoft Uighur"/>
+        <a:font script="Geor" typeface="Sylfaen"/>
+        <a:font script="Armn" typeface="Arial"/>
+        <a:font script="Bugi" typeface="Leelawadee UI"/>
+        <a:font script="Bopo" typeface="Microsoft JhengHei"/>
+        <a:font script="Java" typeface="Javanese Text"/>
+        <a:font script="Lisu" typeface="Segoe UI"/>
+        <a:font script="Mymr" typeface="Myanmar Text"/>
+        <a:font script="Nkoo" typeface="Ebrima"/>
+        <a:font script="Olck" typeface="Nirmala UI"/>
+        <a:font script="Osma" typeface="Ebrima"/>
+        <a:font script="Phag" typeface="Phagspa"/>
+        <a:font script="Syrn" typeface="Estrangelo Edessa"/>
+        <a:font script="Syrj" typeface="Estrangelo Edessa"/>
+        <a:font script="Syre" typeface="Estrangelo Edessa"/>
+        <a:font script="Sora" typeface="Nirmala UI"/>
+        <a:font script="Tale" typeface="Microsoft Tai Le"/>
+        <a:font script="Talu" typeface="Microsoft New Tai Lue"/>
+        <a:font script="Tfng" typeface="Ebrima"/>
+      </a:minorFont>
+    </a:fontScheme>
+    <a:fmtScheme name="Office">
+      <a:fillStyleLst>
+        <a:solidFill>
+          <a:schemeClr val="phClr"/>
+        </a:solidFill>
+        <a:gradFill rotWithShape="1">
+          <a:gsLst>
+            <a:gs pos="0">
+              <a:schemeClr val="phClr">
+                <a:lumMod val="110000"/>
+                <a:satMod val="105000"/>
+                <a:tint val="67000"/>
+              </a:schemeClr>
+            </a:gs>
+            <a:gs pos="50000">
+              <a:schemeClr val="phClr">
+                <a:lumMod val="105000"/>
+                <a:satMod val="103000"/>
+                <a:tint val="73000"/>
+              </a:schemeClr>
+            </a:gs>
+            <a:gs pos="100000">
+              <a:schemeClr val="phClr">
+                <a:lumMod val="105000"/>
+                <a:satMod val="109000"/>
+                <a:tint val="81000"/>
+              </a:schemeClr>
+            </a:gs>
+          </a:gsLst>
+          <a:lin ang="5400000" scaled="0"/>
+        </a:gradFill>
+        <a:gradFill rotWithShape="1">
+          <a:gsLst>
+            <a:gs pos="0">
+              <a:schemeClr val="phClr">
+                <a:satMod val="103000"/>
+                <a:lumMod val="102000"/>
+                <a:tint val="94000"/>
+              </a:schemeClr>
+            </a:gs>
+            <a:gs pos="50000">
+              <a:schemeClr val="phClr">
+                <a:satMod val="110000"/>
+                <a:lumMod val="100000"/>
+                <a:shade val="100000"/>
+              </a:schemeClr>
+            </a:gs>
+            <a:gs pos="100000">
+              <a:schemeClr val="phClr">
+                <a:lumMod val="99000"/>
+                <a:satMod val="120000"/>
+                <a:shade val="78000"/>
+              </a:schemeClr>
+            </a:gs>
+          </a:gsLst>
+          <a:lin ang="5400000" scaled="0"/>
+        </a:gradFill>
+      </a:fillStyleLst>
+      <a:lnStyleLst>
+        <a:ln w="12700" cap="flat" cmpd="sng" algn="ctr">
+          <a:solidFill>
+            <a:schemeClr val="phClr"/>
+          </a:solidFill>
+          <a:prstDash val="solid"/>
+          <a:miter lim="800000"/>
+        </a:ln>
+        <a:ln w="19050" cap="flat" cmpd="sng" algn="ctr">
+          <a:solidFill>
+            <a:schemeClr val="phClr"/>
+          </a:solidFill>
+          <a:prstDash val="solid"/>
+          <a:miter lim="800000"/>
+        </a:ln>
+        <a:ln w="25400" cap="flat" cmpd="sng" algn="ctr">
+          <a:solidFill>
+            <a:schemeClr val="phClr"/>
+          </a:solidFill>
+          <a:prstDash val="solid"/>
+          <a:miter lim="800000"/>
+        </a:ln>
+      </a:lnStyleLst>
+      <a:effectStyleLst>
+        <a:effectStyle>
+          <a:effectLst/>
+        </a:effectStyle>
+        <a:effectStyle>
+          <a:effectLst/>
+        </a:effectStyle>
+        <a:effectStyle>
+          <a:effectLst>
+            <a:outerShdw blurRad="57150" dist="19050" dir="5400000" algn="ctr" rotWithShape="0">
+              <a:srgbClr val="000000">
+                <a:alpha val="63000"/>
+              </a:srgbClr>
+            </a:outerShdw>
+          </a:effectLst>
+        </a:effectStyle>
+      </a:effectStyleLst>
+      <a:bgFillStyleLst>
+        <a:solidFill>
+          <a:schemeClr val="phClr"/>
+        </a:solidFill>
+        <a:solidFill>
+          <a:schemeClr val="phClr">
+            <a:tint val="95000"/>
+            <a:satMod val="170000"/>
+          </a:schemeClr>
+        </a:solidFill>
+        <a:gradFill rotWithShape="1">
+          <a:gsLst>
+            <a:gs pos="0">
+              <a:schemeClr val="phClr">
+                <a:tint val="93000"/>
+                <a:satMod val="150000"/>
+                <a:shade val="98000"/>
+                <a:lumMod val="102000"/>
+              </a:schemeClr>
+            </a:gs>
+            <a:gs pos="50000">
+              <a:schemeClr val="phClr">
+                <a:tint val="98000"/>
+                <a:satMod val="130000"/>
+                <a:shade val="90000"/>
+                <a:lumMod val="103000"/>
+              </a:schemeClr>
+            </a:gs>
+            <a:gs pos="100000">
+              <a:schemeClr val="phClr">
+                <a:shade val="63000"/>
+                <a:satMod val="120000"/>
+              </a:schemeClr>
+            </a:gs>
+          </a:gsLst>
+          <a:lin ang="5400000" scaled="0"/>
+        </a:gradFill>
+      </a:bgFillStyleLst>
+    </a:fmtScheme>
+  </a:themeElements>
+  <a:objectDefaults>
+    <a:lnDef>
+      <a:spPr/>
+      <a:bodyPr/>
+      <a:lstStyle/>
+      <a:style>
+        <a:lnRef idx="2">
+          <a:schemeClr val="accent1"/>
+        </a:lnRef>
+        <a:fillRef idx="0">
+          <a:schemeClr val="accent1"/>
+        </a:fillRef>
+        <a:effectRef idx="1">
+          <a:schemeClr val="accent1"/>
+        </a:effectRef>
+        <a:fontRef idx="minor">
+          <a:schemeClr val="tx1"/>
+        </a:fontRef>
+      </a:style>
+    </a:lnDef>
+  </a:objectDefaults>
+  <a:extraClrSchemeLst/>
+  <a:extLst>
+    <a:ext uri="{05A4C25C-085E-4340-85A3-A5531E510DB2}">
+      <thm15:themeFamily xmlns:thm15="http://schemas.microsoft.com/office/thememl/2012/main" name="Office Theme" id="{2E142A2C-CD16-42D6-873A-C26D2A0506FA}" vid="{1BDDFF52-6CD6-40A5-AB3C-68EB2F1E4D0A}"/>
+    </a:ext>
+  </a:extLst>
+</a:theme>
 </file>
--- a/AI-Presentation.pptx
+++ b/AI-Presentation.pptx
@@ -139,7 +139,7 @@
 <file path=ppt/revisionInfo.xml><?xml version="1.0" encoding="utf-8"?>
 <p1510:revInfo xmlns:a="http://schemas.openxmlformats.org/drawingml/2006/main" xmlns:r="http://schemas.openxmlformats.org/officeDocument/2006/relationships" xmlns:p1510="http://schemas.microsoft.com/office/powerpoint/2015/10/main">
   <p1510:revLst>
-    <p1510:client id="{8F61E714-1212-4F79-8F08-CFA093CF4C5F}" v="721" dt="2026-06-27T20:20:41.980"/>
+    <p1510:client id="{8F61E714-1212-4F79-8F08-CFA093CF4C5F}" v="730" dt="2026-06-27T21:46:21.158"/>
   </p1510:revLst>
 </p1510:revInfo>
 </file>
@@ -149,7 +149,7 @@
   <pc:docChgLst>
     <pc:chgData name="Germena Stefania" userId="848a3578-c669-42d9-960b-fb42db2e6943" providerId="ADAL" clId="{0EF7214D-E59F-4D86-9B6A-2134479533EA}"/>
     <pc:docChg chg="undo custSel addSld delSld modSld sldOrd modMainMaster">
-      <pc:chgData name="Germena Stefania" userId="848a3578-c669-42d9-960b-fb42db2e6943" providerId="ADAL" clId="{0EF7214D-E59F-4D86-9B6A-2134479533EA}" dt="2026-06-27T17:46:24.686" v="3112" actId="1076"/>
+      <pc:chgData name="Germena Stefania" userId="848a3578-c669-42d9-960b-fb42db2e6943" providerId="ADAL" clId="{0EF7214D-E59F-4D86-9B6A-2134479533EA}" dt="2026-06-27T21:46:13.828" v="3120" actId="20577"/>
       <pc:docMkLst>
         <pc:docMk/>
       </pc:docMkLst>
@@ -1103,8 +1103,8 @@
           <pc:sldMk cId="1395876748" sldId="272"/>
         </pc:sldMkLst>
       </pc:sldChg>
-      <pc:sldChg chg="addSp delSp modSp new mod modAnim">
-        <pc:chgData name="Germena Stefania" userId="848a3578-c669-42d9-960b-fb42db2e6943" providerId="ADAL" clId="{0EF7214D-E59F-4D86-9B6A-2134479533EA}" dt="2026-06-26T13:19:03.166" v="2808"/>
+      <pc:sldChg chg="addSp delSp modSp new mod modAnim modNotesTx">
+        <pc:chgData name="Germena Stefania" userId="848a3578-c669-42d9-960b-fb42db2e6943" providerId="ADAL" clId="{0EF7214D-E59F-4D86-9B6A-2134479533EA}" dt="2026-06-27T21:46:13.828" v="3120" actId="20577"/>
         <pc:sldMkLst>
           <pc:docMk/>
           <pc:sldMk cId="1703679625" sldId="273"/>
@@ -1279,7 +1279,7 @@
         </pc:spChg>
       </pc:sldChg>
       <pc:sldChg chg="addSp delSp modSp new mod modAnim">
-        <pc:chgData name="Germena Stefania" userId="848a3578-c669-42d9-960b-fb42db2e6943" providerId="ADAL" clId="{0EF7214D-E59F-4D86-9B6A-2134479533EA}" dt="2026-06-26T13:00:12.423" v="2703" actId="1076"/>
+        <pc:chgData name="Germena Stefania" userId="848a3578-c669-42d9-960b-fb42db2e6943" providerId="ADAL" clId="{0EF7214D-E59F-4D86-9B6A-2134479533EA}" dt="2026-06-27T21:36:48.322" v="3119" actId="20577"/>
         <pc:sldMkLst>
           <pc:docMk/>
           <pc:sldMk cId="575089625" sldId="274"/>
@@ -1317,7 +1317,7 @@
           </ac:spMkLst>
         </pc:spChg>
         <pc:spChg chg="add mod">
-          <ac:chgData name="Germena Stefania" userId="848a3578-c669-42d9-960b-fb42db2e6943" providerId="ADAL" clId="{0EF7214D-E59F-4D86-9B6A-2134479533EA}" dt="2026-06-26T13:00:12.423" v="2703" actId="1076"/>
+          <ac:chgData name="Germena Stefania" userId="848a3578-c669-42d9-960b-fb42db2e6943" providerId="ADAL" clId="{0EF7214D-E59F-4D86-9B6A-2134479533EA}" dt="2026-06-27T21:36:45.929" v="3117" actId="20577"/>
           <ac:spMkLst>
             <pc:docMk/>
             <pc:sldMk cId="575089625" sldId="274"/>
@@ -1325,7 +1325,7 @@
           </ac:spMkLst>
         </pc:spChg>
         <pc:spChg chg="add mod">
-          <ac:chgData name="Germena Stefania" userId="848a3578-c669-42d9-960b-fb42db2e6943" providerId="ADAL" clId="{0EF7214D-E59F-4D86-9B6A-2134479533EA}" dt="2026-06-26T13:00:12.423" v="2703" actId="1076"/>
+          <ac:chgData name="Germena Stefania" userId="848a3578-c669-42d9-960b-fb42db2e6943" providerId="ADAL" clId="{0EF7214D-E59F-4D86-9B6A-2134479533EA}" dt="2026-06-27T21:36:48.322" v="3119" actId="20577"/>
           <ac:spMkLst>
             <pc:docMk/>
             <pc:sldMk cId="575089625" sldId="274"/>
@@ -1333,7 +1333,7 @@
           </ac:spMkLst>
         </pc:spChg>
         <pc:spChg chg="add mod">
-          <ac:chgData name="Germena Stefania" userId="848a3578-c669-42d9-960b-fb42db2e6943" providerId="ADAL" clId="{0EF7214D-E59F-4D86-9B6A-2134479533EA}" dt="2026-06-26T13:00:12.423" v="2703" actId="1076"/>
+          <ac:chgData name="Germena Stefania" userId="848a3578-c669-42d9-960b-fb42db2e6943" providerId="ADAL" clId="{0EF7214D-E59F-4D86-9B6A-2134479533EA}" dt="2026-06-27T21:36:43.044" v="3115" actId="20577"/>
           <ac:spMkLst>
             <pc:docMk/>
             <pc:sldMk cId="575089625" sldId="274"/>
@@ -2090,13 +2090,9 @@
           <a:p>
             <a:r>
               <a:rPr lang="en-US" dirty="0"/>
-              <a:t>The scanning procedure ensures the presence of the victim. </a:t>
-            </a:r>
-            <a:r>
-              <a:rPr lang="en-US"/>
-              <a:t>The victim is verified with a high decibel level, a red thermal reading, and a high visual probability.</a:t>
-            </a:r>
-            <a:endParaRPr lang="en-ZA"/>
+              <a:t>The scanning procedure ensures the presence of the victim. The victim is verified with a high decibel level, a red thermal reading, and a high visual probability.</a:t>
+            </a:r>
+            <a:endParaRPr lang="en-ZA" dirty="0"/>
           </a:p>
         </p:txBody>
       </p:sp>
@@ -2137,6 +2133,99 @@
 </file>
 
 <file path=ppt/notesSlides/notesSlide3.xml><?xml version="1.0" encoding="utf-8"?>
+<p:notes xmlns:a="http://schemas.openxmlformats.org/drawingml/2006/main" xmlns:r="http://schemas.openxmlformats.org/officeDocument/2006/relationships" xmlns:p="http://schemas.openxmlformats.org/presentationml/2006/main">
+  <p:cSld>
+    <p:spTree>
+      <p:nvGrpSpPr>
+        <p:cNvPr id="1" name=""/>
+        <p:cNvGrpSpPr/>
+        <p:nvPr/>
+      </p:nvGrpSpPr>
+      <p:grpSpPr>
+        <a:xfrm>
+          <a:off x="0" y="0"/>
+          <a:ext cx="0" cy="0"/>
+          <a:chOff x="0" y="0"/>
+          <a:chExt cx="0" cy="0"/>
+        </a:xfrm>
+      </p:grpSpPr>
+      <p:sp>
+        <p:nvSpPr>
+          <p:cNvPr id="2" name="Slide Image Placeholder 1"/>
+          <p:cNvSpPr>
+            <a:spLocks noGrp="1" noRot="1" noChangeAspect="1"/>
+          </p:cNvSpPr>
+          <p:nvPr>
+            <p:ph type="sldImg"/>
+          </p:nvPr>
+        </p:nvSpPr>
+        <p:spPr/>
+      </p:sp>
+      <p:sp>
+        <p:nvSpPr>
+          <p:cNvPr id="3" name="Notes Placeholder 2"/>
+          <p:cNvSpPr>
+            <a:spLocks noGrp="1"/>
+          </p:cNvSpPr>
+          <p:nvPr>
+            <p:ph type="body" idx="1"/>
+          </p:nvPr>
+        </p:nvSpPr>
+        <p:spPr/>
+        <p:txBody>
+          <a:bodyPr/>
+          <a:lstStyle/>
+          <a:p>
+            <a:r>
+              <a:rPr lang="en-ZA" dirty="0"/>
+              <a:t>mimic the continuous physical dynamics of real-world operations. For example, when a robot commences a specific sensing action to acquire environmental information, the task inherently requires time to complete.</a:t>
+            </a:r>
+          </a:p>
+          <a:p>
+            <a:r>
+              <a:rPr lang="en-ZA" dirty="0"/>
+              <a:t>This allows the planner to evaluate the feasibility of a rescue operation at any exact millisecond."</a:t>
+            </a:r>
+          </a:p>
+        </p:txBody>
+      </p:sp>
+      <p:sp>
+        <p:nvSpPr>
+          <p:cNvPr id="4" name="Slide Number Placeholder 3"/>
+          <p:cNvSpPr>
+            <a:spLocks noGrp="1"/>
+          </p:cNvSpPr>
+          <p:nvPr>
+            <p:ph type="sldNum" sz="quarter" idx="5"/>
+          </p:nvPr>
+        </p:nvSpPr>
+        <p:spPr/>
+        <p:txBody>
+          <a:bodyPr/>
+          <a:lstStyle/>
+          <a:p>
+            <a:fld id="{C388E905-4B39-4285-AC49-8524FEB5A25F}" type="slidenum">
+              <a:rPr lang="en-ZA" smtClean="0"/>
+              <a:t>16</a:t>
+            </a:fld>
+            <a:endParaRPr lang="en-ZA"/>
+          </a:p>
+        </p:txBody>
+      </p:sp>
+    </p:spTree>
+    <p:extLst>
+      <p:ext uri="{BB962C8B-B14F-4D97-AF65-F5344CB8AC3E}">
+        <p14:creationId xmlns:p14="http://schemas.microsoft.com/office/powerpoint/2010/main" val="1307175732"/>
+      </p:ext>
+    </p:extLst>
+  </p:cSld>
+  <p:clrMapOvr>
+    <a:masterClrMapping/>
+  </p:clrMapOvr>
+</p:notes>
+</file>
+
+<file path=ppt/notesSlides/notesSlide4.xml><?xml version="1.0" encoding="utf-8"?>
 <p:notes xmlns:a="http://schemas.openxmlformats.org/drawingml/2006/main" xmlns:r="http://schemas.openxmlformats.org/officeDocument/2006/relationships" xmlns:p="http://schemas.openxmlformats.org/presentationml/2006/main">
   <p:cSld>
     <p:spTree>
@@ -11773,7 +11862,7 @@
                   <a:schemeClr val="bg1"/>
                 </a:solidFill>
               </a:rPr>
-              <a:t>Battery below 120</a:t>
+              <a:t>Battery below 110</a:t>
             </a:r>
             <a:endParaRPr lang="en-ZA" sz="2000" dirty="0">
               <a:solidFill>
@@ -11839,7 +11928,7 @@
                   <a:schemeClr val="bg1"/>
                 </a:solidFill>
               </a:rPr>
-              <a:t>Victim’s Health below 120</a:t>
+              <a:t>Victim’s Health below 110</a:t>
             </a:r>
             <a:endParaRPr lang="en-ZA" sz="2000" dirty="0">
               <a:solidFill>
@@ -11905,7 +11994,7 @@
                   <a:schemeClr val="bg1"/>
                 </a:solidFill>
               </a:rPr>
-              <a:t>Time below 360</a:t>
+              <a:t>Time below 100</a:t>
             </a:r>
             <a:endParaRPr lang="en-ZA" sz="2000" dirty="0">
               <a:solidFill>
